--- a/業務貢献報告書.pptx
+++ b/業務貢献報告書.pptx
@@ -12,9 +12,10 @@
     <p:sldId id="260" r:id="rId6"/>
     <p:sldId id="261" r:id="rId7"/>
     <p:sldId id="262" r:id="rId8"/>
+    <p:sldId id="263" r:id="rId9"/>
   </p:sldIdLst>
   <p:notesMasterIdLst>
-    <p:notesMasterId r:id="rId9"/>
+    <p:notesMasterId r:id="rId10"/>
   </p:notesMasterIdLst>
   <p:sldSz cx="12192000" cy="6858000"/>
   <p:notesSz cx="6858000" cy="12192000"/>
@@ -113,27 +114,28 @@
   <p:extLst>
     <p:ext uri="{521415D9-36F7-43E2-AB2F-B90AF26B5E84}">
       <p14:sectionLst xmlns:p14="http://schemas.microsoft.com/office/powerpoint/2010/main">
-        <p14:section name="概要" id="{d0ba5e8f-e78a-3bbe-d77c-c6394d6e3b07}">
+        <p14:section name="概要" id="{5994bdeb-faa3-f1ed-6fe9-92ae3e24efc3}">
           <p14:sldIdLst>
             <p14:sldId id="256"/>
             <p14:sldId id="257"/>
           </p14:sldIdLst>
         </p14:section>
-        <p14:section name="コスト削減・収益改善" id="{b062d020-ec87-f3d9-c2df-9dc83e7a7580}">
+        <p14:section name="コスト削減・収益改善" id="{a9a20a04-2ccf-f111-8fee-28012131875c}">
           <p14:sldIdLst>
             <p14:sldId id="258"/>
             <p14:sldId id="259"/>
+            <p14:sldId id="260"/>
           </p14:sldIdLst>
         </p14:section>
-        <p14:section name="DX推進" id="{7d2a7e79-bbd2-4470-e0b0-be107a5aca9f}">
+        <p14:section name="DX推進" id="{b973e4b6-c7c8-4d83-bdb3-c9932044d4b1}">
           <p14:sldIdLst>
-            <p14:sldId id="260"/>
             <p14:sldId id="261"/>
+            <p14:sldId id="262"/>
           </p14:sldIdLst>
         </p14:section>
-        <p14:section name="まとめ" id="{ce379431-0a7e-b75c-f4de-995a8dd00888}">
+        <p14:section name="まとめ" id="{b7af4daa-e0e8-fd4d-64b9-93c00c73de47}">
           <p14:sldIdLst>
-            <p14:sldId id="262"/>
+            <p14:sldId id="263"/>
           </p14:sldIdLst>
         </p14:section>
       </p14:sectionLst>
@@ -157,7 +159,7 @@
           <a:lstStyle/>
           <a:p>
             <a:pPr>
-              <a:defRPr sz="1400" b="0" i="0" u="none" strike="noStrike">
+              <a:defRPr sz="1300" b="0" i="0" u="none" strike="noStrike">
                 <a:solidFill>
                   <a:srgbClr val="1F4D3A"/>
                 </a:solidFill>
@@ -165,13 +167,13 @@
               </a:defRPr>
             </a:pPr>
             <a:r>
-              <a:rPr sz="1400" b="0" i="0" u="none" strike="noStrike">
+              <a:rPr sz="1300" b="0" i="0" u="none" strike="noStrike">
                 <a:solidFill>
                   <a:srgbClr val="1F4D3A"/>
                 </a:solidFill>
                 <a:latin typeface="+mn-lt"/>
               </a:rPr>
-              <a:t>1tあたりの改善額（円）</a:t>
+              <a:t>取引先別の年間効果（万円）</a:t>
             </a:r>
           </a:p>
         </c:rich>
@@ -183,7 +185,7 @@
     <c:plotArea>
       <c:layout/>
       <c:barChart>
-        <c:barDir val="col"/>
+        <c:barDir val="bar"/>
         <c:grouping val="clustered"/>
         <c:varyColors val="0"/>
         <c:ser>
@@ -195,7 +197,7 @@
               <c:strCache>
                 <c:ptCount val="1"/>
                 <c:pt idx="0">
-                  <c:v>1tあたりの改善額（円）</c:v>
+                  <c:v>年間効果（万円）</c:v>
                 </c:pt>
               </c:strCache>
             </c:strRef>
@@ -208,7 +210,7 @@
           </c:spPr>
           <c:invertIfNegative val="0"/>
           <c:dLbls>
-            <c:numFmt formatCode="#,##0" sourceLinked="0"/>
+            <c:numFmt formatCode="#,##0.#&quot;万円&quot;" sourceLinked="0"/>
             <c:txPr>
               <a:bodyPr/>
               <a:lstStyle/>
@@ -233,18 +235,21 @@
           </c:dLbls>
           <c:cat>
             <c:multiLvlStrRef>
-              <c:f>Sheet1!$A$2:$A$4</c:f>
+              <c:f>Sheet1!$A$2:$A$5</c:f>
               <c:multiLvlStrCache>
-                <c:ptCount val="3"/>
+                <c:ptCount val="4"/>
                 <c:lvl>
                   <c:pt idx="0">
-                    <c:v>新日本リプラス</c:v>
+                    <c:v>サニックス</c:v>
                   </c:pt>
                   <c:pt idx="1">
                     <c:v>フューチャー</c:v>
                   </c:pt>
                   <c:pt idx="2">
-                    <c:v>サニックス</c:v>
+                    <c:v>太平洋セメント</c:v>
+                  </c:pt>
+                  <c:pt idx="3">
+                    <c:v>新日本リプラス</c:v>
                   </c:pt>
                 </c:lvl>
               </c:multiLvlStrCache>
@@ -252,31 +257,309 @@
           </c:cat>
           <c:val>
             <c:numRef>
-              <c:f>Sheet1!$B$2:$B$4</c:f>
+              <c:f>Sheet1!$B$2:$B$5</c:f>
               <c:numCache>
                 <c:formatCode>General</c:formatCode>
-                <c:ptCount val="3"/>
+                <c:ptCount val="4"/>
                 <c:pt idx="0">
-                  <c:v>29000</c:v>
+                  <c:v>24</c:v>
                 </c:pt>
                 <c:pt idx="1">
-                  <c:v>3000</c:v>
+                  <c:v>86.4</c:v>
                 </c:pt>
                 <c:pt idx="2">
-                  <c:v>1000</c:v>
+                  <c:v>588</c:v>
+                </c:pt>
+                <c:pt idx="3">
+                  <c:v>696</c:v>
                 </c:pt>
               </c:numCache>
             </c:numRef>
           </c:val>
         </c:ser>
         <c:dLbls>
-          <c:numFmt formatCode="#,##0" sourceLinked="0"/>
+          <c:numFmt formatCode="#,##0.#&quot;万円&quot;" sourceLinked="0"/>
           <c:txPr>
             <a:bodyPr/>
             <a:lstStyle/>
             <a:p>
               <a:pPr>
                 <a:defRPr b="0" i="0" strike="noStrike" sz="1200" u="none">
+                  <a:solidFill>
+                    <a:srgbClr val="1E2A26"/>
+                  </a:solidFill>
+                  <a:latin typeface="+mn-lt"/>
+                </a:defRPr>
+              </a:pPr>
+            </a:p>
+          </c:txPr>
+          <c:showLegendKey val="0"/>
+          <c:showVal val="1"/>
+          <c:showCatName val="0"/>
+          <c:showSerName val="0"/>
+          <c:showPercent val="0"/>
+          <c:showBubbleSize val="0"/>
+          <c:showLeaderLines val="0"/>
+        </c:dLbls>
+        <c:gapWidth val="50"/>
+        <c:overlap val="0"/>
+        <c:axId val="2094734554"/>
+        <c:axId val="2094734552"/>
+        <c:axId val="2094734556"/>
+      </c:barChart>
+      <c:catAx>
+        <c:axId val="2094734554"/>
+        <c:scaling>
+          <c:orientation val="minMax"/>
+        </c:scaling>
+        <c:delete val="0"/>
+        <c:axPos val="l"/>
+        <c:numFmt formatCode="General" sourceLinked="1"/>
+        <c:majorTickMark val="out"/>
+        <c:minorTickMark val="none"/>
+        <c:tickLblPos val="nextTo"/>
+        <c:spPr>
+          <a:ln w="12700" cap="flat">
+            <a:solidFill>
+              <a:srgbClr val="888888"/>
+            </a:solidFill>
+            <a:prstDash val="solid"/>
+            <a:round/>
+          </a:ln>
+        </c:spPr>
+        <c:txPr>
+          <a:bodyPr/>
+          <a:lstStyle/>
+          <a:p>
+            <a:pPr>
+              <a:defRPr sz="1200" b="0" i="0" u="none" strike="noStrike">
+                <a:solidFill>
+                  <a:srgbClr val="1E2A26"/>
+                </a:solidFill>
+                <a:latin typeface="+mn-lt"/>
+              </a:defRPr>
+            </a:pPr>
+            <a:endParaRPr lang="en-US"/>
+          </a:p>
+        </c:txPr>
+        <c:crossAx val="2094734552"/>
+        <c:crosses val="autoZero"/>
+        <c:auto val="1"/>
+        <c:lblAlgn val="ctr"/>
+        <c:noMultiLvlLbl val="1"/>
+      </c:catAx>
+      <c:valAx>
+        <c:axId val="2094734552"/>
+        <c:scaling>
+          <c:orientation val="minMax"/>
+          <c:max val="850"/>
+        </c:scaling>
+        <c:delete val="1"/>
+        <c:axPos val="b"/>
+        <c:numFmt formatCode="General" sourceLinked="0"/>
+        <c:majorTickMark val="out"/>
+        <c:minorTickMark val="none"/>
+        <c:tickLblPos val="low"/>
+        <c:spPr>
+          <a:ln w="12700" cap="flat">
+            <a:solidFill>
+              <a:srgbClr val="888888"/>
+            </a:solidFill>
+            <a:prstDash val="solid"/>
+            <a:round/>
+          </a:ln>
+        </c:spPr>
+        <c:txPr>
+          <a:bodyPr/>
+          <a:lstStyle/>
+          <a:p>
+            <a:pPr>
+              <a:defRPr sz="1200" b="0" i="0" u="none" strike="noStrike">
+                <a:solidFill>
+                  <a:srgbClr val="000000"/>
+                </a:solidFill>
+                <a:latin typeface="Arial"/>
+              </a:defRPr>
+            </a:pPr>
+            <a:endParaRPr lang="en-US"/>
+          </a:p>
+        </c:txPr>
+        <c:crossAx val="2094734554"/>
+        <c:crosses val="autoZero"/>
+        <c:crossBetween val="between"/>
+      </c:valAx>
+      <c:spPr>
+        <a:noFill/>
+        <a:ln>
+          <a:noFill/>
+        </a:ln>
+        <a:effectLst/>
+      </c:spPr>
+    </c:plotArea>
+    <c:plotVisOnly val="1"/>
+    <c:dispBlanksAs val="span"/>
+  </c:chart>
+  <c:spPr>
+    <a:noFill/>
+    <a:ln>
+      <a:noFill/>
+    </a:ln>
+    <a:effectLst/>
+  </c:spPr>
+  <c:externalData r:id="rId1">
+    <c:autoUpdate val="0"/>
+  </c:externalData>
+</c:chartSpace>
+</file>
+
+<file path=ppt/charts/chart2.xml><?xml version="1.0" encoding="utf-8"?>
+<c:chartSpace xmlns:c="http://schemas.openxmlformats.org/drawingml/2006/chart" xmlns:a="http://schemas.openxmlformats.org/drawingml/2006/main" xmlns:r="http://schemas.openxmlformats.org/officeDocument/2006/relationships">
+  <c:date1904 val="0"/>
+  <c:roundedCorners val="1"/>
+  <c:chart>
+    <c:title>
+      <c:tx>
+        <c:rich>
+          <a:bodyPr/>
+          <a:lstStyle/>
+          <a:p>
+            <a:pPr>
+              <a:defRPr sz="1300" b="0" i="0" u="none" strike="noStrike">
+                <a:solidFill>
+                  <a:srgbClr val="1F4D3A"/>
+                </a:solidFill>
+                <a:latin typeface="+mn-lt"/>
+              </a:defRPr>
+            </a:pPr>
+            <a:r>
+              <a:rPr sz="1300" b="0" i="0" u="none" strike="noStrike">
+                <a:solidFill>
+                  <a:srgbClr val="1F4D3A"/>
+                </a:solidFill>
+                <a:latin typeface="+mn-lt"/>
+              </a:rPr>
+              <a:t>太平洋セメントの受け入れ量（月）</a:t>
+            </a:r>
+          </a:p>
+        </c:rich>
+      </c:tx>
+      <c:layout/>
+      <c:overlay val="0"/>
+    </c:title>
+    <c:autoTitleDeleted val="0"/>
+    <c:plotArea>
+      <c:layout/>
+      <c:barChart>
+        <c:barDir val="col"/>
+        <c:grouping val="clustered"/>
+        <c:varyColors val="0"/>
+        <c:ser>
+          <c:idx val="0"/>
+          <c:order val="0"/>
+          <c:tx>
+            <c:strRef>
+              <c:f>Sheet1!$B$1</c:f>
+              <c:strCache>
+                <c:ptCount val="1"/>
+                <c:pt idx="0">
+                  <c:v>受け入れ量（t/月）</c:v>
+                </c:pt>
+              </c:strCache>
+            </c:strRef>
+          </c:tx>
+          <c:spPr>
+            <a:solidFill>
+              <a:srgbClr val="C9DDD3"/>
+            </a:solidFill>
+            <a:effectLst/>
+          </c:spPr>
+          <c:invertIfNegative val="0"/>
+          <c:dLbls>
+            <c:numFmt formatCode="0&quot;t&quot;" sourceLinked="0"/>
+            <c:txPr>
+              <a:bodyPr/>
+              <a:lstStyle/>
+              <a:p>
+                <a:pPr>
+                  <a:defRPr b="0" i="0" strike="noStrike" sz="1600" u="none">
+                    <a:solidFill>
+                      <a:srgbClr val="1E2A26"/>
+                    </a:solidFill>
+                    <a:latin typeface="+mn-lt"/>
+                  </a:defRPr>
+                </a:pPr>
+              </a:p>
+            </c:txPr>
+            <c:showLegendKey val="0"/>
+            <c:showVal val="1"/>
+            <c:showCatName val="0"/>
+            <c:showSerName val="0"/>
+            <c:showPercent val="0"/>
+            <c:showBubbleSize val="0"/>
+            <c:showLeaderLines val="0"/>
+          </c:dLbls>
+          <c:dPt>
+            <c:idx val="0"/>
+            <c:invertIfNegative val="0"/>
+            <c:bubble3D val="0"/>
+            <c:spPr>
+              <a:solidFill>
+                <a:srgbClr val="C9DDD3"/>
+              </a:solidFill>
+              <a:effectLst/>
+            </c:spPr>
+          </c:dPt>
+          <c:dPt>
+            <c:idx val="1"/>
+            <c:invertIfNegative val="0"/>
+            <c:bubble3D val="0"/>
+            <c:spPr>
+              <a:solidFill>
+                <a:srgbClr val="2E8B6E"/>
+              </a:solidFill>
+              <a:effectLst/>
+            </c:spPr>
+          </c:dPt>
+          <c:cat>
+            <c:multiLvlStrRef>
+              <c:f>Sheet1!$A$2:$A$3</c:f>
+              <c:multiLvlStrCache>
+                <c:ptCount val="2"/>
+                <c:lvl>
+                  <c:pt idx="0">
+                    <c:v>以前</c:v>
+                  </c:pt>
+                  <c:pt idx="1">
+                    <c:v>現在</c:v>
+                  </c:pt>
+                </c:lvl>
+              </c:multiLvlStrCache>
+            </c:multiLvlStrRef>
+          </c:cat>
+          <c:val>
+            <c:numRef>
+              <c:f>Sheet1!$B$2:$B$3</c:f>
+              <c:numCache>
+                <c:formatCode>General</c:formatCode>
+                <c:ptCount val="2"/>
+                <c:pt idx="0">
+                  <c:v>30</c:v>
+                </c:pt>
+                <c:pt idx="1">
+                  <c:v>100</c:v>
+                </c:pt>
+              </c:numCache>
+            </c:numRef>
+          </c:val>
+        </c:ser>
+        <c:dLbls>
+          <c:numFmt formatCode="0&quot;t&quot;" sourceLinked="0"/>
+          <c:txPr>
+            <a:bodyPr/>
+            <a:lstStyle/>
+            <a:p>
+              <a:pPr>
+                <a:defRPr b="0" i="0" strike="noStrike" sz="1600" u="none">
                   <a:solidFill>
                     <a:srgbClr val="1E2A26"/>
                   </a:solidFill>
@@ -324,7 +607,7 @@
           <a:lstStyle/>
           <a:p>
             <a:pPr>
-              <a:defRPr sz="1200" b="0" i="0" u="none" strike="noStrike">
+              <a:defRPr sz="1400" b="0" i="0" u="none" strike="noStrike">
                 <a:solidFill>
                   <a:srgbClr val="1E2A26"/>
                 </a:solidFill>
@@ -344,6 +627,7 @@
         <c:axId val="2094734552"/>
         <c:scaling>
           <c:orientation val="minMax"/>
+          <c:max val="120"/>
         </c:scaling>
         <c:delete val="1"/>
         <c:axPos val="l"/>
@@ -1062,7 +1346,7 @@
           <a:p>
             <a:r>
               <a:rPr lang="en-US" dirty="0"/>
-              <a:t/>
+              <a:t>当初は電話で何度か打診し、無償なら引き取るという回答でしたが、直接訪問してお願いしたことで1円/kgでの買い取りとなり、売買契約を結びました。処分費28円/kgが不要になり、1kgあたり29円の改善です。</a:t>
             </a:r>
             <a:endParaRPr lang="en-US" dirty="0"/>
           </a:p>
@@ -1350,6 +1634,94 @@
             <a:fld id="{F7021451-1387-4CA6-816F-3879F97B5CBC}" type="slidenum">
               <a:rPr lang="en-US"/>
               <a:t>7</a:t>
+            </a:fld>
+            <a:endParaRPr lang="en-US"/>
+          </a:p>
+        </p:txBody>
+      </p:sp>
+    </p:spTree>
+    <p:extLst>
+      <p:ext uri="{BB962C8B-B14F-4D97-AF65-F5344CB8AC3E}">
+        <p14:creationId xmlns:p14="http://schemas.microsoft.com/office/powerpoint/2010/main" val="1024086991"/>
+      </p:ext>
+    </p:extLst>
+  </p:cSld>
+  <p:clrMapOvr>
+    <a:masterClrMapping/>
+  </p:clrMapOvr>
+</p:notes>
+</file>
+
+<file path=ppt/notesSlides/notesSlide8.xml><?xml version="1.0" encoding="utf-8"?>
+<p:notes xmlns:a="http://schemas.openxmlformats.org/drawingml/2006/main" xmlns:r="http://schemas.openxmlformats.org/officeDocument/2006/relationships" xmlns:p="http://schemas.openxmlformats.org/presentationml/2006/main">
+  <p:cSld>
+    <p:spTree>
+      <p:nvGrpSpPr>
+        <p:cNvPr id="1" name=""/>
+        <p:cNvGrpSpPr/>
+        <p:nvPr/>
+      </p:nvGrpSpPr>
+      <p:grpSpPr>
+        <a:xfrm>
+          <a:off x="0" y="0"/>
+          <a:ext cx="0" cy="0"/>
+          <a:chOff x="0" y="0"/>
+          <a:chExt cx="0" cy="0"/>
+        </a:xfrm>
+      </p:grpSpPr>
+      <p:sp>
+        <p:nvSpPr>
+          <p:cNvPr id="2" name="Slide Image Placeholder 1"/>
+          <p:cNvSpPr>
+            <a:spLocks noGrp="1" noRot="1" noChangeAspect="1"/>
+          </p:cNvSpPr>
+          <p:nvPr>
+            <p:ph type="sldImg"/>
+          </p:nvPr>
+        </p:nvSpPr>
+        <p:spPr/>
+      </p:sp>
+      <p:sp>
+        <p:nvSpPr>
+          <p:cNvPr id="3" name="Notes Placeholder 2"/>
+          <p:cNvSpPr>
+            <a:spLocks noGrp="1"/>
+          </p:cNvSpPr>
+          <p:nvPr>
+            <p:ph type="body" idx="1"/>
+          </p:nvPr>
+        </p:nvSpPr>
+        <p:spPr/>
+        <p:txBody>
+          <a:bodyPr/>
+          <a:lstStyle/>
+          <a:p>
+            <a:r>
+              <a:rPr lang="en-US" dirty="0"/>
+              <a:t/>
+            </a:r>
+            <a:endParaRPr lang="en-US" dirty="0"/>
+          </a:p>
+        </p:txBody>
+      </p:sp>
+      <p:sp>
+        <p:nvSpPr>
+          <p:cNvPr id="4" name="Slide Number Placeholder 3"/>
+          <p:cNvSpPr>
+            <a:spLocks noGrp="1"/>
+          </p:cNvSpPr>
+          <p:nvPr>
+            <p:ph type="sldNum" sz="quarter" idx="10"/>
+          </p:nvPr>
+        </p:nvSpPr>
+        <p:spPr/>
+        <p:txBody>
+          <a:bodyPr/>
+          <a:lstStyle/>
+          <a:p>
+            <a:fld id="{F7021451-1387-4CA6-816F-3879F97B5CBC}" type="slidenum">
+              <a:rPr lang="en-US"/>
+              <a:t>8</a:t>
             </a:fld>
             <a:endParaRPr lang="en-US"/>
           </a:p>
@@ -2212,7 +2584,7 @@
                 <a:ea typeface="Meiryo UI" pitchFamily="34" charset="-122"/>
                 <a:cs typeface="Meiryo UI" pitchFamily="34" charset="-120"/>
               </a:rPr>
-              <a:t>取引先との交渉と新規開拓で単価を改善し、DXツールの開発で日常業務の手間を減らしました。</a:t>
+              <a:t>取引先との交渉と新規開拓で、年間約1,394万円のコスト削減・収益改善につなげました。</a:t>
             </a:r>
             <a:endParaRPr lang="en-US" sz="1600" dirty="0"/>
           </a:p>
@@ -2220,18 +2592,18 @@
       </p:sp>
       <p:sp>
         <p:nvSpPr>
-          <p:cNvPr id="4" name="stat0"/>
+          <p:cNvPr id="4" name="total"/>
           <p:cNvSpPr/>
           <p:nvPr/>
         </p:nvSpPr>
         <p:spPr>
           <a:xfrm>
             <a:off x="548640" y="1783080"/>
-            <a:ext cx="2606040" cy="2240280"/>
+            <a:ext cx="3931920" cy="2606040"/>
           </a:xfrm>
           <a:prstGeom prst="roundRect">
             <a:avLst>
-              <a:gd name="adj" fmla="val 4898"/>
+              <a:gd name="adj" fmla="val 4211"/>
             </a:avLst>
           </a:prstGeom>
           <a:solidFill>
@@ -2248,77 +2620,77 @@
         </p:nvSpPr>
         <p:spPr>
           <a:xfrm>
-            <a:off x="777240" y="2011680"/>
-            <a:ext cx="2148840" cy="914400"/>
-          </a:xfrm>
-          <a:prstGeom prst="rect">
-            <a:avLst/>
-          </a:prstGeom>
-          <a:noFill/>
-          <a:ln/>
-        </p:spPr>
-        <p:txBody>
-          <a:bodyPr wrap="square" lIns="0" tIns="0" rIns="0" bIns="0" rtlCol="0" anchor="b"/>
+            <a:off x="822960" y="1965960"/>
+            <a:ext cx="3383280" cy="365760"/>
+          </a:xfrm>
+          <a:prstGeom prst="rect">
+            <a:avLst/>
+          </a:prstGeom>
+          <a:noFill/>
+          <a:ln/>
+        </p:spPr>
+        <p:txBody>
+          <a:bodyPr wrap="square" lIns="0" tIns="0" rIns="0" bIns="0" rtlCol="0" anchor="ctr"/>
           <a:lstStyle/>
           <a:p>
             <a:pPr indent="0" marL="0">
               <a:buNone/>
             </a:pPr>
             <a:r>
-              <a:rPr lang="en-US" sz="4400" b="1" dirty="0">
-                <a:solidFill>
-                  <a:schemeClr val="bg1"/>
+              <a:rPr lang="en-US" sz="1500" b="1" dirty="0">
+                <a:solidFill>
+                  <a:schemeClr val="accent4"/>
                 </a:solidFill>
                 <a:latin typeface="Meiryo UI" pitchFamily="34" charset="0"/>
                 <a:ea typeface="Meiryo UI" pitchFamily="34" charset="-122"/>
                 <a:cs typeface="Meiryo UI" pitchFamily="34" charset="-120"/>
               </a:rPr>
-              <a:t>29</a:t>
-            </a:r>
+              <a:t>年間の効果額（年換算）</a:t>
+            </a:r>
+            <a:endParaRPr lang="en-US" sz="1500" dirty="0"/>
+          </a:p>
+        </p:txBody>
+      </p:sp>
+      <p:sp>
+        <p:nvSpPr>
+          <p:cNvPr id="6" name="Text 4"/>
+          <p:cNvSpPr txBox="1"/>
+          <p:nvPr/>
+        </p:nvSpPr>
+        <p:spPr>
+          <a:xfrm>
+            <a:off x="822960" y="2377440"/>
+            <a:ext cx="3611880" cy="1097280"/>
+          </a:xfrm>
+          <a:prstGeom prst="rect">
+            <a:avLst/>
+          </a:prstGeom>
+          <a:noFill/>
+          <a:ln/>
+        </p:spPr>
+        <p:txBody>
+          <a:bodyPr wrap="square" lIns="0" tIns="0" rIns="0" bIns="0" rtlCol="0" anchor="ctr"/>
+          <a:lstStyle/>
+          <a:p>
             <a:pPr indent="0" marL="0">
               <a:buNone/>
             </a:pPr>
             <a:r>
-              <a:rPr lang="en-US" sz="1500" b="1" dirty="0">
-                <a:solidFill>
-                  <a:schemeClr val="accent4"/>
+              <a:rPr lang="en-US" sz="4400" b="1" dirty="0">
+                <a:solidFill>
+                  <a:schemeClr val="bg1"/>
                 </a:solidFill>
                 <a:latin typeface="Meiryo UI" pitchFamily="34" charset="0"/>
                 <a:ea typeface="Meiryo UI" pitchFamily="34" charset="-122"/>
                 <a:cs typeface="Meiryo UI" pitchFamily="34" charset="-120"/>
               </a:rPr>
-              <a:t> 円/kg 改善</a:t>
-            </a:r>
-            <a:endParaRPr lang="en-US" sz="4400" dirty="0"/>
-          </a:p>
-        </p:txBody>
-      </p:sp>
-      <p:sp>
-        <p:nvSpPr>
-          <p:cNvPr id="6" name="Text 4"/>
-          <p:cNvSpPr txBox="1"/>
-          <p:nvPr/>
-        </p:nvSpPr>
-        <p:spPr>
-          <a:xfrm>
-            <a:off x="777240" y="3063240"/>
-            <a:ext cx="2148840" cy="777240"/>
-          </a:xfrm>
-          <a:prstGeom prst="rect">
-            <a:avLst/>
-          </a:prstGeom>
-          <a:noFill/>
-          <a:ln/>
-        </p:spPr>
-        <p:txBody>
-          <a:bodyPr wrap="square" lIns="0" tIns="0" rIns="0" bIns="0" rtlCol="0" anchor="t"/>
-          <a:lstStyle/>
-          <a:p>
+              <a:t>約1,394</a:t>
+            </a:r>
             <a:pPr indent="0" marL="0">
               <a:buNone/>
             </a:pPr>
             <a:r>
-              <a:rPr lang="en-US" sz="1300" dirty="0">
+              <a:rPr lang="en-US" sz="2000" b="1" dirty="0">
                 <a:solidFill>
                   <a:schemeClr val="bg1"/>
                 </a:solidFill>
@@ -2326,10 +2698,32 @@
                 <a:ea typeface="Meiryo UI" pitchFamily="34" charset="-122"/>
                 <a:cs typeface="Meiryo UI" pitchFamily="34" charset="-120"/>
               </a:rPr>
-              <a:t>C級パレット</a:t>
-            </a:r>
-            <a:endParaRPr lang="en-US" sz="1300" dirty="0"/>
-          </a:p>
+              <a:t> 万円</a:t>
+            </a:r>
+            <a:endParaRPr lang="en-US" sz="4400" dirty="0"/>
+          </a:p>
+        </p:txBody>
+      </p:sp>
+      <p:sp>
+        <p:nvSpPr>
+          <p:cNvPr id="7" name="Text 5"/>
+          <p:cNvSpPr txBox="1"/>
+          <p:nvPr/>
+        </p:nvSpPr>
+        <p:spPr>
+          <a:xfrm>
+            <a:off x="822960" y="3520440"/>
+            <a:ext cx="3383280" cy="731520"/>
+          </a:xfrm>
+          <a:prstGeom prst="rect">
+            <a:avLst/>
+          </a:prstGeom>
+          <a:noFill/>
+          <a:ln/>
+        </p:spPr>
+        <p:txBody>
+          <a:bodyPr wrap="square" lIns="0" tIns="0" rIns="0" bIns="0" rtlCol="0" anchor="ctr"/>
+          <a:lstStyle/>
           <a:p>
             <a:pPr indent="0" marL="0">
               <a:buNone/>
@@ -2337,32 +2731,65 @@
             <a:r>
               <a:rPr lang="en-US" sz="1300" dirty="0">
                 <a:solidFill>
-                  <a:schemeClr val="bg1"/>
+                  <a:schemeClr val="accent6"/>
                 </a:solidFill>
                 <a:latin typeface="Meiryo UI" pitchFamily="34" charset="0"/>
                 <a:ea typeface="Meiryo UI" pitchFamily="34" charset="-122"/>
                 <a:cs typeface="Meiryo UI" pitchFamily="34" charset="-120"/>
               </a:rPr>
-              <a:t>処分→買取へ転換</a:t>
+              <a:t>月あたり約116万円</a:t>
             </a:r>
             <a:endParaRPr lang="en-US" sz="1300" dirty="0"/>
           </a:p>
-        </p:txBody>
-      </p:sp>
-      <p:sp>
-        <p:nvSpPr>
-          <p:cNvPr id="7" name="stat1"/>
+          <a:p>
+            <a:pPr indent="0" marL="0">
+              <a:buNone/>
+            </a:pPr>
+            <a:r>
+              <a:rPr lang="en-US" sz="1300" dirty="0">
+                <a:solidFill>
+                  <a:schemeClr val="accent6"/>
+                </a:solidFill>
+                <a:latin typeface="Meiryo UI" pitchFamily="34" charset="0"/>
+                <a:ea typeface="Meiryo UI" pitchFamily="34" charset="-122"/>
+                <a:cs typeface="Meiryo UI" pitchFamily="34" charset="-120"/>
+              </a:rPr>
+              <a:t>取引先4社の条件改善の合計</a:t>
+            </a:r>
+            <a:endParaRPr lang="en-US" sz="1300" dirty="0"/>
+          </a:p>
+        </p:txBody>
+      </p:sp>
+      <p:graphicFrame>
+        <p:nvGraphicFramePr>
+          <p:cNvPr id="8" name="Chart 0" descr=""/>
+          <p:cNvGraphicFramePr/>
+          <p:nvPr/>
+        </p:nvGraphicFramePr>
+        <p:xfrm>
+          <a:off x="4754880" y="1737360"/>
+          <a:ext cx="6858000" cy="2697480"/>
+        </p:xfrm>
+        <a:graphic xmlns:a="http://schemas.openxmlformats.org/drawingml/2006/main">
+          <a:graphicData uri="http://schemas.openxmlformats.org/drawingml/2006/chart">
+            <c:chart xmlns:c="http://schemas.openxmlformats.org/drawingml/2006/chart" r:id="rId1"/>
+          </a:graphicData>
+        </a:graphic>
+      </p:graphicFrame>
+      <p:sp>
+        <p:nvSpPr>
+          <p:cNvPr id="9" name="pillar0"/>
           <p:cNvSpPr/>
           <p:nvPr/>
         </p:nvSpPr>
         <p:spPr>
           <a:xfrm>
-            <a:off x="3367735" y="1783080"/>
-            <a:ext cx="2606040" cy="2240280"/>
+            <a:off x="548640" y="4617720"/>
+            <a:ext cx="5440680" cy="1554480"/>
           </a:xfrm>
           <a:prstGeom prst="roundRect">
             <a:avLst>
-              <a:gd name="adj" fmla="val 4898"/>
+              <a:gd name="adj" fmla="val 7059"/>
             </a:avLst>
           </a:prstGeom>
           <a:solidFill>
@@ -2373,67 +2800,112 @@
       </p:sp>
       <p:sp>
         <p:nvSpPr>
-          <p:cNvPr id="8" name="Text 6"/>
+          <p:cNvPr id="10" name="Shape 7"/>
+          <p:cNvSpPr/>
+          <p:nvPr/>
+        </p:nvSpPr>
+        <p:spPr>
+          <a:xfrm>
+            <a:off x="822960" y="4846320"/>
+            <a:ext cx="502920" cy="502920"/>
+          </a:xfrm>
+          <a:prstGeom prst="ellipse">
+            <a:avLst/>
+          </a:prstGeom>
+          <a:solidFill>
+            <a:schemeClr val="accent2"/>
+          </a:solidFill>
+          <a:ln/>
+        </p:spPr>
+      </p:sp>
+      <p:sp>
+        <p:nvSpPr>
+          <p:cNvPr id="11" name="Text 8"/>
           <p:cNvSpPr txBox="1"/>
           <p:nvPr/>
         </p:nvSpPr>
         <p:spPr>
           <a:xfrm>
-            <a:off x="3596335" y="2011680"/>
-            <a:ext cx="2148840" cy="914400"/>
-          </a:xfrm>
-          <a:prstGeom prst="rect">
-            <a:avLst/>
-          </a:prstGeom>
-          <a:noFill/>
-          <a:ln/>
-        </p:spPr>
-        <p:txBody>
-          <a:bodyPr wrap="square" lIns="0" tIns="0" rIns="0" bIns="0" rtlCol="0" anchor="b"/>
-          <a:lstStyle/>
-          <a:p>
-            <a:pPr indent="0" marL="0">
-              <a:buNone/>
-            </a:pPr>
-            <a:r>
-              <a:rPr lang="en-US" sz="4400" b="1" dirty="0">
-                <a:solidFill>
-                  <a:schemeClr val="tx2"/>
+            <a:off x="822960" y="4846320"/>
+            <a:ext cx="502920" cy="502920"/>
+          </a:xfrm>
+          <a:prstGeom prst="rect">
+            <a:avLst/>
+          </a:prstGeom>
+          <a:noFill/>
+          <a:ln/>
+        </p:spPr>
+        <p:txBody>
+          <a:bodyPr wrap="square" lIns="0" tIns="0" rIns="0" bIns="0" rtlCol="0" anchor="ctr"/>
+          <a:lstStyle/>
+          <a:p>
+            <a:pPr algn="ctr" indent="0" marL="0">
+              <a:buNone/>
+            </a:pPr>
+            <a:r>
+              <a:rPr lang="en-US" sz="1400" b="1" dirty="0">
+                <a:solidFill>
+                  <a:schemeClr val="bg1"/>
                 </a:solidFill>
                 <a:latin typeface="Meiryo UI" pitchFamily="34" charset="0"/>
                 <a:ea typeface="Meiryo UI" pitchFamily="34" charset="-122"/>
                 <a:cs typeface="Meiryo UI" pitchFamily="34" charset="-120"/>
               </a:rPr>
-              <a:t>+3</a:t>
-            </a:r>
+              <a:t>1</a:t>
+            </a:r>
+            <a:endParaRPr lang="en-US" sz="1400" dirty="0"/>
+          </a:p>
+        </p:txBody>
+      </p:sp>
+      <p:sp>
+        <p:nvSpPr>
+          <p:cNvPr id="12" name="Text 9"/>
+          <p:cNvSpPr txBox="1"/>
+          <p:nvPr/>
+        </p:nvSpPr>
+        <p:spPr>
+          <a:xfrm>
+            <a:off x="1508760" y="4846320"/>
+            <a:ext cx="4206240" cy="502920"/>
+          </a:xfrm>
+          <a:prstGeom prst="rect">
+            <a:avLst/>
+          </a:prstGeom>
+          <a:noFill/>
+          <a:ln/>
+        </p:spPr>
+        <p:txBody>
+          <a:bodyPr wrap="square" lIns="0" tIns="0" rIns="0" bIns="0" rtlCol="0" anchor="ctr"/>
+          <a:lstStyle/>
+          <a:p>
             <a:pPr indent="0" marL="0">
               <a:buNone/>
             </a:pPr>
             <a:r>
-              <a:rPr lang="en-US" sz="1500" b="1" dirty="0">
-                <a:solidFill>
-                  <a:schemeClr val="accent2"/>
+              <a:rPr lang="en-US" sz="1800" b="1" dirty="0">
+                <a:solidFill>
+                  <a:schemeClr val="tx2"/>
                 </a:solidFill>
                 <a:latin typeface="Meiryo UI" pitchFamily="34" charset="0"/>
                 <a:ea typeface="Meiryo UI" pitchFamily="34" charset="-122"/>
                 <a:cs typeface="Meiryo UI" pitchFamily="34" charset="-120"/>
               </a:rPr>
-              <a:t> 円/kg</a:t>
-            </a:r>
-            <a:endParaRPr lang="en-US" sz="4400" dirty="0"/>
-          </a:p>
-        </p:txBody>
-      </p:sp>
-      <p:sp>
-        <p:nvSpPr>
-          <p:cNvPr id="9" name="Text 7"/>
+              <a:t>コスト削減・収益改善</a:t>
+            </a:r>
+            <a:endParaRPr lang="en-US" sz="1800" dirty="0"/>
+          </a:p>
+        </p:txBody>
+      </p:sp>
+      <p:sp>
+        <p:nvSpPr>
+          <p:cNvPr id="13" name="Text 10"/>
           <p:cNvSpPr txBox="1"/>
           <p:nvPr/>
         </p:nvSpPr>
         <p:spPr>
           <a:xfrm>
-            <a:off x="3596335" y="3063240"/>
-            <a:ext cx="2148840" cy="777240"/>
+            <a:off x="1508760" y="5394960"/>
+            <a:ext cx="4206240" cy="685800"/>
           </a:xfrm>
           <a:prstGeom prst="rect">
             <a:avLst/>
@@ -2449,85 +2921,127 @@
               <a:buNone/>
             </a:pPr>
             <a:r>
-              <a:rPr lang="en-US" sz="1300" dirty="0">
-                <a:solidFill>
-                  <a:schemeClr val="accent5"/>
+              <a:rPr lang="en-US" sz="1400" dirty="0">
+                <a:solidFill>
+                  <a:schemeClr val="tx1"/>
                 </a:solidFill>
                 <a:latin typeface="Meiryo UI" pitchFamily="34" charset="0"/>
                 <a:ea typeface="Meiryo UI" pitchFamily="34" charset="-122"/>
                 <a:cs typeface="Meiryo UI" pitchFamily="34" charset="-120"/>
               </a:rPr>
-              <a:t>減容品の販売単価</a:t>
-            </a:r>
-            <a:endParaRPr lang="en-US" sz="1300" dirty="0"/>
-          </a:p>
-          <a:p>
-            <a:pPr indent="0" marL="0">
-              <a:buNone/>
-            </a:pPr>
-            <a:r>
-              <a:rPr lang="en-US" sz="1300" dirty="0">
-                <a:solidFill>
-                  <a:schemeClr val="accent5"/>
+              <a:t>新日本リプラスの新規開拓、太平洋セメントへの振り替え拡大、販売単価の値上げ、処分費の値下げ</a:t>
+            </a:r>
+            <a:endParaRPr lang="en-US" sz="1400" dirty="0"/>
+          </a:p>
+        </p:txBody>
+      </p:sp>
+      <p:sp>
+        <p:nvSpPr>
+          <p:cNvPr id="14" name="pillar1"/>
+          <p:cNvSpPr/>
+          <p:nvPr/>
+        </p:nvSpPr>
+        <p:spPr>
+          <a:xfrm>
+            <a:off x="6172200" y="4617720"/>
+            <a:ext cx="5440680" cy="1554480"/>
+          </a:xfrm>
+          <a:prstGeom prst="roundRect">
+            <a:avLst>
+              <a:gd name="adj" fmla="val 7059"/>
+            </a:avLst>
+          </a:prstGeom>
+          <a:solidFill>
+            <a:schemeClr val="bg2"/>
+          </a:solidFill>
+          <a:ln/>
+        </p:spPr>
+      </p:sp>
+      <p:sp>
+        <p:nvSpPr>
+          <p:cNvPr id="15" name="Shape 12"/>
+          <p:cNvSpPr/>
+          <p:nvPr/>
+        </p:nvSpPr>
+        <p:spPr>
+          <a:xfrm>
+            <a:off x="6446520" y="4846320"/>
+            <a:ext cx="502920" cy="502920"/>
+          </a:xfrm>
+          <a:prstGeom prst="ellipse">
+            <a:avLst/>
+          </a:prstGeom>
+          <a:solidFill>
+            <a:schemeClr val="accent2"/>
+          </a:solidFill>
+          <a:ln/>
+        </p:spPr>
+      </p:sp>
+      <p:sp>
+        <p:nvSpPr>
+          <p:cNvPr id="16" name="Text 13"/>
+          <p:cNvSpPr txBox="1"/>
+          <p:nvPr/>
+        </p:nvSpPr>
+        <p:spPr>
+          <a:xfrm>
+            <a:off x="6446520" y="4846320"/>
+            <a:ext cx="502920" cy="502920"/>
+          </a:xfrm>
+          <a:prstGeom prst="rect">
+            <a:avLst/>
+          </a:prstGeom>
+          <a:noFill/>
+          <a:ln/>
+        </p:spPr>
+        <p:txBody>
+          <a:bodyPr wrap="square" lIns="0" tIns="0" rIns="0" bIns="0" rtlCol="0" anchor="ctr"/>
+          <a:lstStyle/>
+          <a:p>
+            <a:pPr algn="ctr" indent="0" marL="0">
+              <a:buNone/>
+            </a:pPr>
+            <a:r>
+              <a:rPr lang="en-US" sz="1400" b="1" dirty="0">
+                <a:solidFill>
+                  <a:schemeClr val="bg1"/>
                 </a:solidFill>
                 <a:latin typeface="Meiryo UI" pitchFamily="34" charset="0"/>
                 <a:ea typeface="Meiryo UI" pitchFamily="34" charset="-122"/>
                 <a:cs typeface="Meiryo UI" pitchFamily="34" charset="-120"/>
               </a:rPr>
-              <a:t>7円→10円（43%増）</a:t>
-            </a:r>
-            <a:endParaRPr lang="en-US" sz="1300" dirty="0"/>
-          </a:p>
-        </p:txBody>
-      </p:sp>
-      <p:sp>
-        <p:nvSpPr>
-          <p:cNvPr id="10" name="stat2"/>
-          <p:cNvSpPr/>
-          <p:nvPr/>
-        </p:nvSpPr>
-        <p:spPr>
-          <a:xfrm>
-            <a:off x="6186830" y="1783080"/>
-            <a:ext cx="2606040" cy="2240280"/>
-          </a:xfrm>
-          <a:prstGeom prst="roundRect">
-            <a:avLst>
-              <a:gd name="adj" fmla="val 4898"/>
-            </a:avLst>
-          </a:prstGeom>
-          <a:solidFill>
-            <a:schemeClr val="bg2"/>
-          </a:solidFill>
-          <a:ln/>
-        </p:spPr>
-      </p:sp>
-      <p:sp>
-        <p:nvSpPr>
-          <p:cNvPr id="11" name="Text 9"/>
+              <a:t>2</a:t>
+            </a:r>
+            <a:endParaRPr lang="en-US" sz="1400" dirty="0"/>
+          </a:p>
+        </p:txBody>
+      </p:sp>
+      <p:sp>
+        <p:nvSpPr>
+          <p:cNvPr id="17" name="Text 14"/>
           <p:cNvSpPr txBox="1"/>
           <p:nvPr/>
         </p:nvSpPr>
         <p:spPr>
           <a:xfrm>
-            <a:off x="6415430" y="2011680"/>
-            <a:ext cx="2148840" cy="914400"/>
-          </a:xfrm>
-          <a:prstGeom prst="rect">
-            <a:avLst/>
-          </a:prstGeom>
-          <a:noFill/>
-          <a:ln/>
-        </p:spPr>
-        <p:txBody>
-          <a:bodyPr wrap="square" lIns="0" tIns="0" rIns="0" bIns="0" rtlCol="0" anchor="b"/>
+            <a:off x="7132320" y="4846320"/>
+            <a:ext cx="4206240" cy="502920"/>
+          </a:xfrm>
+          <a:prstGeom prst="rect">
+            <a:avLst/>
+          </a:prstGeom>
+          <a:noFill/>
+          <a:ln/>
+        </p:spPr>
+        <p:txBody>
+          <a:bodyPr wrap="square" lIns="0" tIns="0" rIns="0" bIns="0" rtlCol="0" anchor="ctr"/>
           <a:lstStyle/>
           <a:p>
             <a:pPr indent="0" marL="0">
               <a:buNone/>
             </a:pPr>
             <a:r>
-              <a:rPr lang="en-US" sz="4400" b="1" dirty="0">
+              <a:rPr lang="en-US" sz="1800" b="1" dirty="0">
                 <a:solidFill>
                   <a:schemeClr val="tx2"/>
                 </a:solidFill>
@@ -2535,502 +3049,22 @@
                 <a:ea typeface="Meiryo UI" pitchFamily="34" charset="-122"/>
                 <a:cs typeface="Meiryo UI" pitchFamily="34" charset="-120"/>
               </a:rPr>
-              <a:t>−1</a:t>
-            </a:r>
-            <a:pPr indent="0" marL="0">
-              <a:buNone/>
-            </a:pPr>
-            <a:r>
-              <a:rPr lang="en-US" sz="1500" b="1" dirty="0">
-                <a:solidFill>
-                  <a:schemeClr val="accent2"/>
-                </a:solidFill>
-                <a:latin typeface="Meiryo UI" pitchFamily="34" charset="0"/>
-                <a:ea typeface="Meiryo UI" pitchFamily="34" charset="-122"/>
-                <a:cs typeface="Meiryo UI" pitchFamily="34" charset="-120"/>
-              </a:rPr>
-              <a:t> 円/kg</a:t>
-            </a:r>
-            <a:endParaRPr lang="en-US" sz="4400" dirty="0"/>
-          </a:p>
-        </p:txBody>
-      </p:sp>
-      <p:sp>
-        <p:nvSpPr>
-          <p:cNvPr id="12" name="Text 10"/>
+              <a:t>DX推進</a:t>
+            </a:r>
+            <a:endParaRPr lang="en-US" sz="1800" dirty="0"/>
+          </a:p>
+        </p:txBody>
+      </p:sp>
+      <p:sp>
+        <p:nvSpPr>
+          <p:cNvPr id="18" name="Text 15"/>
           <p:cNvSpPr txBox="1"/>
           <p:nvPr/>
         </p:nvSpPr>
         <p:spPr>
           <a:xfrm>
-            <a:off x="6415430" y="3063240"/>
-            <a:ext cx="2148840" cy="777240"/>
-          </a:xfrm>
-          <a:prstGeom prst="rect">
-            <a:avLst/>
-          </a:prstGeom>
-          <a:noFill/>
-          <a:ln/>
-        </p:spPr>
-        <p:txBody>
-          <a:bodyPr wrap="square" lIns="0" tIns="0" rIns="0" bIns="0" rtlCol="0" anchor="t"/>
-          <a:lstStyle/>
-          <a:p>
-            <a:pPr indent="0" marL="0">
-              <a:buNone/>
-            </a:pPr>
-            <a:r>
-              <a:rPr lang="en-US" sz="1300" dirty="0">
-                <a:solidFill>
-                  <a:schemeClr val="accent5"/>
-                </a:solidFill>
-                <a:latin typeface="Meiryo UI" pitchFamily="34" charset="0"/>
-                <a:ea typeface="Meiryo UI" pitchFamily="34" charset="-122"/>
-                <a:cs typeface="Meiryo UI" pitchFamily="34" charset="-120"/>
-              </a:rPr>
-              <a:t>処分費の値下げ</a:t>
-            </a:r>
-            <a:endParaRPr lang="en-US" sz="1300" dirty="0"/>
-          </a:p>
-          <a:p>
-            <a:pPr indent="0" marL="0">
-              <a:buNone/>
-            </a:pPr>
-            <a:r>
-              <a:rPr lang="en-US" sz="1300" dirty="0">
-                <a:solidFill>
-                  <a:schemeClr val="accent5"/>
-                </a:solidFill>
-                <a:latin typeface="Meiryo UI" pitchFamily="34" charset="0"/>
-                <a:ea typeface="Meiryo UI" pitchFamily="34" charset="-122"/>
-                <a:cs typeface="Meiryo UI" pitchFamily="34" charset="-120"/>
-              </a:rPr>
-              <a:t>24円→23円</a:t>
-            </a:r>
-            <a:endParaRPr lang="en-US" sz="1300" dirty="0"/>
-          </a:p>
-        </p:txBody>
-      </p:sp>
-      <p:sp>
-        <p:nvSpPr>
-          <p:cNvPr id="13" name="stat3"/>
-          <p:cNvSpPr/>
-          <p:nvPr/>
-        </p:nvSpPr>
-        <p:spPr>
-          <a:xfrm>
-            <a:off x="9005926" y="1783080"/>
-            <a:ext cx="2606040" cy="2240280"/>
-          </a:xfrm>
-          <a:prstGeom prst="roundRect">
-            <a:avLst>
-              <a:gd name="adj" fmla="val 4898"/>
-            </a:avLst>
-          </a:prstGeom>
-          <a:solidFill>
-            <a:schemeClr val="bg2"/>
-          </a:solidFill>
-          <a:ln/>
-        </p:spPr>
-      </p:sp>
-      <p:sp>
-        <p:nvSpPr>
-          <p:cNvPr id="14" name="Text 12"/>
-          <p:cNvSpPr txBox="1"/>
-          <p:nvPr/>
-        </p:nvSpPr>
-        <p:spPr>
-          <a:xfrm>
-            <a:off x="9234526" y="2011680"/>
-            <a:ext cx="2148840" cy="914400"/>
-          </a:xfrm>
-          <a:prstGeom prst="rect">
-            <a:avLst/>
-          </a:prstGeom>
-          <a:noFill/>
-          <a:ln/>
-        </p:spPr>
-        <p:txBody>
-          <a:bodyPr wrap="square" lIns="0" tIns="0" rIns="0" bIns="0" rtlCol="0" anchor="b"/>
-          <a:lstStyle/>
-          <a:p>
-            <a:pPr indent="0" marL="0">
-              <a:buNone/>
-            </a:pPr>
-            <a:r>
-              <a:rPr lang="en-US" sz="4400" b="1" dirty="0">
-                <a:solidFill>
-                  <a:schemeClr val="tx2"/>
-                </a:solidFill>
-                <a:latin typeface="Meiryo UI" pitchFamily="34" charset="0"/>
-                <a:ea typeface="Meiryo UI" pitchFamily="34" charset="-122"/>
-                <a:cs typeface="Meiryo UI" pitchFamily="34" charset="-120"/>
-              </a:rPr>
-              <a:t>4</a:t>
-            </a:r>
-            <a:pPr indent="0" marL="0">
-              <a:buNone/>
-            </a:pPr>
-            <a:r>
-              <a:rPr lang="en-US" sz="1500" b="1" dirty="0">
-                <a:solidFill>
-                  <a:schemeClr val="accent2"/>
-                </a:solidFill>
-                <a:latin typeface="Meiryo UI" pitchFamily="34" charset="0"/>
-                <a:ea typeface="Meiryo UI" pitchFamily="34" charset="-122"/>
-                <a:cs typeface="Meiryo UI" pitchFamily="34" charset="-120"/>
-              </a:rPr>
-              <a:t> 件</a:t>
-            </a:r>
-            <a:endParaRPr lang="en-US" sz="4400" dirty="0"/>
-          </a:p>
-        </p:txBody>
-      </p:sp>
-      <p:sp>
-        <p:nvSpPr>
-          <p:cNvPr id="15" name="Text 13"/>
-          <p:cNvSpPr txBox="1"/>
-          <p:nvPr/>
-        </p:nvSpPr>
-        <p:spPr>
-          <a:xfrm>
-            <a:off x="9234526" y="3063240"/>
-            <a:ext cx="2148840" cy="777240"/>
-          </a:xfrm>
-          <a:prstGeom prst="rect">
-            <a:avLst/>
-          </a:prstGeom>
-          <a:noFill/>
-          <a:ln/>
-        </p:spPr>
-        <p:txBody>
-          <a:bodyPr wrap="square" lIns="0" tIns="0" rIns="0" bIns="0" rtlCol="0" anchor="t"/>
-          <a:lstStyle/>
-          <a:p>
-            <a:pPr indent="0" marL="0">
-              <a:buNone/>
-            </a:pPr>
-            <a:r>
-              <a:rPr lang="en-US" sz="1300" dirty="0">
-                <a:solidFill>
-                  <a:schemeClr val="accent5"/>
-                </a:solidFill>
-                <a:latin typeface="Meiryo UI" pitchFamily="34" charset="0"/>
-                <a:ea typeface="Meiryo UI" pitchFamily="34" charset="-122"/>
-                <a:cs typeface="Meiryo UI" pitchFamily="34" charset="-120"/>
-              </a:rPr>
-              <a:t>DXツールの開発・</a:t>
-            </a:r>
-            <a:endParaRPr lang="en-US" sz="1300" dirty="0"/>
-          </a:p>
-          <a:p>
-            <a:pPr indent="0" marL="0">
-              <a:buNone/>
-            </a:pPr>
-            <a:r>
-              <a:rPr lang="en-US" sz="1300" dirty="0">
-                <a:solidFill>
-                  <a:schemeClr val="accent5"/>
-                </a:solidFill>
-                <a:latin typeface="Meiryo UI" pitchFamily="34" charset="0"/>
-                <a:ea typeface="Meiryo UI" pitchFamily="34" charset="-122"/>
-                <a:cs typeface="Meiryo UI" pitchFamily="34" charset="-120"/>
-              </a:rPr>
-              <a:t>生成AIの業務活用</a:t>
-            </a:r>
-            <a:endParaRPr lang="en-US" sz="1300" dirty="0"/>
-          </a:p>
-        </p:txBody>
-      </p:sp>
-      <p:sp>
-        <p:nvSpPr>
-          <p:cNvPr id="16" name="pillar0"/>
-          <p:cNvSpPr/>
-          <p:nvPr/>
-        </p:nvSpPr>
-        <p:spPr>
-          <a:xfrm>
-            <a:off x="548640" y="4297680"/>
-            <a:ext cx="5440680" cy="1783080"/>
-          </a:xfrm>
-          <a:prstGeom prst="roundRect">
-            <a:avLst>
-              <a:gd name="adj" fmla="val 6154"/>
-            </a:avLst>
-          </a:prstGeom>
-          <a:solidFill>
-            <a:schemeClr val="bg2"/>
-          </a:solidFill>
-          <a:ln/>
-        </p:spPr>
-      </p:sp>
-      <p:sp>
-        <p:nvSpPr>
-          <p:cNvPr id="17" name="Shape 15"/>
-          <p:cNvSpPr/>
-          <p:nvPr/>
-        </p:nvSpPr>
-        <p:spPr>
-          <a:xfrm>
-            <a:off x="822960" y="4572000"/>
-            <a:ext cx="502920" cy="502920"/>
-          </a:xfrm>
-          <a:prstGeom prst="ellipse">
-            <a:avLst/>
-          </a:prstGeom>
-          <a:solidFill>
-            <a:schemeClr val="accent2"/>
-          </a:solidFill>
-          <a:ln/>
-        </p:spPr>
-      </p:sp>
-      <p:sp>
-        <p:nvSpPr>
-          <p:cNvPr id="18" name="Text 16"/>
-          <p:cNvSpPr txBox="1"/>
-          <p:nvPr/>
-        </p:nvSpPr>
-        <p:spPr>
-          <a:xfrm>
-            <a:off x="822960" y="4572000"/>
-            <a:ext cx="502920" cy="502920"/>
-          </a:xfrm>
-          <a:prstGeom prst="rect">
-            <a:avLst/>
-          </a:prstGeom>
-          <a:noFill/>
-          <a:ln/>
-        </p:spPr>
-        <p:txBody>
-          <a:bodyPr wrap="square" lIns="0" tIns="0" rIns="0" bIns="0" rtlCol="0" anchor="ctr"/>
-          <a:lstStyle/>
-          <a:p>
-            <a:pPr algn="ctr" indent="0" marL="0">
-              <a:buNone/>
-            </a:pPr>
-            <a:r>
-              <a:rPr lang="en-US" sz="1400" b="1" dirty="0">
-                <a:solidFill>
-                  <a:schemeClr val="bg1"/>
-                </a:solidFill>
-                <a:latin typeface="Meiryo UI" pitchFamily="34" charset="0"/>
-                <a:ea typeface="Meiryo UI" pitchFamily="34" charset="-122"/>
-                <a:cs typeface="Meiryo UI" pitchFamily="34" charset="-120"/>
-              </a:rPr>
-              <a:t>1</a:t>
-            </a:r>
-            <a:endParaRPr lang="en-US" sz="1400" dirty="0"/>
-          </a:p>
-        </p:txBody>
-      </p:sp>
-      <p:sp>
-        <p:nvSpPr>
-          <p:cNvPr id="19" name="Text 17"/>
-          <p:cNvSpPr txBox="1"/>
-          <p:nvPr/>
-        </p:nvSpPr>
-        <p:spPr>
-          <a:xfrm>
-            <a:off x="1508760" y="4572000"/>
-            <a:ext cx="4206240" cy="502920"/>
-          </a:xfrm>
-          <a:prstGeom prst="rect">
-            <a:avLst/>
-          </a:prstGeom>
-          <a:noFill/>
-          <a:ln/>
-        </p:spPr>
-        <p:txBody>
-          <a:bodyPr wrap="square" lIns="0" tIns="0" rIns="0" bIns="0" rtlCol="0" anchor="ctr"/>
-          <a:lstStyle/>
-          <a:p>
-            <a:pPr indent="0" marL="0">
-              <a:buNone/>
-            </a:pPr>
-            <a:r>
-              <a:rPr lang="en-US" sz="1800" b="1" dirty="0">
-                <a:solidFill>
-                  <a:schemeClr val="tx2"/>
-                </a:solidFill>
-                <a:latin typeface="Meiryo UI" pitchFamily="34" charset="0"/>
-                <a:ea typeface="Meiryo UI" pitchFamily="34" charset="-122"/>
-                <a:cs typeface="Meiryo UI" pitchFamily="34" charset="-120"/>
-              </a:rPr>
-              <a:t>コスト削減・収益改善</a:t>
-            </a:r>
-            <a:endParaRPr lang="en-US" sz="1800" dirty="0"/>
-          </a:p>
-        </p:txBody>
-      </p:sp>
-      <p:sp>
-        <p:nvSpPr>
-          <p:cNvPr id="20" name="Text 18"/>
-          <p:cNvSpPr txBox="1"/>
-          <p:nvPr/>
-        </p:nvSpPr>
-        <p:spPr>
-          <a:xfrm>
-            <a:off x="1508760" y="5166360"/>
-            <a:ext cx="4206240" cy="777240"/>
-          </a:xfrm>
-          <a:prstGeom prst="rect">
-            <a:avLst/>
-          </a:prstGeom>
-          <a:noFill/>
-          <a:ln/>
-        </p:spPr>
-        <p:txBody>
-          <a:bodyPr wrap="square" lIns="0" tIns="0" rIns="0" bIns="0" rtlCol="0" anchor="t"/>
-          <a:lstStyle/>
-          <a:p>
-            <a:pPr indent="0" marL="0">
-              <a:buNone/>
-            </a:pPr>
-            <a:r>
-              <a:rPr lang="en-US" sz="1400" dirty="0">
-                <a:solidFill>
-                  <a:schemeClr val="tx1"/>
-                </a:solidFill>
-                <a:latin typeface="Meiryo UI" pitchFamily="34" charset="0"/>
-                <a:ea typeface="Meiryo UI" pitchFamily="34" charset="-122"/>
-                <a:cs typeface="Meiryo UI" pitchFamily="34" charset="-120"/>
-              </a:rPr>
-              <a:t>新日本リプラス（新規開拓）・フューチャー・サニックス・太平洋セメントとの取引条件を改善</a:t>
-            </a:r>
-            <a:endParaRPr lang="en-US" sz="1400" dirty="0"/>
-          </a:p>
-        </p:txBody>
-      </p:sp>
-      <p:sp>
-        <p:nvSpPr>
-          <p:cNvPr id="21" name="pillar1"/>
-          <p:cNvSpPr/>
-          <p:nvPr/>
-        </p:nvSpPr>
-        <p:spPr>
-          <a:xfrm>
-            <a:off x="6172200" y="4297680"/>
-            <a:ext cx="5440680" cy="1783080"/>
-          </a:xfrm>
-          <a:prstGeom prst="roundRect">
-            <a:avLst>
-              <a:gd name="adj" fmla="val 6154"/>
-            </a:avLst>
-          </a:prstGeom>
-          <a:solidFill>
-            <a:schemeClr val="bg2"/>
-          </a:solidFill>
-          <a:ln/>
-        </p:spPr>
-      </p:sp>
-      <p:sp>
-        <p:nvSpPr>
-          <p:cNvPr id="22" name="Shape 20"/>
-          <p:cNvSpPr/>
-          <p:nvPr/>
-        </p:nvSpPr>
-        <p:spPr>
-          <a:xfrm>
-            <a:off x="6446520" y="4572000"/>
-            <a:ext cx="502920" cy="502920"/>
-          </a:xfrm>
-          <a:prstGeom prst="ellipse">
-            <a:avLst/>
-          </a:prstGeom>
-          <a:solidFill>
-            <a:schemeClr val="accent2"/>
-          </a:solidFill>
-          <a:ln/>
-        </p:spPr>
-      </p:sp>
-      <p:sp>
-        <p:nvSpPr>
-          <p:cNvPr id="23" name="Text 21"/>
-          <p:cNvSpPr txBox="1"/>
-          <p:nvPr/>
-        </p:nvSpPr>
-        <p:spPr>
-          <a:xfrm>
-            <a:off x="6446520" y="4572000"/>
-            <a:ext cx="502920" cy="502920"/>
-          </a:xfrm>
-          <a:prstGeom prst="rect">
-            <a:avLst/>
-          </a:prstGeom>
-          <a:noFill/>
-          <a:ln/>
-        </p:spPr>
-        <p:txBody>
-          <a:bodyPr wrap="square" lIns="0" tIns="0" rIns="0" bIns="0" rtlCol="0" anchor="ctr"/>
-          <a:lstStyle/>
-          <a:p>
-            <a:pPr algn="ctr" indent="0" marL="0">
-              <a:buNone/>
-            </a:pPr>
-            <a:r>
-              <a:rPr lang="en-US" sz="1400" b="1" dirty="0">
-                <a:solidFill>
-                  <a:schemeClr val="bg1"/>
-                </a:solidFill>
-                <a:latin typeface="Meiryo UI" pitchFamily="34" charset="0"/>
-                <a:ea typeface="Meiryo UI" pitchFamily="34" charset="-122"/>
-                <a:cs typeface="Meiryo UI" pitchFamily="34" charset="-120"/>
-              </a:rPr>
-              <a:t>2</a:t>
-            </a:r>
-            <a:endParaRPr lang="en-US" sz="1400" dirty="0"/>
-          </a:p>
-        </p:txBody>
-      </p:sp>
-      <p:sp>
-        <p:nvSpPr>
-          <p:cNvPr id="24" name="Text 22"/>
-          <p:cNvSpPr txBox="1"/>
-          <p:nvPr/>
-        </p:nvSpPr>
-        <p:spPr>
-          <a:xfrm>
-            <a:off x="7132320" y="4572000"/>
-            <a:ext cx="4206240" cy="502920"/>
-          </a:xfrm>
-          <a:prstGeom prst="rect">
-            <a:avLst/>
-          </a:prstGeom>
-          <a:noFill/>
-          <a:ln/>
-        </p:spPr>
-        <p:txBody>
-          <a:bodyPr wrap="square" lIns="0" tIns="0" rIns="0" bIns="0" rtlCol="0" anchor="ctr"/>
-          <a:lstStyle/>
-          <a:p>
-            <a:pPr indent="0" marL="0">
-              <a:buNone/>
-            </a:pPr>
-            <a:r>
-              <a:rPr lang="en-US" sz="1800" b="1" dirty="0">
-                <a:solidFill>
-                  <a:schemeClr val="tx2"/>
-                </a:solidFill>
-                <a:latin typeface="Meiryo UI" pitchFamily="34" charset="0"/>
-                <a:ea typeface="Meiryo UI" pitchFamily="34" charset="-122"/>
-                <a:cs typeface="Meiryo UI" pitchFamily="34" charset="-120"/>
-              </a:rPr>
-              <a:t>DX推進</a:t>
-            </a:r>
-            <a:endParaRPr lang="en-US" sz="1800" dirty="0"/>
-          </a:p>
-        </p:txBody>
-      </p:sp>
-      <p:sp>
-        <p:nvSpPr>
-          <p:cNvPr id="25" name="Text 23"/>
-          <p:cNvSpPr txBox="1"/>
-          <p:nvPr/>
-        </p:nvSpPr>
-        <p:spPr>
-          <a:xfrm>
-            <a:off x="7132320" y="5166360"/>
-            <a:ext cx="4206240" cy="777240"/>
+            <a:off x="7132320" y="5394960"/>
+            <a:ext cx="4206240" cy="685800"/>
           </a:xfrm>
           <a:prstGeom prst="rect">
             <a:avLst/>
@@ -3201,7 +3235,7 @@
                 <a:ea typeface="Meiryo UI" pitchFamily="34" charset="-122"/>
                 <a:cs typeface="Meiryo UI" pitchFamily="34" charset="-120"/>
               </a:rPr>
-              <a:t>4社との取引条件を見直しました。単価の改善は、取り扱い量が増えるほど効果が大きくなります。</a:t>
+              <a:t>4社との取引条件を見直し、処分費の削減と販売収入の増加の両面で効果を出しました。</a:t>
             </a:r>
             <a:endParaRPr lang="en-US" sz="1600" dirty="0"/>
           </a:p>
@@ -3222,7 +3256,7 @@
           </p:nvPr>
         </p:nvGraphicFramePr>
         <p:xfrm>
-          <a:off x="548640" y="1783080"/>
+          <a:off x="548640" y="1737360"/>
           <a:ext cx="11064240" cy="914400"/>
         </p:xfrm>
         <a:graphic>
@@ -3230,13 +3264,14 @@
             <a:tbl>
               <a:tblPr/>
               <a:tblGrid>
-                <a:gridCol w="2011680"/>
-                <a:gridCol w="3108960"/>
-                <a:gridCol w="2011680"/>
-                <a:gridCol w="2011680"/>
-                <a:gridCol w="1920240"/>
+                <a:gridCol w="1737360"/>
+                <a:gridCol w="2926080"/>
+                <a:gridCol w="1188720"/>
+                <a:gridCol w="2926080"/>
+                <a:gridCol w="822960"/>
+                <a:gridCol w="1463040"/>
               </a:tblGrid>
-              <a:tr h="502920">
+              <a:tr h="457200">
                 <a:tc>
                   <a:txBody>
                     <a:bodyPr/>
@@ -3263,7 +3298,7 @@
                       </a:endParaRPr>
                     </a:p>
                   </a:txBody>
-                  <a:tcPr marL="91440" marR="91440" marT="91440" marB="91440" anchor="ctr">
+                  <a:tcPr marL="73152" marR="73152" marT="73152" marB="73152" anchor="ctr">
                     <a:lnL w="12700" cap="flat" cmpd="sng" algn="ctr">
                       <a:solidFill>
                         <a:srgbClr val="C9DDD3"/>
@@ -3331,7 +3366,7 @@
                       </a:endParaRPr>
                     </a:p>
                   </a:txBody>
-                  <a:tcPr marL="91440" marR="91440" marT="91440" marB="91440" anchor="ctr">
+                  <a:tcPr marL="73152" marR="73152" marT="73152" marB="73152" anchor="ctr">
                     <a:lnL w="12700" cap="flat" cmpd="sng" algn="ctr">
                       <a:solidFill>
                         <a:srgbClr val="C9DDD3"/>
@@ -3390,7 +3425,7 @@
                           <a:ea typeface="Meiryo UI" pitchFamily="34" charset="-122"/>
                           <a:cs typeface="Meiryo UI" pitchFamily="34" charset="-120"/>
                         </a:rPr>
-                        <a:t>変更前</a:t>
+                        <a:t>開始</a:t>
                       </a:r>
                       <a:endParaRPr lang="en-US" sz="1400" dirty="0">
                         <a:latin typeface="Meiryo UI" charset="0"/>
@@ -3399,7 +3434,7 @@
                       </a:endParaRPr>
                     </a:p>
                   </a:txBody>
-                  <a:tcPr marL="91440" marR="91440" marT="91440" marB="91440" anchor="ctr">
+                  <a:tcPr marL="73152" marR="73152" marT="73152" marB="73152" anchor="ctr">
                     <a:lnL w="12700" cap="flat" cmpd="sng" algn="ctr">
                       <a:solidFill>
                         <a:srgbClr val="C9DDD3"/>
@@ -3458,7 +3493,7 @@
                           <a:ea typeface="Meiryo UI" pitchFamily="34" charset="-122"/>
                           <a:cs typeface="Meiryo UI" pitchFamily="34" charset="-120"/>
                         </a:rPr>
-                        <a:t>変更後</a:t>
+                        <a:t>条件の変化</a:t>
                       </a:r>
                       <a:endParaRPr lang="en-US" sz="1400" dirty="0">
                         <a:latin typeface="Meiryo UI" charset="0"/>
@@ -3467,7 +3502,7 @@
                       </a:endParaRPr>
                     </a:p>
                   </a:txBody>
-                  <a:tcPr marL="91440" marR="91440" marT="91440" marB="91440" anchor="ctr">
+                  <a:tcPr marL="73152" marR="73152" marT="73152" marB="73152" anchor="ctr">
                     <a:lnL w="12700" cap="flat" cmpd="sng" algn="ctr">
                       <a:solidFill>
                         <a:srgbClr val="C9DDD3"/>
@@ -3526,7 +3561,7 @@
                           <a:ea typeface="Meiryo UI" pitchFamily="34" charset="-122"/>
                           <a:cs typeface="Meiryo UI" pitchFamily="34" charset="-120"/>
                         </a:rPr>
-                        <a:t>1tあたりの効果</a:t>
+                        <a:t>月の量</a:t>
                       </a:r>
                       <a:endParaRPr lang="en-US" sz="1400" dirty="0">
                         <a:latin typeface="Meiryo UI" charset="0"/>
@@ -3535,7 +3570,75 @@
                       </a:endParaRPr>
                     </a:p>
                   </a:txBody>
-                  <a:tcPr marL="91440" marR="91440" marT="91440" marB="91440" anchor="ctr">
+                  <a:tcPr marL="73152" marR="73152" marT="73152" marB="73152" anchor="ctr">
+                    <a:lnL w="12700" cap="flat" cmpd="sng" algn="ctr">
+                      <a:solidFill>
+                        <a:srgbClr val="C9DDD3"/>
+                      </a:solidFill>
+                      <a:prstDash val="solid"/>
+                      <a:round/>
+                      <a:headEnd type="none" w="med" len="med"/>
+                      <a:tailEnd type="none" w="med" len="med"/>
+                    </a:lnL>
+                    <a:lnR w="12700" cap="flat" cmpd="sng" algn="ctr">
+                      <a:solidFill>
+                        <a:srgbClr val="C9DDD3"/>
+                      </a:solidFill>
+                      <a:prstDash val="solid"/>
+                      <a:round/>
+                      <a:headEnd type="none" w="med" len="med"/>
+                      <a:tailEnd type="none" w="med" len="med"/>
+                    </a:lnR>
+                    <a:lnT w="12700" cap="flat" cmpd="sng" algn="ctr">
+                      <a:solidFill>
+                        <a:srgbClr val="C9DDD3"/>
+                      </a:solidFill>
+                      <a:prstDash val="solid"/>
+                      <a:round/>
+                      <a:headEnd type="none" w="med" len="med"/>
+                      <a:tailEnd type="none" w="med" len="med"/>
+                    </a:lnT>
+                    <a:lnB w="12700" cap="flat" cmpd="sng" algn="ctr">
+                      <a:solidFill>
+                        <a:srgbClr val="C9DDD3"/>
+                      </a:solidFill>
+                      <a:prstDash val="solid"/>
+                      <a:round/>
+                      <a:headEnd type="none" w="med" len="med"/>
+                      <a:tailEnd type="none" w="med" len="med"/>
+                    </a:lnB>
+                    <a:solidFill>
+                      <a:srgbClr val="1F4D3A"/>
+                    </a:solidFill>
+                  </a:tcPr>
+                </a:tc>
+                <a:tc>
+                  <a:txBody>
+                    <a:bodyPr/>
+                    <a:lstStyle/>
+                    <a:p>
+                      <a:pPr algn="ctr" indent="0" marL="0">
+                        <a:buNone/>
+                      </a:pPr>
+                      <a:r>
+                        <a:rPr lang="en-US" sz="1400" b="1" dirty="0">
+                          <a:solidFill>
+                            <a:srgbClr val="FFFFFF"/>
+                          </a:solidFill>
+                          <a:latin typeface="Meiryo UI" pitchFamily="34" charset="0"/>
+                          <a:ea typeface="Meiryo UI" pitchFamily="34" charset="-122"/>
+                          <a:cs typeface="Meiryo UI" pitchFamily="34" charset="-120"/>
+                        </a:rPr>
+                        <a:t>年間効果</a:t>
+                      </a:r>
+                      <a:endParaRPr lang="en-US" sz="1400" dirty="0">
+                        <a:latin typeface="Meiryo UI" charset="0"/>
+                        <a:ea typeface="Meiryo UI" charset="0"/>
+                        <a:cs typeface="Meiryo UI" charset="0"/>
+                      </a:endParaRPr>
+                    </a:p>
+                  </a:txBody>
+                  <a:tcPr marL="73152" marR="73152" marT="73152" marB="73152" anchor="ctr">
                     <a:lnL w="12700" cap="flat" cmpd="sng" algn="ctr">
                       <a:solidFill>
                         <a:srgbClr val="C9DDD3"/>
@@ -3578,7 +3681,7 @@
                   </a:tcPr>
                 </a:tc>
               </a:tr>
-              <a:tr h="868680">
+              <a:tr h="777240">
                 <a:tc>
                   <a:txBody>
                     <a:bodyPr/>
@@ -3588,7 +3691,7 @@
                         <a:buNone/>
                       </a:pPr>
                       <a:r>
-                        <a:rPr lang="en-US" sz="1400" b="1" dirty="0">
+                        <a:rPr lang="en-US" sz="1300" b="1" dirty="0">
                           <a:solidFill>
                             <a:srgbClr val="1E2A26"/>
                           </a:solidFill>
@@ -3598,14 +3701,14 @@
                         </a:rPr>
                         <a:t>新日本リプラス</a:t>
                       </a:r>
-                      <a:endParaRPr lang="en-US" sz="1400" dirty="0">
+                      <a:endParaRPr lang="en-US" sz="1300" dirty="0">
                         <a:latin typeface="Meiryo UI" charset="0"/>
                         <a:ea typeface="Meiryo UI" charset="0"/>
                         <a:cs typeface="Meiryo UI" charset="0"/>
                       </a:endParaRPr>
                     </a:p>
                   </a:txBody>
-                  <a:tcPr marL="91440" marR="91440" marT="91440" marB="91440" anchor="ctr">
+                  <a:tcPr marL="73152" marR="73152" marT="73152" marB="73152" anchor="ctr">
                     <a:lnL w="12700" cap="flat" cmpd="sng" algn="ctr">
                       <a:solidFill>
                         <a:srgbClr val="C9DDD3"/>
@@ -3656,7 +3759,7 @@
                         <a:buNone/>
                       </a:pPr>
                       <a:r>
-                        <a:rPr lang="en-US" sz="1400" dirty="0">
+                        <a:rPr lang="en-US" sz="1300" dirty="0">
                           <a:solidFill>
                             <a:srgbClr val="1E2A26"/>
                           </a:solidFill>
@@ -3666,7 +3769,7 @@
                         </a:rPr>
                         <a:t>C級パレットの新規開拓</a:t>
                       </a:r>
-                      <a:endParaRPr lang="en-US" sz="1400" dirty="0">
+                      <a:endParaRPr lang="en-US" sz="1300" dirty="0">
                         <a:latin typeface="Meiryo UI" charset="0"/>
                         <a:ea typeface="Meiryo UI" charset="0"/>
                         <a:cs typeface="Meiryo UI" charset="0"/>
@@ -3677,7 +3780,7 @@
                         <a:buNone/>
                       </a:pPr>
                       <a:r>
-                        <a:rPr lang="en-US" sz="1400" dirty="0">
+                        <a:rPr lang="en-US" sz="1300" dirty="0">
                           <a:solidFill>
                             <a:srgbClr val="1E2A26"/>
                           </a:solidFill>
@@ -3685,16 +3788,16 @@
                           <a:ea typeface="Meiryo UI" pitchFamily="34" charset="-122"/>
                           <a:cs typeface="Meiryo UI" pitchFamily="34" charset="-120"/>
                         </a:rPr>
-                        <a:t>（処分から有価買取へ）</a:t>
+                        <a:t>（処分から買取へ）</a:t>
                       </a:r>
-                      <a:endParaRPr lang="en-US" sz="1400" dirty="0">
+                      <a:endParaRPr lang="en-US" sz="1300" dirty="0">
                         <a:latin typeface="Meiryo UI" charset="0"/>
                         <a:ea typeface="Meiryo UI" charset="0"/>
                         <a:cs typeface="Meiryo UI" charset="0"/>
                       </a:endParaRPr>
                     </a:p>
                   </a:txBody>
-                  <a:tcPr marL="91440" marR="91440" marT="91440" marB="91440" anchor="ctr">
+                  <a:tcPr marL="73152" marR="73152" marT="73152" marB="73152" anchor="ctr">
                     <a:lnL w="12700" cap="flat" cmpd="sng" algn="ctr">
                       <a:solidFill>
                         <a:srgbClr val="C9DDD3"/>
@@ -3745,7 +3848,7 @@
                         <a:buNone/>
                       </a:pPr>
                       <a:r>
-                        <a:rPr lang="en-US" sz="1400" dirty="0">
+                        <a:rPr lang="en-US" sz="1300" dirty="0">
                           <a:solidFill>
                             <a:srgbClr val="1E2A26"/>
                           </a:solidFill>
@@ -3753,20 +3856,67 @@
                           <a:ea typeface="Meiryo UI" pitchFamily="34" charset="-122"/>
                           <a:cs typeface="Meiryo UI" pitchFamily="34" charset="-120"/>
                         </a:rPr>
-                        <a:t>処分費 28円/kg</a:t>
+                        <a:t>2026年6月</a:t>
                       </a:r>
-                      <a:endParaRPr lang="en-US" sz="1400" dirty="0">
+                      <a:endParaRPr lang="en-US" sz="1300" dirty="0">
                         <a:latin typeface="Meiryo UI" charset="0"/>
                         <a:ea typeface="Meiryo UI" charset="0"/>
                         <a:cs typeface="Meiryo UI" charset="0"/>
                       </a:endParaRPr>
                     </a:p>
+                  </a:txBody>
+                  <a:tcPr marL="73152" marR="73152" marT="73152" marB="73152" anchor="ctr">
+                    <a:lnL w="12700" cap="flat" cmpd="sng" algn="ctr">
+                      <a:solidFill>
+                        <a:srgbClr val="C9DDD3"/>
+                      </a:solidFill>
+                      <a:prstDash val="solid"/>
+                      <a:round/>
+                      <a:headEnd type="none" w="med" len="med"/>
+                      <a:tailEnd type="none" w="med" len="med"/>
+                    </a:lnL>
+                    <a:lnR w="12700" cap="flat" cmpd="sng" algn="ctr">
+                      <a:solidFill>
+                        <a:srgbClr val="C9DDD3"/>
+                      </a:solidFill>
+                      <a:prstDash val="solid"/>
+                      <a:round/>
+                      <a:headEnd type="none" w="med" len="med"/>
+                      <a:tailEnd type="none" w="med" len="med"/>
+                    </a:lnR>
+                    <a:lnT w="12700" cap="flat" cmpd="sng" algn="ctr">
+                      <a:solidFill>
+                        <a:srgbClr val="C9DDD3"/>
+                      </a:solidFill>
+                      <a:prstDash val="solid"/>
+                      <a:round/>
+                      <a:headEnd type="none" w="med" len="med"/>
+                      <a:tailEnd type="none" w="med" len="med"/>
+                    </a:lnT>
+                    <a:lnB w="12700" cap="flat" cmpd="sng" algn="ctr">
+                      <a:solidFill>
+                        <a:srgbClr val="C9DDD3"/>
+                      </a:solidFill>
+                      <a:prstDash val="solid"/>
+                      <a:round/>
+                      <a:headEnd type="none" w="med" len="med"/>
+                      <a:tailEnd type="none" w="med" len="med"/>
+                    </a:lnB>
+                    <a:solidFill>
+                      <a:srgbClr val="EAF4EF"/>
+                    </a:solidFill>
+                  </a:tcPr>
+                </a:tc>
+                <a:tc>
+                  <a:txBody>
+                    <a:bodyPr/>
+                    <a:lstStyle/>
                     <a:p>
-                      <a:pPr algn="ctr" indent="0" marL="0">
+                      <a:pPr algn="l" indent="0" marL="0">
                         <a:buNone/>
                       </a:pPr>
                       <a:r>
-                        <a:rPr lang="en-US" sz="1400" dirty="0">
+                        <a:rPr lang="en-US" sz="1300" dirty="0">
                           <a:solidFill>
                             <a:srgbClr val="1E2A26"/>
                           </a:solidFill>
@@ -3774,16 +3924,37 @@
                           <a:ea typeface="Meiryo UI" pitchFamily="34" charset="-122"/>
                           <a:cs typeface="Meiryo UI" pitchFamily="34" charset="-120"/>
                         </a:rPr>
-                        <a:t>を支払い</a:t>
+                        <a:t>処分費28円/kg → 買取1円/kg</a:t>
                       </a:r>
-                      <a:endParaRPr lang="en-US" sz="1400" dirty="0">
+                      <a:endParaRPr lang="en-US" sz="1300" dirty="0">
+                        <a:latin typeface="Meiryo UI" charset="0"/>
+                        <a:ea typeface="Meiryo UI" charset="0"/>
+                        <a:cs typeface="Meiryo UI" charset="0"/>
+                      </a:endParaRPr>
+                    </a:p>
+                    <a:p>
+                      <a:pPr algn="l" indent="0" marL="0">
+                        <a:buNone/>
+                      </a:pPr>
+                      <a:r>
+                        <a:rPr lang="en-US" sz="1300" dirty="0">
+                          <a:solidFill>
+                            <a:srgbClr val="1E2A26"/>
+                          </a:solidFill>
+                          <a:latin typeface="Meiryo UI" pitchFamily="34" charset="0"/>
+                          <a:ea typeface="Meiryo UI" pitchFamily="34" charset="-122"/>
+                          <a:cs typeface="Meiryo UI" pitchFamily="34" charset="-120"/>
+                        </a:rPr>
+                        <a:t>（29円/kg改善）</a:t>
+                      </a:r>
+                      <a:endParaRPr lang="en-US" sz="1300" dirty="0">
                         <a:latin typeface="Meiryo UI" charset="0"/>
                         <a:ea typeface="Meiryo UI" charset="0"/>
                         <a:cs typeface="Meiryo UI" charset="0"/>
                       </a:endParaRPr>
                     </a:p>
                   </a:txBody>
-                  <a:tcPr marL="91440" marR="91440" marT="91440" marB="91440" anchor="ctr">
+                  <a:tcPr marL="73152" marR="73152" marT="73152" marB="73152" anchor="ctr">
                     <a:lnL w="12700" cap="flat" cmpd="sng" algn="ctr">
                       <a:solidFill>
                         <a:srgbClr val="C9DDD3"/>
@@ -3834,7 +4005,7 @@
                         <a:buNone/>
                       </a:pPr>
                       <a:r>
-                        <a:rPr lang="en-US" sz="1400" dirty="0">
+                        <a:rPr lang="en-US" sz="1300" dirty="0">
                           <a:solidFill>
                             <a:srgbClr val="1E2A26"/>
                           </a:solidFill>
@@ -3842,37 +4013,16 @@
                           <a:ea typeface="Meiryo UI" pitchFamily="34" charset="-122"/>
                           <a:cs typeface="Meiryo UI" pitchFamily="34" charset="-120"/>
                         </a:rPr>
-                        <a:t>1円/kg で</a:t>
+                        <a:t>約20t</a:t>
                       </a:r>
-                      <a:endParaRPr lang="en-US" sz="1400" dirty="0">
-                        <a:latin typeface="Meiryo UI" charset="0"/>
-                        <a:ea typeface="Meiryo UI" charset="0"/>
-                        <a:cs typeface="Meiryo UI" charset="0"/>
-                      </a:endParaRPr>
-                    </a:p>
-                    <a:p>
-                      <a:pPr algn="ctr" indent="0" marL="0">
-                        <a:buNone/>
-                      </a:pPr>
-                      <a:r>
-                        <a:rPr lang="en-US" sz="1400" dirty="0">
-                          <a:solidFill>
-                            <a:srgbClr val="1E2A26"/>
-                          </a:solidFill>
-                          <a:latin typeface="Meiryo UI" pitchFamily="34" charset="0"/>
-                          <a:ea typeface="Meiryo UI" pitchFamily="34" charset="-122"/>
-                          <a:cs typeface="Meiryo UI" pitchFamily="34" charset="-120"/>
-                        </a:rPr>
-                        <a:t>買い取り</a:t>
-                      </a:r>
-                      <a:endParaRPr lang="en-US" sz="1400" dirty="0">
+                      <a:endParaRPr lang="en-US" sz="1300" dirty="0">
                         <a:latin typeface="Meiryo UI" charset="0"/>
                         <a:ea typeface="Meiryo UI" charset="0"/>
                         <a:cs typeface="Meiryo UI" charset="0"/>
                       </a:endParaRPr>
                     </a:p>
                   </a:txBody>
-                  <a:tcPr marL="91440" marR="91440" marT="91440" marB="91440" anchor="ctr">
+                  <a:tcPr marL="73152" marR="73152" marT="73152" marB="73152" anchor="ctr">
                     <a:lnL w="12700" cap="flat" cmpd="sng" algn="ctr">
                       <a:solidFill>
                         <a:srgbClr val="C9DDD3"/>
@@ -3931,7 +4081,7 @@
                           <a:ea typeface="Meiryo UI" pitchFamily="34" charset="-122"/>
                           <a:cs typeface="Meiryo UI" pitchFamily="34" charset="-120"/>
                         </a:rPr>
-                        <a:t>+29,000円</a:t>
+                        <a:t>696万円</a:t>
                       </a:r>
                       <a:endParaRPr lang="en-US" sz="1800" dirty="0">
                         <a:latin typeface="Meiryo UI" charset="0"/>
@@ -3940,7 +4090,7 @@
                       </a:endParaRPr>
                     </a:p>
                   </a:txBody>
-                  <a:tcPr marL="91440" marR="91440" marT="91440" marB="91440" anchor="ctr">
+                  <a:tcPr marL="73152" marR="73152" marT="73152" marB="73152" anchor="ctr">
                     <a:lnL w="12700" cap="flat" cmpd="sng" algn="ctr">
                       <a:solidFill>
                         <a:srgbClr val="C9DDD3"/>
@@ -3993,7 +4143,7 @@
                         <a:buNone/>
                       </a:pPr>
                       <a:r>
-                        <a:rPr lang="en-US" sz="1400" b="1" dirty="0">
+                        <a:rPr lang="en-US" sz="1300" b="1" dirty="0">
                           <a:solidFill>
                             <a:srgbClr val="1E2A26"/>
                           </a:solidFill>
@@ -4001,16 +4151,16 @@
                           <a:ea typeface="Meiryo UI" pitchFamily="34" charset="-122"/>
                           <a:cs typeface="Meiryo UI" pitchFamily="34" charset="-120"/>
                         </a:rPr>
-                        <a:t>フューチャー</a:t>
+                        <a:t>太平洋セメント</a:t>
                       </a:r>
-                      <a:endParaRPr lang="en-US" sz="1400" dirty="0">
+                      <a:endParaRPr lang="en-US" sz="1300" dirty="0">
                         <a:latin typeface="Meiryo UI" charset="0"/>
                         <a:ea typeface="Meiryo UI" charset="0"/>
                         <a:cs typeface="Meiryo UI" charset="0"/>
                       </a:endParaRPr>
                     </a:p>
                   </a:txBody>
-                  <a:tcPr marL="91440" marR="91440" marT="91440" marB="91440" anchor="ctr">
+                  <a:tcPr marL="73152" marR="73152" marT="73152" marB="73152" anchor="ctr">
                     <a:lnL w="12700" cap="flat" cmpd="sng" algn="ctr">
                       <a:solidFill>
                         <a:srgbClr val="C9DDD3"/>
@@ -4061,7 +4211,7 @@
                         <a:buNone/>
                       </a:pPr>
                       <a:r>
-                        <a:rPr lang="en-US" sz="1400" dirty="0">
+                        <a:rPr lang="en-US" sz="1300" dirty="0">
                           <a:solidFill>
                             <a:srgbClr val="1E2A26"/>
                           </a:solidFill>
@@ -4069,9 +4219,9 @@
                           <a:ea typeface="Meiryo UI" pitchFamily="34" charset="-122"/>
                           <a:cs typeface="Meiryo UI" pitchFamily="34" charset="-120"/>
                         </a:rPr>
-                        <a:t>減容品の販売単価</a:t>
+                        <a:t>受け入れ量の拡大</a:t>
                       </a:r>
-                      <a:endParaRPr lang="en-US" sz="1400" dirty="0">
+                      <a:endParaRPr lang="en-US" sz="1300" dirty="0">
                         <a:latin typeface="Meiryo UI" charset="0"/>
                         <a:ea typeface="Meiryo UI" charset="0"/>
                         <a:cs typeface="Meiryo UI" charset="0"/>
@@ -4082,7 +4232,7 @@
                         <a:buNone/>
                       </a:pPr>
                       <a:r>
-                        <a:rPr lang="en-US" sz="1400" dirty="0">
+                        <a:rPr lang="en-US" sz="1300" dirty="0">
                           <a:solidFill>
                             <a:srgbClr val="1E2A26"/>
                           </a:solidFill>
@@ -4090,16 +4240,16 @@
                           <a:ea typeface="Meiryo UI" pitchFamily="34" charset="-122"/>
                           <a:cs typeface="Meiryo UI" pitchFamily="34" charset="-120"/>
                         </a:rPr>
-                        <a:t>の値上げ</a:t>
+                        <a:t>（運送会社を増やし運搬量を確保）</a:t>
                       </a:r>
-                      <a:endParaRPr lang="en-US" sz="1400" dirty="0">
+                      <a:endParaRPr lang="en-US" sz="1300" dirty="0">
                         <a:latin typeface="Meiryo UI" charset="0"/>
                         <a:ea typeface="Meiryo UI" charset="0"/>
                         <a:cs typeface="Meiryo UI" charset="0"/>
                       </a:endParaRPr>
                     </a:p>
                   </a:txBody>
-                  <a:tcPr marL="91440" marR="91440" marT="91440" marB="91440" anchor="ctr">
+                  <a:tcPr marL="73152" marR="73152" marT="73152" marB="73152" anchor="ctr">
                     <a:lnL w="12700" cap="flat" cmpd="sng" algn="ctr">
                       <a:solidFill>
                         <a:srgbClr val="C9DDD3"/>
@@ -4150,7 +4300,7 @@
                         <a:buNone/>
                       </a:pPr>
                       <a:r>
-                        <a:rPr lang="en-US" sz="1400" dirty="0">
+                        <a:rPr lang="en-US" sz="1300" dirty="0">
                           <a:solidFill>
                             <a:srgbClr val="1E2A26"/>
                           </a:solidFill>
@@ -4158,16 +4308,105 @@
                           <a:ea typeface="Meiryo UI" pitchFamily="34" charset="-122"/>
                           <a:cs typeface="Meiryo UI" pitchFamily="34" charset="-120"/>
                         </a:rPr>
-                        <a:t>7円/kg</a:t>
+                        <a:t>—</a:t>
                       </a:r>
-                      <a:endParaRPr lang="en-US" sz="1400" dirty="0">
+                      <a:endParaRPr lang="en-US" sz="1300" dirty="0">
                         <a:latin typeface="Meiryo UI" charset="0"/>
                         <a:ea typeface="Meiryo UI" charset="0"/>
                         <a:cs typeface="Meiryo UI" charset="0"/>
                       </a:endParaRPr>
                     </a:p>
                   </a:txBody>
-                  <a:tcPr marL="91440" marR="91440" marT="91440" marB="91440" anchor="ctr">
+                  <a:tcPr marL="73152" marR="73152" marT="73152" marB="73152" anchor="ctr">
+                    <a:lnL w="12700" cap="flat" cmpd="sng" algn="ctr">
+                      <a:solidFill>
+                        <a:srgbClr val="C9DDD3"/>
+                      </a:solidFill>
+                      <a:prstDash val="solid"/>
+                      <a:round/>
+                      <a:headEnd type="none" w="med" len="med"/>
+                      <a:tailEnd type="none" w="med" len="med"/>
+                    </a:lnL>
+                    <a:lnR w="12700" cap="flat" cmpd="sng" algn="ctr">
+                      <a:solidFill>
+                        <a:srgbClr val="C9DDD3"/>
+                      </a:solidFill>
+                      <a:prstDash val="solid"/>
+                      <a:round/>
+                      <a:headEnd type="none" w="med" len="med"/>
+                      <a:tailEnd type="none" w="med" len="med"/>
+                    </a:lnR>
+                    <a:lnT w="12700" cap="flat" cmpd="sng" algn="ctr">
+                      <a:solidFill>
+                        <a:srgbClr val="C9DDD3"/>
+                      </a:solidFill>
+                      <a:prstDash val="solid"/>
+                      <a:round/>
+                      <a:headEnd type="none" w="med" len="med"/>
+                      <a:tailEnd type="none" w="med" len="med"/>
+                    </a:lnT>
+                    <a:lnB w="12700" cap="flat" cmpd="sng" algn="ctr">
+                      <a:solidFill>
+                        <a:srgbClr val="C9DDD3"/>
+                      </a:solidFill>
+                      <a:prstDash val="solid"/>
+                      <a:round/>
+                      <a:headEnd type="none" w="med" len="med"/>
+                      <a:tailEnd type="none" w="med" len="med"/>
+                    </a:lnB>
+                    <a:solidFill>
+                      <a:srgbClr val="FFFFFF"/>
+                    </a:solidFill>
+                  </a:tcPr>
+                </a:tc>
+                <a:tc>
+                  <a:txBody>
+                    <a:bodyPr/>
+                    <a:lstStyle/>
+                    <a:p>
+                      <a:pPr algn="l" indent="0" marL="0">
+                        <a:buNone/>
+                      </a:pPr>
+                      <a:r>
+                        <a:rPr lang="en-US" sz="1300" dirty="0">
+                          <a:solidFill>
+                            <a:srgbClr val="1E2A26"/>
+                          </a:solidFill>
+                          <a:latin typeface="Meiryo UI" pitchFamily="34" charset="0"/>
+                          <a:ea typeface="Meiryo UI" pitchFamily="34" charset="-122"/>
+                          <a:cs typeface="Meiryo UI" pitchFamily="34" charset="-120"/>
+                        </a:rPr>
+                        <a:t>月30t → 100t</a:t>
+                      </a:r>
+                      <a:endParaRPr lang="en-US" sz="1300" dirty="0">
+                        <a:latin typeface="Meiryo UI" charset="0"/>
+                        <a:ea typeface="Meiryo UI" charset="0"/>
+                        <a:cs typeface="Meiryo UI" charset="0"/>
+                      </a:endParaRPr>
+                    </a:p>
+                    <a:p>
+                      <a:pPr algn="l" indent="0" marL="0">
+                        <a:buNone/>
+                      </a:pPr>
+                      <a:r>
+                        <a:rPr lang="en-US" sz="1300" dirty="0">
+                          <a:solidFill>
+                            <a:srgbClr val="1E2A26"/>
+                          </a:solidFill>
+                          <a:latin typeface="Meiryo UI" pitchFamily="34" charset="0"/>
+                          <a:ea typeface="Meiryo UI" pitchFamily="34" charset="-122"/>
+                          <a:cs typeface="Meiryo UI" pitchFamily="34" charset="-120"/>
+                        </a:rPr>
+                        <a:t>処分費11円/kg（他社18円/kg）</a:t>
+                      </a:r>
+                      <a:endParaRPr lang="en-US" sz="1300" dirty="0">
+                        <a:latin typeface="Meiryo UI" charset="0"/>
+                        <a:ea typeface="Meiryo UI" charset="0"/>
+                        <a:cs typeface="Meiryo UI" charset="0"/>
+                      </a:endParaRPr>
+                    </a:p>
+                  </a:txBody>
+                  <a:tcPr marL="73152" marR="73152" marT="73152" marB="73152" anchor="ctr">
                     <a:lnL w="12700" cap="flat" cmpd="sng" algn="ctr">
                       <a:solidFill>
                         <a:srgbClr val="C9DDD3"/>
@@ -4218,7 +4457,7 @@
                         <a:buNone/>
                       </a:pPr>
                       <a:r>
-                        <a:rPr lang="en-US" sz="1400" dirty="0">
+                        <a:rPr lang="en-US" sz="1300" dirty="0">
                           <a:solidFill>
                             <a:srgbClr val="1E2A26"/>
                           </a:solidFill>
@@ -4226,16 +4465,16 @@
                           <a:ea typeface="Meiryo UI" pitchFamily="34" charset="-122"/>
                           <a:cs typeface="Meiryo UI" pitchFamily="34" charset="-120"/>
                         </a:rPr>
-                        <a:t>10円/kg</a:t>
+                        <a:t>+70t</a:t>
                       </a:r>
-                      <a:endParaRPr lang="en-US" sz="1400" dirty="0">
+                      <a:endParaRPr lang="en-US" sz="1300" dirty="0">
                         <a:latin typeface="Meiryo UI" charset="0"/>
                         <a:ea typeface="Meiryo UI" charset="0"/>
                         <a:cs typeface="Meiryo UI" charset="0"/>
                       </a:endParaRPr>
                     </a:p>
                   </a:txBody>
-                  <a:tcPr marL="91440" marR="91440" marT="91440" marB="91440" anchor="ctr">
+                  <a:tcPr marL="73152" marR="73152" marT="73152" marB="73152" anchor="ctr">
                     <a:lnL w="12700" cap="flat" cmpd="sng" algn="ctr">
                       <a:solidFill>
                         <a:srgbClr val="C9DDD3"/>
@@ -4294,7 +4533,7 @@
                           <a:ea typeface="Meiryo UI" pitchFamily="34" charset="-122"/>
                           <a:cs typeface="Meiryo UI" pitchFamily="34" charset="-120"/>
                         </a:rPr>
-                        <a:t>+3,000円</a:t>
+                        <a:t>588万円</a:t>
                       </a:r>
                       <a:endParaRPr lang="en-US" sz="1800" dirty="0">
                         <a:latin typeface="Meiryo UI" charset="0"/>
@@ -4303,7 +4542,7 @@
                       </a:endParaRPr>
                     </a:p>
                   </a:txBody>
-                  <a:tcPr marL="91440" marR="91440" marT="91440" marB="91440" anchor="ctr">
+                  <a:tcPr marL="73152" marR="73152" marT="73152" marB="73152" anchor="ctr">
                     <a:lnL w="12700" cap="flat" cmpd="sng" algn="ctr">
                       <a:solidFill>
                         <a:srgbClr val="C9DDD3"/>
@@ -4346,7 +4585,7 @@
                   </a:tcPr>
                 </a:tc>
               </a:tr>
-              <a:tr h="777240">
+              <a:tr h="548640">
                 <a:tc>
                   <a:txBody>
                     <a:bodyPr/>
@@ -4356,7 +4595,7 @@
                         <a:buNone/>
                       </a:pPr>
                       <a:r>
-                        <a:rPr lang="en-US" sz="1400" b="1" dirty="0">
+                        <a:rPr lang="en-US" sz="1300" b="1" dirty="0">
                           <a:solidFill>
                             <a:srgbClr val="1E2A26"/>
                           </a:solidFill>
@@ -4364,16 +4603,16 @@
                           <a:ea typeface="Meiryo UI" pitchFamily="34" charset="-122"/>
                           <a:cs typeface="Meiryo UI" pitchFamily="34" charset="-120"/>
                         </a:rPr>
-                        <a:t>サニックス</a:t>
+                        <a:t>フューチャー</a:t>
                       </a:r>
-                      <a:endParaRPr lang="en-US" sz="1400" dirty="0">
+                      <a:endParaRPr lang="en-US" sz="1300" dirty="0">
                         <a:latin typeface="Meiryo UI" charset="0"/>
                         <a:ea typeface="Meiryo UI" charset="0"/>
                         <a:cs typeface="Meiryo UI" charset="0"/>
                       </a:endParaRPr>
                     </a:p>
                   </a:txBody>
-                  <a:tcPr marL="91440" marR="91440" marT="91440" marB="91440" anchor="ctr">
+                  <a:tcPr marL="73152" marR="73152" marT="73152" marB="73152" anchor="ctr">
                     <a:lnL w="12700" cap="flat" cmpd="sng" algn="ctr">
                       <a:solidFill>
                         <a:srgbClr val="C9DDD3"/>
@@ -4424,7 +4663,7 @@
                         <a:buNone/>
                       </a:pPr>
                       <a:r>
-                        <a:rPr lang="en-US" sz="1400" dirty="0">
+                        <a:rPr lang="en-US" sz="1300" dirty="0">
                           <a:solidFill>
                             <a:srgbClr val="1E2A26"/>
                           </a:solidFill>
@@ -4432,16 +4671,16 @@
                           <a:ea typeface="Meiryo UI" pitchFamily="34" charset="-122"/>
                           <a:cs typeface="Meiryo UI" pitchFamily="34" charset="-120"/>
                         </a:rPr>
-                        <a:t>処分費の値下げ交渉</a:t>
+                        <a:t>減容品の販売単価の値上げ</a:t>
                       </a:r>
-                      <a:endParaRPr lang="en-US" sz="1400" dirty="0">
+                      <a:endParaRPr lang="en-US" sz="1300" dirty="0">
                         <a:latin typeface="Meiryo UI" charset="0"/>
                         <a:ea typeface="Meiryo UI" charset="0"/>
                         <a:cs typeface="Meiryo UI" charset="0"/>
                       </a:endParaRPr>
                     </a:p>
                   </a:txBody>
-                  <a:tcPr marL="91440" marR="91440" marT="91440" marB="91440" anchor="ctr">
+                  <a:tcPr marL="73152" marR="73152" marT="73152" marB="73152" anchor="ctr">
                     <a:lnL w="12700" cap="flat" cmpd="sng" algn="ctr">
                       <a:solidFill>
                         <a:srgbClr val="C9DDD3"/>
@@ -4492,7 +4731,7 @@
                         <a:buNone/>
                       </a:pPr>
                       <a:r>
-                        <a:rPr lang="en-US" sz="1400" dirty="0">
+                        <a:rPr lang="en-US" sz="1300" dirty="0">
                           <a:solidFill>
                             <a:srgbClr val="1E2A26"/>
                           </a:solidFill>
@@ -4500,16 +4739,84 @@
                           <a:ea typeface="Meiryo UI" pitchFamily="34" charset="-122"/>
                           <a:cs typeface="Meiryo UI" pitchFamily="34" charset="-120"/>
                         </a:rPr>
-                        <a:t>24円/kg</a:t>
+                        <a:t>2026年4月</a:t>
                       </a:r>
-                      <a:endParaRPr lang="en-US" sz="1400" dirty="0">
+                      <a:endParaRPr lang="en-US" sz="1300" dirty="0">
                         <a:latin typeface="Meiryo UI" charset="0"/>
                         <a:ea typeface="Meiryo UI" charset="0"/>
                         <a:cs typeface="Meiryo UI" charset="0"/>
                       </a:endParaRPr>
                     </a:p>
                   </a:txBody>
-                  <a:tcPr marL="91440" marR="91440" marT="91440" marB="91440" anchor="ctr">
+                  <a:tcPr marL="73152" marR="73152" marT="73152" marB="73152" anchor="ctr">
+                    <a:lnL w="12700" cap="flat" cmpd="sng" algn="ctr">
+                      <a:solidFill>
+                        <a:srgbClr val="C9DDD3"/>
+                      </a:solidFill>
+                      <a:prstDash val="solid"/>
+                      <a:round/>
+                      <a:headEnd type="none" w="med" len="med"/>
+                      <a:tailEnd type="none" w="med" len="med"/>
+                    </a:lnL>
+                    <a:lnR w="12700" cap="flat" cmpd="sng" algn="ctr">
+                      <a:solidFill>
+                        <a:srgbClr val="C9DDD3"/>
+                      </a:solidFill>
+                      <a:prstDash val="solid"/>
+                      <a:round/>
+                      <a:headEnd type="none" w="med" len="med"/>
+                      <a:tailEnd type="none" w="med" len="med"/>
+                    </a:lnR>
+                    <a:lnT w="12700" cap="flat" cmpd="sng" algn="ctr">
+                      <a:solidFill>
+                        <a:srgbClr val="C9DDD3"/>
+                      </a:solidFill>
+                      <a:prstDash val="solid"/>
+                      <a:round/>
+                      <a:headEnd type="none" w="med" len="med"/>
+                      <a:tailEnd type="none" w="med" len="med"/>
+                    </a:lnT>
+                    <a:lnB w="12700" cap="flat" cmpd="sng" algn="ctr">
+                      <a:solidFill>
+                        <a:srgbClr val="C9DDD3"/>
+                      </a:solidFill>
+                      <a:prstDash val="solid"/>
+                      <a:round/>
+                      <a:headEnd type="none" w="med" len="med"/>
+                      <a:tailEnd type="none" w="med" len="med"/>
+                    </a:lnB>
+                    <a:solidFill>
+                      <a:srgbClr val="EAF4EF"/>
+                    </a:solidFill>
+                  </a:tcPr>
+                </a:tc>
+                <a:tc>
+                  <a:txBody>
+                    <a:bodyPr/>
+                    <a:lstStyle/>
+                    <a:p>
+                      <a:pPr algn="l" indent="0" marL="0">
+                        <a:buNone/>
+                      </a:pPr>
+                      <a:r>
+                        <a:rPr lang="en-US" sz="1300" dirty="0">
+                          <a:solidFill>
+                            <a:srgbClr val="1E2A26"/>
+                          </a:solidFill>
+                          <a:latin typeface="Meiryo UI" pitchFamily="34" charset="0"/>
+                          <a:ea typeface="Meiryo UI" pitchFamily="34" charset="-122"/>
+                          <a:cs typeface="Meiryo UI" pitchFamily="34" charset="-120"/>
+                        </a:rPr>
+                        <a:t>7円/kg → 10円/kg</a:t>
+                      </a:r>
+                      <a:endParaRPr lang="en-US" sz="1300" dirty="0">
+                        <a:latin typeface="Meiryo UI" charset="0"/>
+                        <a:ea typeface="Meiryo UI" charset="0"/>
+                        <a:cs typeface="Meiryo UI" charset="0"/>
+                      </a:endParaRPr>
+                    </a:p>
+                  </a:txBody>
+                  <a:tcPr marL="73152" marR="73152" marT="73152" marB="73152" anchor="ctr">
                     <a:lnL w="12700" cap="flat" cmpd="sng" algn="ctr">
                       <a:solidFill>
                         <a:srgbClr val="C9DDD3"/>
@@ -4560,7 +4867,7 @@
                         <a:buNone/>
                       </a:pPr>
                       <a:r>
-                        <a:rPr lang="en-US" sz="1400" dirty="0">
+                        <a:rPr lang="en-US" sz="1300" dirty="0">
                           <a:solidFill>
                             <a:srgbClr val="1E2A26"/>
                           </a:solidFill>
@@ -4568,16 +4875,16 @@
                           <a:ea typeface="Meiryo UI" pitchFamily="34" charset="-122"/>
                           <a:cs typeface="Meiryo UI" pitchFamily="34" charset="-120"/>
                         </a:rPr>
-                        <a:t>23円/kg</a:t>
+                        <a:t>24t</a:t>
                       </a:r>
-                      <a:endParaRPr lang="en-US" sz="1400" dirty="0">
+                      <a:endParaRPr lang="en-US" sz="1300" dirty="0">
                         <a:latin typeface="Meiryo UI" charset="0"/>
                         <a:ea typeface="Meiryo UI" charset="0"/>
                         <a:cs typeface="Meiryo UI" charset="0"/>
                       </a:endParaRPr>
                     </a:p>
                   </a:txBody>
-                  <a:tcPr marL="91440" marR="91440" marT="91440" marB="91440" anchor="ctr">
+                  <a:tcPr marL="73152" marR="73152" marT="73152" marB="73152" anchor="ctr">
                     <a:lnL w="12700" cap="flat" cmpd="sng" algn="ctr">
                       <a:solidFill>
                         <a:srgbClr val="C9DDD3"/>
@@ -4636,7 +4943,7 @@
                           <a:ea typeface="Meiryo UI" pitchFamily="34" charset="-122"/>
                           <a:cs typeface="Meiryo UI" pitchFamily="34" charset="-120"/>
                         </a:rPr>
-                        <a:t>+1,000円</a:t>
+                        <a:t>86.4万円</a:t>
                       </a:r>
                       <a:endParaRPr lang="en-US" sz="1800" dirty="0">
                         <a:latin typeface="Meiryo UI" charset="0"/>
@@ -4645,7 +4952,7 @@
                       </a:endParaRPr>
                     </a:p>
                   </a:txBody>
-                  <a:tcPr marL="91440" marR="91440" marT="91440" marB="91440" anchor="ctr">
+                  <a:tcPr marL="73152" marR="73152" marT="73152" marB="73152" anchor="ctr">
                     <a:lnL w="12700" cap="flat" cmpd="sng" algn="ctr">
                       <a:solidFill>
                         <a:srgbClr val="C9DDD3"/>
@@ -4688,7 +4995,7 @@
                   </a:tcPr>
                 </a:tc>
               </a:tr>
-              <a:tr h="868680">
+              <a:tr h="548640">
                 <a:tc>
                   <a:txBody>
                     <a:bodyPr/>
@@ -4698,7 +5005,7 @@
                         <a:buNone/>
                       </a:pPr>
                       <a:r>
-                        <a:rPr lang="en-US" sz="1400" b="1" dirty="0">
+                        <a:rPr lang="en-US" sz="1300" b="1" dirty="0">
                           <a:solidFill>
                             <a:srgbClr val="1E2A26"/>
                           </a:solidFill>
@@ -4706,16 +5013,16 @@
                           <a:ea typeface="Meiryo UI" pitchFamily="34" charset="-122"/>
                           <a:cs typeface="Meiryo UI" pitchFamily="34" charset="-120"/>
                         </a:rPr>
-                        <a:t>太平洋セメント</a:t>
+                        <a:t>サニックス</a:t>
                       </a:r>
-                      <a:endParaRPr lang="en-US" sz="1400" dirty="0">
+                      <a:endParaRPr lang="en-US" sz="1300" dirty="0">
                         <a:latin typeface="Meiryo UI" charset="0"/>
                         <a:ea typeface="Meiryo UI" charset="0"/>
                         <a:cs typeface="Meiryo UI" charset="0"/>
                       </a:endParaRPr>
                     </a:p>
                   </a:txBody>
-                  <a:tcPr marL="91440" marR="91440" marT="91440" marB="91440" anchor="ctr">
+                  <a:tcPr marL="73152" marR="73152" marT="73152" marB="73152" anchor="ctr">
                     <a:lnL w="12700" cap="flat" cmpd="sng" algn="ctr">
                       <a:solidFill>
                         <a:srgbClr val="C9DDD3"/>
@@ -4766,7 +5073,7 @@
                         <a:buNone/>
                       </a:pPr>
                       <a:r>
-                        <a:rPr lang="en-US" sz="1400" dirty="0">
+                        <a:rPr lang="en-US" sz="1300" dirty="0">
                           <a:solidFill>
                             <a:srgbClr val="1E2A26"/>
                           </a:solidFill>
@@ -4774,16 +5081,16 @@
                           <a:ea typeface="Meiryo UI" pitchFamily="34" charset="-122"/>
                           <a:cs typeface="Meiryo UI" pitchFamily="34" charset="-120"/>
                         </a:rPr>
-                        <a:t>受け入れ量の拡大</a:t>
+                        <a:t>処分費の値下げ交渉</a:t>
                       </a:r>
-                      <a:endParaRPr lang="en-US" sz="1400" dirty="0">
+                      <a:endParaRPr lang="en-US" sz="1300" dirty="0">
                         <a:latin typeface="Meiryo UI" charset="0"/>
                         <a:ea typeface="Meiryo UI" charset="0"/>
                         <a:cs typeface="Meiryo UI" charset="0"/>
                       </a:endParaRPr>
                     </a:p>
                   </a:txBody>
-                  <a:tcPr marL="91440" marR="91440" marT="91440" marB="91440" anchor="ctr">
+                  <a:tcPr marL="73152" marR="73152" marT="73152" marB="73152" anchor="ctr">
                     <a:lnL w="12700" cap="flat" cmpd="sng" algn="ctr">
                       <a:solidFill>
                         <a:srgbClr val="C9DDD3"/>
@@ -4834,7 +5141,7 @@
                         <a:buNone/>
                       </a:pPr>
                       <a:r>
-                        <a:rPr lang="en-US" sz="1400" dirty="0">
+                        <a:rPr lang="en-US" sz="1300" dirty="0">
                           <a:solidFill>
                             <a:srgbClr val="1E2A26"/>
                           </a:solidFill>
@@ -4842,16 +5149,84 @@
                           <a:ea typeface="Meiryo UI" pitchFamily="34" charset="-122"/>
                           <a:cs typeface="Meiryo UI" pitchFamily="34" charset="-120"/>
                         </a:rPr>
-                        <a:t>—</a:t>
+                        <a:t>2024年</a:t>
                       </a:r>
-                      <a:endParaRPr lang="en-US" sz="1400" dirty="0">
+                      <a:endParaRPr lang="en-US" sz="1300" dirty="0">
                         <a:latin typeface="Meiryo UI" charset="0"/>
                         <a:ea typeface="Meiryo UI" charset="0"/>
                         <a:cs typeface="Meiryo UI" charset="0"/>
                       </a:endParaRPr>
                     </a:p>
                   </a:txBody>
-                  <a:tcPr marL="91440" marR="91440" marT="91440" marB="91440" anchor="ctr">
+                  <a:tcPr marL="73152" marR="73152" marT="73152" marB="73152" anchor="ctr">
+                    <a:lnL w="12700" cap="flat" cmpd="sng" algn="ctr">
+                      <a:solidFill>
+                        <a:srgbClr val="C9DDD3"/>
+                      </a:solidFill>
+                      <a:prstDash val="solid"/>
+                      <a:round/>
+                      <a:headEnd type="none" w="med" len="med"/>
+                      <a:tailEnd type="none" w="med" len="med"/>
+                    </a:lnL>
+                    <a:lnR w="12700" cap="flat" cmpd="sng" algn="ctr">
+                      <a:solidFill>
+                        <a:srgbClr val="C9DDD3"/>
+                      </a:solidFill>
+                      <a:prstDash val="solid"/>
+                      <a:round/>
+                      <a:headEnd type="none" w="med" len="med"/>
+                      <a:tailEnd type="none" w="med" len="med"/>
+                    </a:lnR>
+                    <a:lnT w="12700" cap="flat" cmpd="sng" algn="ctr">
+                      <a:solidFill>
+                        <a:srgbClr val="C9DDD3"/>
+                      </a:solidFill>
+                      <a:prstDash val="solid"/>
+                      <a:round/>
+                      <a:headEnd type="none" w="med" len="med"/>
+                      <a:tailEnd type="none" w="med" len="med"/>
+                    </a:lnT>
+                    <a:lnB w="12700" cap="flat" cmpd="sng" algn="ctr">
+                      <a:solidFill>
+                        <a:srgbClr val="C9DDD3"/>
+                      </a:solidFill>
+                      <a:prstDash val="solid"/>
+                      <a:round/>
+                      <a:headEnd type="none" w="med" len="med"/>
+                      <a:tailEnd type="none" w="med" len="med"/>
+                    </a:lnB>
+                    <a:solidFill>
+                      <a:srgbClr val="FFFFFF"/>
+                    </a:solidFill>
+                  </a:tcPr>
+                </a:tc>
+                <a:tc>
+                  <a:txBody>
+                    <a:bodyPr/>
+                    <a:lstStyle/>
+                    <a:p>
+                      <a:pPr algn="l" indent="0" marL="0">
+                        <a:buNone/>
+                      </a:pPr>
+                      <a:r>
+                        <a:rPr lang="en-US" sz="1300" dirty="0">
+                          <a:solidFill>
+                            <a:srgbClr val="1E2A26"/>
+                          </a:solidFill>
+                          <a:latin typeface="Meiryo UI" pitchFamily="34" charset="0"/>
+                          <a:ea typeface="Meiryo UI" pitchFamily="34" charset="-122"/>
+                          <a:cs typeface="Meiryo UI" pitchFamily="34" charset="-120"/>
+                        </a:rPr>
+                        <a:t>24円/kg → 23円/kg</a:t>
+                      </a:r>
+                      <a:endParaRPr lang="en-US" sz="1300" dirty="0">
+                        <a:latin typeface="Meiryo UI" charset="0"/>
+                        <a:ea typeface="Meiryo UI" charset="0"/>
+                        <a:cs typeface="Meiryo UI" charset="0"/>
+                      </a:endParaRPr>
+                    </a:p>
+                  </a:txBody>
+                  <a:tcPr marL="73152" marR="73152" marT="73152" marB="73152" anchor="ctr">
                     <a:lnL w="12700" cap="flat" cmpd="sng" algn="ctr">
                       <a:solidFill>
                         <a:srgbClr val="C9DDD3"/>
@@ -4902,7 +5277,7 @@
                         <a:buNone/>
                       </a:pPr>
                       <a:r>
-                        <a:rPr lang="en-US" sz="1400" dirty="0">
+                        <a:rPr lang="en-US" sz="1300" dirty="0">
                           <a:solidFill>
                             <a:srgbClr val="1E2A26"/>
                           </a:solidFill>
@@ -4910,37 +5285,16 @@
                           <a:ea typeface="Meiryo UI" pitchFamily="34" charset="-122"/>
                           <a:cs typeface="Meiryo UI" pitchFamily="34" charset="-120"/>
                         </a:rPr>
-                        <a:t>受け入れ量</a:t>
+                        <a:t>20t</a:t>
                       </a:r>
-                      <a:endParaRPr lang="en-US" sz="1400" dirty="0">
-                        <a:latin typeface="Meiryo UI" charset="0"/>
-                        <a:ea typeface="Meiryo UI" charset="0"/>
-                        <a:cs typeface="Meiryo UI" charset="0"/>
-                      </a:endParaRPr>
-                    </a:p>
-                    <a:p>
-                      <a:pPr algn="ctr" indent="0" marL="0">
-                        <a:buNone/>
-                      </a:pPr>
-                      <a:r>
-                        <a:rPr lang="en-US" sz="1400" dirty="0">
-                          <a:solidFill>
-                            <a:srgbClr val="1E2A26"/>
-                          </a:solidFill>
-                          <a:latin typeface="Meiryo UI" pitchFamily="34" charset="0"/>
-                          <a:ea typeface="Meiryo UI" pitchFamily="34" charset="-122"/>
-                          <a:cs typeface="Meiryo UI" pitchFamily="34" charset="-120"/>
-                        </a:rPr>
-                        <a:t>大幅増</a:t>
-                      </a:r>
-                      <a:endParaRPr lang="en-US" sz="1400" dirty="0">
+                      <a:endParaRPr lang="en-US" sz="1300" dirty="0">
                         <a:latin typeface="Meiryo UI" charset="0"/>
                         <a:ea typeface="Meiryo UI" charset="0"/>
                         <a:cs typeface="Meiryo UI" charset="0"/>
                       </a:endParaRPr>
                     </a:p>
                   </a:txBody>
-                  <a:tcPr marL="91440" marR="91440" marT="91440" marB="91440" anchor="ctr">
+                  <a:tcPr marL="73152" marR="73152" marT="73152" marB="73152" anchor="ctr">
                     <a:lnL w="12700" cap="flat" cmpd="sng" algn="ctr">
                       <a:solidFill>
                         <a:srgbClr val="C9DDD3"/>
@@ -4991,7 +5345,7 @@
                         <a:buNone/>
                       </a:pPr>
                       <a:r>
-                        <a:rPr lang="en-US" sz="1400" b="1" dirty="0">
+                        <a:rPr lang="en-US" sz="1800" b="1" dirty="0">
                           <a:solidFill>
                             <a:srgbClr val="2E8B6E"/>
                           </a:solidFill>
@@ -4999,14 +5353,143 @@
                           <a:ea typeface="Meiryo UI" pitchFamily="34" charset="-122"/>
                           <a:cs typeface="Meiryo UI" pitchFamily="34" charset="-120"/>
                         </a:rPr>
-                        <a:t>処理先の</a:t>
+                        <a:t>24万円</a:t>
                       </a:r>
-                      <a:endParaRPr lang="en-US" sz="1400" dirty="0">
+                      <a:endParaRPr lang="en-US" sz="1800" dirty="0">
                         <a:latin typeface="Meiryo UI" charset="0"/>
                         <a:ea typeface="Meiryo UI" charset="0"/>
                         <a:cs typeface="Meiryo UI" charset="0"/>
                       </a:endParaRPr>
                     </a:p>
+                  </a:txBody>
+                  <a:tcPr marL="73152" marR="73152" marT="73152" marB="73152" anchor="ctr">
+                    <a:lnL w="12700" cap="flat" cmpd="sng" algn="ctr">
+                      <a:solidFill>
+                        <a:srgbClr val="C9DDD3"/>
+                      </a:solidFill>
+                      <a:prstDash val="solid"/>
+                      <a:round/>
+                      <a:headEnd type="none" w="med" len="med"/>
+                      <a:tailEnd type="none" w="med" len="med"/>
+                    </a:lnL>
+                    <a:lnR w="12700" cap="flat" cmpd="sng" algn="ctr">
+                      <a:solidFill>
+                        <a:srgbClr val="C9DDD3"/>
+                      </a:solidFill>
+                      <a:prstDash val="solid"/>
+                      <a:round/>
+                      <a:headEnd type="none" w="med" len="med"/>
+                      <a:tailEnd type="none" w="med" len="med"/>
+                    </a:lnR>
+                    <a:lnT w="12700" cap="flat" cmpd="sng" algn="ctr">
+                      <a:solidFill>
+                        <a:srgbClr val="C9DDD3"/>
+                      </a:solidFill>
+                      <a:prstDash val="solid"/>
+                      <a:round/>
+                      <a:headEnd type="none" w="med" len="med"/>
+                      <a:tailEnd type="none" w="med" len="med"/>
+                    </a:lnT>
+                    <a:lnB w="12700" cap="flat" cmpd="sng" algn="ctr">
+                      <a:solidFill>
+                        <a:srgbClr val="C9DDD3"/>
+                      </a:solidFill>
+                      <a:prstDash val="solid"/>
+                      <a:round/>
+                      <a:headEnd type="none" w="med" len="med"/>
+                      <a:tailEnd type="none" w="med" len="med"/>
+                    </a:lnB>
+                    <a:solidFill>
+                      <a:srgbClr val="FFFFFF"/>
+                    </a:solidFill>
+                  </a:tcPr>
+                </a:tc>
+              </a:tr>
+              <a:tr h="548640">
+                <a:tc gridSpan="5">
+                  <a:txBody>
+                    <a:bodyPr/>
+                    <a:lstStyle/>
+                    <a:p>
+                      <a:pPr algn="r" indent="0" marL="0">
+                        <a:buNone/>
+                      </a:pPr>
+                      <a:r>
+                        <a:rPr lang="en-US" sz="1500" b="1" dirty="0">
+                          <a:solidFill>
+                            <a:srgbClr val="FFFFFF"/>
+                          </a:solidFill>
+                          <a:latin typeface="Meiryo UI" pitchFamily="34" charset="0"/>
+                          <a:ea typeface="Meiryo UI" pitchFamily="34" charset="-122"/>
+                          <a:cs typeface="Meiryo UI" pitchFamily="34" charset="-120"/>
+                        </a:rPr>
+                        <a:t>合計（年換算）</a:t>
+                      </a:r>
+                      <a:endParaRPr lang="en-US" sz="1500" dirty="0">
+                        <a:latin typeface="Meiryo UI" charset="0"/>
+                        <a:ea typeface="Meiryo UI" charset="0"/>
+                        <a:cs typeface="Meiryo UI" charset="0"/>
+                      </a:endParaRPr>
+                    </a:p>
+                  </a:txBody>
+                  <a:tcPr marL="73152" marR="73152" marT="73152" marB="73152" anchor="ctr">
+                    <a:lnL w="12700" cap="flat" cmpd="sng" algn="ctr">
+                      <a:solidFill>
+                        <a:srgbClr val="C9DDD3"/>
+                      </a:solidFill>
+                      <a:prstDash val="solid"/>
+                      <a:round/>
+                      <a:headEnd type="none" w="med" len="med"/>
+                      <a:tailEnd type="none" w="med" len="med"/>
+                    </a:lnL>
+                    <a:lnR w="12700" cap="flat" cmpd="sng" algn="ctr">
+                      <a:solidFill>
+                        <a:srgbClr val="C9DDD3"/>
+                      </a:solidFill>
+                      <a:prstDash val="solid"/>
+                      <a:round/>
+                      <a:headEnd type="none" w="med" len="med"/>
+                      <a:tailEnd type="none" w="med" len="med"/>
+                    </a:lnR>
+                    <a:lnT w="12700" cap="flat" cmpd="sng" algn="ctr">
+                      <a:solidFill>
+                        <a:srgbClr val="C9DDD3"/>
+                      </a:solidFill>
+                      <a:prstDash val="solid"/>
+                      <a:round/>
+                      <a:headEnd type="none" w="med" len="med"/>
+                      <a:tailEnd type="none" w="med" len="med"/>
+                    </a:lnT>
+                    <a:lnB w="12700" cap="flat" cmpd="sng" algn="ctr">
+                      <a:solidFill>
+                        <a:srgbClr val="C9DDD3"/>
+                      </a:solidFill>
+                      <a:prstDash val="solid"/>
+                      <a:round/>
+                      <a:headEnd type="none" w="med" len="med"/>
+                      <a:tailEnd type="none" w="med" len="med"/>
+                    </a:lnB>
+                    <a:solidFill>
+                      <a:srgbClr val="1F4D3A"/>
+                    </a:solidFill>
+                  </a:tcPr>
+                </a:tc>
+                <a:tc hMerge="1">
+                  <a:tcPr/>
+                </a:tc>
+                <a:tc hMerge="1">
+                  <a:tcPr/>
+                </a:tc>
+                <a:tc hMerge="1">
+                  <a:tcPr/>
+                </a:tc>
+                <a:tc hMerge="1">
+                  <a:tcPr/>
+                </a:tc>
+                <a:tc>
+                  <a:txBody>
+                    <a:bodyPr/>
+                    <a:lstStyle/>
                     <a:p>
                       <a:pPr algn="ctr" indent="0" marL="0">
                         <a:buNone/>
@@ -5014,13 +5497,13 @@
                       <a:r>
                         <a:rPr lang="en-US" sz="1400" b="1" dirty="0">
                           <a:solidFill>
-                            <a:srgbClr val="2E8B6E"/>
+                            <a:srgbClr val="FFFFFF"/>
                           </a:solidFill>
                           <a:latin typeface="Meiryo UI" pitchFamily="34" charset="0"/>
                           <a:ea typeface="Meiryo UI" pitchFamily="34" charset="-122"/>
                           <a:cs typeface="Meiryo UI" pitchFamily="34" charset="-120"/>
                         </a:rPr>
-                        <a:t>安定確保</a:t>
+                        <a:t>約1,394万円</a:t>
                       </a:r>
                       <a:endParaRPr lang="en-US" sz="1400" dirty="0">
                         <a:latin typeface="Meiryo UI" charset="0"/>
@@ -5029,7 +5512,7 @@
                       </a:endParaRPr>
                     </a:p>
                   </a:txBody>
-                  <a:tcPr marL="91440" marR="91440" marT="91440" marB="91440" anchor="ctr">
+                  <a:tcPr marL="73152" marR="73152" marT="73152" marB="73152" anchor="ctr">
                     <a:lnL w="12700" cap="flat" cmpd="sng" algn="ctr">
                       <a:solidFill>
                         <a:srgbClr val="C9DDD3"/>
@@ -5067,7 +5550,7 @@
                       <a:tailEnd type="none" w="med" len="med"/>
                     </a:lnB>
                     <a:solidFill>
-                      <a:srgbClr val="FFFFFF"/>
+                      <a:srgbClr val="1F4D3A"/>
                     </a:solidFill>
                   </a:tcPr>
                 </a:tc>
@@ -5084,8 +5567,8 @@
         </p:nvSpPr>
         <p:spPr>
           <a:xfrm>
-            <a:off x="548640" y="5806440"/>
-            <a:ext cx="11064240" cy="365760"/>
+            <a:off x="548640" y="5715000"/>
+            <a:ext cx="11064240" cy="502920"/>
           </a:xfrm>
           <a:prstGeom prst="rect">
             <a:avLst/>
@@ -5109,7 +5592,7 @@
                 <a:ea typeface="Meiryo UI" pitchFamily="34" charset="-122"/>
                 <a:cs typeface="Meiryo UI" pitchFamily="34" charset="-120"/>
               </a:rPr>
-              <a:t>※ 1tあたりの効果＝単価の差×1,000kg。年間の効果額は「年間の取り扱い量（t）× 1tあたりの効果」で計算できます。</a:t>
+              <a:t>※ 年間効果＝月の量×単価の差×12か月。太平洋セメントは、増えた70t/月をサニークリエーションプランニング（18円/kg）に出した場合との差（7円/kg）で試算。</a:t>
             </a:r>
             <a:endParaRPr lang="en-US" sz="1200" dirty="0"/>
           </a:p>
@@ -5217,7 +5700,7 @@
                   <a:schemeClr val="tx2"/>
                 </a:solidFill>
               </a:rPr>
-              <a:t>最大の成果：C級パレットを「費用」から「収入」へ</a:t>
+              <a:t>成果1：C級パレットを「費用」から「収入」へ</a:t>
             </a:r>
             <a:endParaRPr lang="en-US" sz="3000" dirty="0"/>
           </a:p>
@@ -5256,7 +5739,7 @@
                 <a:ea typeface="Meiryo UI" pitchFamily="34" charset="-122"/>
                 <a:cs typeface="Meiryo UI" pitchFamily="34" charset="-120"/>
               </a:rPr>
-              <a:t>新日本リプラスを新たに開拓し、処分費を払って出していたC級パレットを買い取ってもらう形に変えました。</a:t>
+              <a:t>新日本リプラスを新たに開拓し、処分費を払って出していたC級パレットを買い取ってもらう契約を結びました。</a:t>
             </a:r>
             <a:endParaRPr lang="en-US" sz="1600" dirty="0"/>
           </a:p>
@@ -5270,8 +5753,334 @@
         </p:nvSpPr>
         <p:spPr>
           <a:xfrm>
-            <a:off x="548640" y="1874520"/>
-            <a:ext cx="2468880" cy="2103120"/>
+            <a:off x="548640" y="1828800"/>
+            <a:ext cx="2468880" cy="1920240"/>
+          </a:xfrm>
+          <a:prstGeom prst="roundRect">
+            <a:avLst>
+              <a:gd name="adj" fmla="val 5714"/>
+            </a:avLst>
+          </a:prstGeom>
+          <a:solidFill>
+            <a:schemeClr val="bg2"/>
+          </a:solidFill>
+          <a:ln/>
+        </p:spPr>
+      </p:sp>
+      <p:sp>
+        <p:nvSpPr>
+          <p:cNvPr id="5" name="Text 3"/>
+          <p:cNvSpPr txBox="1"/>
+          <p:nvPr/>
+        </p:nvSpPr>
+        <p:spPr>
+          <a:xfrm>
+            <a:off x="548640" y="2011680"/>
+            <a:ext cx="2468880" cy="365760"/>
+          </a:xfrm>
+          <a:prstGeom prst="rect">
+            <a:avLst/>
+          </a:prstGeom>
+          <a:noFill/>
+          <a:ln/>
+        </p:spPr>
+        <p:txBody>
+          <a:bodyPr wrap="square" lIns="0" tIns="0" rIns="0" bIns="0" rtlCol="0" anchor="ctr"/>
+          <a:lstStyle/>
+          <a:p>
+            <a:pPr algn="ctr" indent="0" marL="0">
+              <a:buNone/>
+            </a:pPr>
+            <a:r>
+              <a:rPr lang="en-US" sz="1500" b="1" dirty="0">
+                <a:solidFill>
+                  <a:schemeClr val="accent5"/>
+                </a:solidFill>
+                <a:latin typeface="Meiryo UI" pitchFamily="34" charset="0"/>
+                <a:ea typeface="Meiryo UI" pitchFamily="34" charset="-122"/>
+                <a:cs typeface="Meiryo UI" pitchFamily="34" charset="-120"/>
+              </a:rPr>
+              <a:t>これまで</a:t>
+            </a:r>
+            <a:endParaRPr lang="en-US" sz="1500" dirty="0"/>
+          </a:p>
+        </p:txBody>
+      </p:sp>
+      <p:sp>
+        <p:nvSpPr>
+          <p:cNvPr id="6" name="Text 4"/>
+          <p:cNvSpPr txBox="1"/>
+          <p:nvPr/>
+        </p:nvSpPr>
+        <p:spPr>
+          <a:xfrm>
+            <a:off x="548640" y="2377440"/>
+            <a:ext cx="2468880" cy="822960"/>
+          </a:xfrm>
+          <a:prstGeom prst="rect">
+            <a:avLst/>
+          </a:prstGeom>
+          <a:noFill/>
+          <a:ln/>
+        </p:spPr>
+        <p:txBody>
+          <a:bodyPr wrap="square" lIns="0" tIns="0" rIns="0" bIns="0" rtlCol="0" anchor="ctr"/>
+          <a:lstStyle/>
+          <a:p>
+            <a:pPr algn="ctr" indent="0" marL="0">
+              <a:buNone/>
+            </a:pPr>
+            <a:r>
+              <a:rPr lang="en-US" sz="4400" b="1" dirty="0">
+                <a:solidFill>
+                  <a:schemeClr val="accent3"/>
+                </a:solidFill>
+                <a:latin typeface="Meiryo UI" pitchFamily="34" charset="0"/>
+                <a:ea typeface="Meiryo UI" pitchFamily="34" charset="-122"/>
+                <a:cs typeface="Meiryo UI" pitchFamily="34" charset="-120"/>
+              </a:rPr>
+              <a:t>−28</a:t>
+            </a:r>
+            <a:pPr algn="ctr" indent="0" marL="0">
+              <a:buNone/>
+            </a:pPr>
+            <a:r>
+              <a:rPr lang="en-US" sz="1500" b="1" dirty="0">
+                <a:solidFill>
+                  <a:schemeClr val="accent3"/>
+                </a:solidFill>
+                <a:latin typeface="Meiryo UI" pitchFamily="34" charset="0"/>
+                <a:ea typeface="Meiryo UI" pitchFamily="34" charset="-122"/>
+                <a:cs typeface="Meiryo UI" pitchFamily="34" charset="-120"/>
+              </a:rPr>
+              <a:t> 円/kg</a:t>
+            </a:r>
+            <a:endParaRPr lang="en-US" sz="4400" dirty="0"/>
+          </a:p>
+        </p:txBody>
+      </p:sp>
+      <p:sp>
+        <p:nvSpPr>
+          <p:cNvPr id="7" name="Text 5"/>
+          <p:cNvSpPr txBox="1"/>
+          <p:nvPr/>
+        </p:nvSpPr>
+        <p:spPr>
+          <a:xfrm>
+            <a:off x="548640" y="3246120"/>
+            <a:ext cx="2468880" cy="365760"/>
+          </a:xfrm>
+          <a:prstGeom prst="rect">
+            <a:avLst/>
+          </a:prstGeom>
+          <a:noFill/>
+          <a:ln/>
+        </p:spPr>
+        <p:txBody>
+          <a:bodyPr wrap="square" lIns="0" tIns="0" rIns="0" bIns="0" rtlCol="0" anchor="ctr"/>
+          <a:lstStyle/>
+          <a:p>
+            <a:pPr algn="ctr" indent="0" marL="0">
+              <a:buNone/>
+            </a:pPr>
+            <a:r>
+              <a:rPr lang="en-US" sz="1400" dirty="0">
+                <a:solidFill>
+                  <a:schemeClr val="accent5"/>
+                </a:solidFill>
+                <a:latin typeface="Meiryo UI" pitchFamily="34" charset="0"/>
+                <a:ea typeface="Meiryo UI" pitchFamily="34" charset="-122"/>
+                <a:cs typeface="Meiryo UI" pitchFamily="34" charset="-120"/>
+              </a:rPr>
+              <a:t>処分費を支払う</a:t>
+            </a:r>
+            <a:endParaRPr lang="en-US" sz="1400" dirty="0"/>
+          </a:p>
+        </p:txBody>
+      </p:sp>
+      <p:sp>
+        <p:nvSpPr>
+          <p:cNvPr id="8" name="Shape 6"/>
+          <p:cNvSpPr/>
+          <p:nvPr/>
+        </p:nvSpPr>
+        <p:spPr>
+          <a:xfrm>
+            <a:off x="3200400" y="2514600"/>
+            <a:ext cx="365760" cy="548640"/>
+          </a:xfrm>
+          <a:prstGeom prst="chevron">
+            <a:avLst/>
+          </a:prstGeom>
+          <a:solidFill>
+            <a:schemeClr val="accent4"/>
+          </a:solidFill>
+          <a:ln/>
+        </p:spPr>
+      </p:sp>
+      <p:sp>
+        <p:nvSpPr>
+          <p:cNvPr id="9" name="after"/>
+          <p:cNvSpPr/>
+          <p:nvPr/>
+        </p:nvSpPr>
+        <p:spPr>
+          <a:xfrm>
+            <a:off x="3749040" y="1828800"/>
+            <a:ext cx="2468880" cy="1920240"/>
+          </a:xfrm>
+          <a:prstGeom prst="roundRect">
+            <a:avLst>
+              <a:gd name="adj" fmla="val 5714"/>
+            </a:avLst>
+          </a:prstGeom>
+          <a:solidFill>
+            <a:schemeClr val="tx2"/>
+          </a:solidFill>
+          <a:ln/>
+        </p:spPr>
+      </p:sp>
+      <p:sp>
+        <p:nvSpPr>
+          <p:cNvPr id="10" name="Text 8"/>
+          <p:cNvSpPr txBox="1"/>
+          <p:nvPr/>
+        </p:nvSpPr>
+        <p:spPr>
+          <a:xfrm>
+            <a:off x="3749040" y="2011680"/>
+            <a:ext cx="2468880" cy="365760"/>
+          </a:xfrm>
+          <a:prstGeom prst="rect">
+            <a:avLst/>
+          </a:prstGeom>
+          <a:noFill/>
+          <a:ln/>
+        </p:spPr>
+        <p:txBody>
+          <a:bodyPr wrap="square" lIns="0" tIns="0" rIns="0" bIns="0" rtlCol="0" anchor="ctr"/>
+          <a:lstStyle/>
+          <a:p>
+            <a:pPr algn="ctr" indent="0" marL="0">
+              <a:buNone/>
+            </a:pPr>
+            <a:r>
+              <a:rPr lang="en-US" sz="1500" b="1" dirty="0">
+                <a:solidFill>
+                  <a:schemeClr val="accent4"/>
+                </a:solidFill>
+                <a:latin typeface="Meiryo UI" pitchFamily="34" charset="0"/>
+                <a:ea typeface="Meiryo UI" pitchFamily="34" charset="-122"/>
+                <a:cs typeface="Meiryo UI" pitchFamily="34" charset="-120"/>
+              </a:rPr>
+              <a:t>2026年6月から</a:t>
+            </a:r>
+            <a:endParaRPr lang="en-US" sz="1500" dirty="0"/>
+          </a:p>
+        </p:txBody>
+      </p:sp>
+      <p:sp>
+        <p:nvSpPr>
+          <p:cNvPr id="11" name="Text 9"/>
+          <p:cNvSpPr txBox="1"/>
+          <p:nvPr/>
+        </p:nvSpPr>
+        <p:spPr>
+          <a:xfrm>
+            <a:off x="3749040" y="2377440"/>
+            <a:ext cx="2468880" cy="822960"/>
+          </a:xfrm>
+          <a:prstGeom prst="rect">
+            <a:avLst/>
+          </a:prstGeom>
+          <a:noFill/>
+          <a:ln/>
+        </p:spPr>
+        <p:txBody>
+          <a:bodyPr wrap="square" lIns="0" tIns="0" rIns="0" bIns="0" rtlCol="0" anchor="ctr"/>
+          <a:lstStyle/>
+          <a:p>
+            <a:pPr algn="ctr" indent="0" marL="0">
+              <a:buNone/>
+            </a:pPr>
+            <a:r>
+              <a:rPr lang="en-US" sz="4400" b="1" dirty="0">
+                <a:solidFill>
+                  <a:schemeClr val="bg1"/>
+                </a:solidFill>
+                <a:latin typeface="Meiryo UI" pitchFamily="34" charset="0"/>
+                <a:ea typeface="Meiryo UI" pitchFamily="34" charset="-122"/>
+                <a:cs typeface="Meiryo UI" pitchFamily="34" charset="-120"/>
+              </a:rPr>
+              <a:t>+1</a:t>
+            </a:r>
+            <a:pPr algn="ctr" indent="0" marL="0">
+              <a:buNone/>
+            </a:pPr>
+            <a:r>
+              <a:rPr lang="en-US" sz="1500" b="1" dirty="0">
+                <a:solidFill>
+                  <a:schemeClr val="bg1"/>
+                </a:solidFill>
+                <a:latin typeface="Meiryo UI" pitchFamily="34" charset="0"/>
+                <a:ea typeface="Meiryo UI" pitchFamily="34" charset="-122"/>
+                <a:cs typeface="Meiryo UI" pitchFamily="34" charset="-120"/>
+              </a:rPr>
+              <a:t> 円/kg</a:t>
+            </a:r>
+            <a:endParaRPr lang="en-US" sz="4400" dirty="0"/>
+          </a:p>
+        </p:txBody>
+      </p:sp>
+      <p:sp>
+        <p:nvSpPr>
+          <p:cNvPr id="12" name="Text 10"/>
+          <p:cNvSpPr txBox="1"/>
+          <p:nvPr/>
+        </p:nvSpPr>
+        <p:spPr>
+          <a:xfrm>
+            <a:off x="3749040" y="3246120"/>
+            <a:ext cx="2468880" cy="365760"/>
+          </a:xfrm>
+          <a:prstGeom prst="rect">
+            <a:avLst/>
+          </a:prstGeom>
+          <a:noFill/>
+          <a:ln/>
+        </p:spPr>
+        <p:txBody>
+          <a:bodyPr wrap="square" lIns="0" tIns="0" rIns="0" bIns="0" rtlCol="0" anchor="ctr"/>
+          <a:lstStyle/>
+          <a:p>
+            <a:pPr algn="ctr" indent="0" marL="0">
+              <a:buNone/>
+            </a:pPr>
+            <a:r>
+              <a:rPr lang="en-US" sz="1400" dirty="0">
+                <a:solidFill>
+                  <a:schemeClr val="accent6"/>
+                </a:solidFill>
+                <a:latin typeface="Meiryo UI" pitchFamily="34" charset="0"/>
+                <a:ea typeface="Meiryo UI" pitchFamily="34" charset="-122"/>
+                <a:cs typeface="Meiryo UI" pitchFamily="34" charset="-120"/>
+              </a:rPr>
+              <a:t>買い取ってもらう</a:t>
+            </a:r>
+            <a:endParaRPr lang="en-US" sz="1400" dirty="0"/>
+          </a:p>
+        </p:txBody>
+      </p:sp>
+      <p:sp>
+        <p:nvSpPr>
+          <p:cNvPr id="13" name="im0"/>
+          <p:cNvSpPr/>
+          <p:nvPr/>
+        </p:nvSpPr>
+        <p:spPr>
+          <a:xfrm>
+            <a:off x="548640" y="4023360"/>
+            <a:ext cx="2743200" cy="2103120"/>
           </a:xfrm>
           <a:prstGeom prst="roundRect">
             <a:avLst>
@@ -5286,14 +6095,14 @@
       </p:sp>
       <p:sp>
         <p:nvSpPr>
-          <p:cNvPr id="5" name="Text 3"/>
+          <p:cNvPr id="14" name="Text 12"/>
           <p:cNvSpPr txBox="1"/>
           <p:nvPr/>
         </p:nvSpPr>
         <p:spPr>
           <a:xfrm>
-            <a:off x="548640" y="2057400"/>
-            <a:ext cx="2468880" cy="365760"/>
+            <a:off x="548640" y="4297680"/>
+            <a:ext cx="2743200" cy="822960"/>
           </a:xfrm>
           <a:prstGeom prst="rect">
             <a:avLst/>
@@ -5309,142 +6118,86 @@
               <a:buNone/>
             </a:pPr>
             <a:r>
-              <a:rPr lang="en-US" sz="1500" b="1" dirty="0">
-                <a:solidFill>
-                  <a:schemeClr val="accent5"/>
+              <a:rPr lang="en-US" sz="3400" b="1" dirty="0">
+                <a:solidFill>
+                  <a:schemeClr val="tx2"/>
                 </a:solidFill>
                 <a:latin typeface="Meiryo UI" pitchFamily="34" charset="0"/>
                 <a:ea typeface="Meiryo UI" pitchFamily="34" charset="-122"/>
                 <a:cs typeface="Meiryo UI" pitchFamily="34" charset="-120"/>
               </a:rPr>
-              <a:t>これまで</a:t>
-            </a:r>
-            <a:endParaRPr lang="en-US" sz="1500" dirty="0"/>
-          </a:p>
-        </p:txBody>
-      </p:sp>
-      <p:sp>
-        <p:nvSpPr>
-          <p:cNvPr id="6" name="Text 4"/>
+              <a:t>58万円</a:t>
+            </a:r>
+            <a:endParaRPr lang="en-US" sz="3400" dirty="0"/>
+          </a:p>
+        </p:txBody>
+      </p:sp>
+      <p:sp>
+        <p:nvSpPr>
+          <p:cNvPr id="15" name="Text 13"/>
           <p:cNvSpPr txBox="1"/>
           <p:nvPr/>
         </p:nvSpPr>
         <p:spPr>
           <a:xfrm>
-            <a:off x="548640" y="2468880"/>
-            <a:ext cx="2468880" cy="822960"/>
-          </a:xfrm>
-          <a:prstGeom prst="rect">
-            <a:avLst/>
-          </a:prstGeom>
-          <a:noFill/>
-          <a:ln/>
-        </p:spPr>
-        <p:txBody>
-          <a:bodyPr wrap="square" lIns="0" tIns="0" rIns="0" bIns="0" rtlCol="0" anchor="ctr"/>
+            <a:off x="548640" y="5120640"/>
+            <a:ext cx="2743200" cy="731520"/>
+          </a:xfrm>
+          <a:prstGeom prst="rect">
+            <a:avLst/>
+          </a:prstGeom>
+          <a:noFill/>
+          <a:ln/>
+        </p:spPr>
+        <p:txBody>
+          <a:bodyPr wrap="square" lIns="0" tIns="0" rIns="0" bIns="0" rtlCol="0" anchor="t"/>
           <a:lstStyle/>
           <a:p>
             <a:pPr algn="ctr" indent="0" marL="0">
               <a:buNone/>
             </a:pPr>
             <a:r>
-              <a:rPr lang="en-US" sz="4400" b="1" dirty="0">
-                <a:solidFill>
-                  <a:schemeClr val="accent3"/>
+              <a:rPr lang="en-US" sz="1300" dirty="0">
+                <a:solidFill>
+                  <a:schemeClr val="accent5"/>
                 </a:solidFill>
                 <a:latin typeface="Meiryo UI" pitchFamily="34" charset="0"/>
                 <a:ea typeface="Meiryo UI" pitchFamily="34" charset="-122"/>
                 <a:cs typeface="Meiryo UI" pitchFamily="34" charset="-120"/>
               </a:rPr>
-              <a:t>−28</a:t>
-            </a:r>
+              <a:t>月あたりの効果</a:t>
+            </a:r>
+            <a:endParaRPr lang="en-US" sz="1300" dirty="0"/>
+          </a:p>
+          <a:p>
             <a:pPr algn="ctr" indent="0" marL="0">
               <a:buNone/>
             </a:pPr>
             <a:r>
-              <a:rPr lang="en-US" sz="1500" b="1" dirty="0">
-                <a:solidFill>
-                  <a:schemeClr val="accent3"/>
+              <a:rPr lang="en-US" sz="1300" dirty="0">
+                <a:solidFill>
+                  <a:schemeClr val="accent5"/>
                 </a:solidFill>
                 <a:latin typeface="Meiryo UI" pitchFamily="34" charset="0"/>
                 <a:ea typeface="Meiryo UI" pitchFamily="34" charset="-122"/>
                 <a:cs typeface="Meiryo UI" pitchFamily="34" charset="-120"/>
               </a:rPr>
-              <a:t> 円/kg</a:t>
-            </a:r>
-            <a:endParaRPr lang="en-US" sz="4400" dirty="0"/>
-          </a:p>
-        </p:txBody>
-      </p:sp>
-      <p:sp>
-        <p:nvSpPr>
-          <p:cNvPr id="7" name="Text 5"/>
-          <p:cNvSpPr txBox="1"/>
-          <p:nvPr/>
-        </p:nvSpPr>
-        <p:spPr>
-          <a:xfrm>
-            <a:off x="548640" y="3383280"/>
-            <a:ext cx="2468880" cy="365760"/>
-          </a:xfrm>
-          <a:prstGeom prst="rect">
-            <a:avLst/>
-          </a:prstGeom>
-          <a:noFill/>
-          <a:ln/>
-        </p:spPr>
-        <p:txBody>
-          <a:bodyPr wrap="square" lIns="0" tIns="0" rIns="0" bIns="0" rtlCol="0" anchor="ctr"/>
-          <a:lstStyle/>
-          <a:p>
-            <a:pPr algn="ctr" indent="0" marL="0">
-              <a:buNone/>
-            </a:pPr>
-            <a:r>
-              <a:rPr lang="en-US" sz="1400" dirty="0">
-                <a:solidFill>
-                  <a:schemeClr val="accent5"/>
-                </a:solidFill>
-                <a:latin typeface="Meiryo UI" pitchFamily="34" charset="0"/>
-                <a:ea typeface="Meiryo UI" pitchFamily="34" charset="-122"/>
-                <a:cs typeface="Meiryo UI" pitchFamily="34" charset="-120"/>
-              </a:rPr>
-              <a:t>処分費を支払う</a:t>
-            </a:r>
-            <a:endParaRPr lang="en-US" sz="1400" dirty="0"/>
-          </a:p>
-        </p:txBody>
-      </p:sp>
-      <p:sp>
-        <p:nvSpPr>
-          <p:cNvPr id="8" name="Shape 6"/>
+              <a:t>（月約20t×29円/kg）</a:t>
+            </a:r>
+            <a:endParaRPr lang="en-US" sz="1300" dirty="0"/>
+          </a:p>
+        </p:txBody>
+      </p:sp>
+      <p:sp>
+        <p:nvSpPr>
+          <p:cNvPr id="16" name="im1"/>
           <p:cNvSpPr/>
           <p:nvPr/>
         </p:nvSpPr>
         <p:spPr>
           <a:xfrm>
-            <a:off x="3200400" y="2651760"/>
-            <a:ext cx="365760" cy="548640"/>
-          </a:xfrm>
-          <a:prstGeom prst="chevron">
-            <a:avLst/>
-          </a:prstGeom>
-          <a:solidFill>
-            <a:schemeClr val="accent4"/>
-          </a:solidFill>
-          <a:ln/>
-        </p:spPr>
-      </p:sp>
-      <p:sp>
-        <p:nvSpPr>
-          <p:cNvPr id="9" name="after"/>
-          <p:cNvSpPr/>
-          <p:nvPr/>
-        </p:nvSpPr>
-        <p:spPr>
-          <a:xfrm>
-            <a:off x="3749040" y="1874520"/>
-            <a:ext cx="2468880" cy="2103120"/>
+            <a:off x="3474720" y="4023360"/>
+            <a:ext cx="2743200" cy="2103120"/>
           </a:xfrm>
           <a:prstGeom prst="roundRect">
             <a:avLst>
@@ -5452,21 +6205,21 @@
             </a:avLst>
           </a:prstGeom>
           <a:solidFill>
-            <a:schemeClr val="tx2"/>
+            <a:schemeClr val="bg2"/>
           </a:solidFill>
           <a:ln/>
         </p:spPr>
       </p:sp>
       <p:sp>
         <p:nvSpPr>
-          <p:cNvPr id="10" name="Text 8"/>
+          <p:cNvPr id="17" name="Text 15"/>
           <p:cNvSpPr txBox="1"/>
           <p:nvPr/>
         </p:nvSpPr>
         <p:spPr>
           <a:xfrm>
-            <a:off x="3749040" y="2057400"/>
-            <a:ext cx="2468880" cy="365760"/>
+            <a:off x="3474720" y="4297680"/>
+            <a:ext cx="2743200" cy="822960"/>
           </a:xfrm>
           <a:prstGeom prst="rect">
             <a:avLst/>
@@ -5482,83 +6235,86 @@
               <a:buNone/>
             </a:pPr>
             <a:r>
-              <a:rPr lang="en-US" sz="1500" b="1" dirty="0">
-                <a:solidFill>
-                  <a:schemeClr val="accent4"/>
+              <a:rPr lang="en-US" sz="3400" b="1" dirty="0">
+                <a:solidFill>
+                  <a:schemeClr val="tx2"/>
                 </a:solidFill>
                 <a:latin typeface="Meiryo UI" pitchFamily="34" charset="0"/>
                 <a:ea typeface="Meiryo UI" pitchFamily="34" charset="-122"/>
                 <a:cs typeface="Meiryo UI" pitchFamily="34" charset="-120"/>
               </a:rPr>
-              <a:t>現在</a:t>
-            </a:r>
-            <a:endParaRPr lang="en-US" sz="1500" dirty="0"/>
-          </a:p>
-        </p:txBody>
-      </p:sp>
-      <p:sp>
-        <p:nvSpPr>
-          <p:cNvPr id="11" name="Text 9"/>
+              <a:t>696万円</a:t>
+            </a:r>
+            <a:endParaRPr lang="en-US" sz="3400" dirty="0"/>
+          </a:p>
+        </p:txBody>
+      </p:sp>
+      <p:sp>
+        <p:nvSpPr>
+          <p:cNvPr id="18" name="Text 16"/>
           <p:cNvSpPr txBox="1"/>
           <p:nvPr/>
         </p:nvSpPr>
         <p:spPr>
           <a:xfrm>
-            <a:off x="3749040" y="2468880"/>
-            <a:ext cx="2468880" cy="822960"/>
-          </a:xfrm>
-          <a:prstGeom prst="rect">
-            <a:avLst/>
-          </a:prstGeom>
-          <a:noFill/>
-          <a:ln/>
-        </p:spPr>
-        <p:txBody>
-          <a:bodyPr wrap="square" lIns="0" tIns="0" rIns="0" bIns="0" rtlCol="0" anchor="ctr"/>
+            <a:off x="3474720" y="5120640"/>
+            <a:ext cx="2743200" cy="731520"/>
+          </a:xfrm>
+          <a:prstGeom prst="rect">
+            <a:avLst/>
+          </a:prstGeom>
+          <a:noFill/>
+          <a:ln/>
+        </p:spPr>
+        <p:txBody>
+          <a:bodyPr wrap="square" lIns="0" tIns="0" rIns="0" bIns="0" rtlCol="0" anchor="t"/>
           <a:lstStyle/>
           <a:p>
             <a:pPr algn="ctr" indent="0" marL="0">
               <a:buNone/>
             </a:pPr>
             <a:r>
-              <a:rPr lang="en-US" sz="4400" b="1" dirty="0">
-                <a:solidFill>
-                  <a:schemeClr val="bg1"/>
+              <a:rPr lang="en-US" sz="1300" dirty="0">
+                <a:solidFill>
+                  <a:schemeClr val="accent5"/>
                 </a:solidFill>
                 <a:latin typeface="Meiryo UI" pitchFamily="34" charset="0"/>
                 <a:ea typeface="Meiryo UI" pitchFamily="34" charset="-122"/>
                 <a:cs typeface="Meiryo UI" pitchFamily="34" charset="-120"/>
               </a:rPr>
-              <a:t>+1</a:t>
-            </a:r>
+              <a:t>年間の効果</a:t>
+            </a:r>
+            <a:endParaRPr lang="en-US" sz="1300" dirty="0"/>
+          </a:p>
+          <a:p>
             <a:pPr algn="ctr" indent="0" marL="0">
               <a:buNone/>
             </a:pPr>
             <a:r>
-              <a:rPr lang="en-US" sz="1500" b="1" dirty="0">
-                <a:solidFill>
-                  <a:schemeClr val="bg1"/>
+              <a:rPr lang="en-US" sz="1300" dirty="0">
+                <a:solidFill>
+                  <a:schemeClr val="accent5"/>
                 </a:solidFill>
                 <a:latin typeface="Meiryo UI" pitchFamily="34" charset="0"/>
                 <a:ea typeface="Meiryo UI" pitchFamily="34" charset="-122"/>
                 <a:cs typeface="Meiryo UI" pitchFamily="34" charset="-120"/>
               </a:rPr>
-              <a:t> 円/kg</a:t>
-            </a:r>
-            <a:endParaRPr lang="en-US" sz="4400" dirty="0"/>
-          </a:p>
-        </p:txBody>
-      </p:sp>
-      <p:sp>
-        <p:nvSpPr>
-          <p:cNvPr id="12" name="Text 10"/>
+              <a:t>（年換算）</a:t>
+            </a:r>
+            <a:endParaRPr lang="en-US" sz="1300" dirty="0"/>
+          </a:p>
+        </p:txBody>
+      </p:sp>
+      <p:sp>
+        <p:nvSpPr>
+          <p:cNvPr id="19" name="Text 17"/>
           <p:cNvSpPr txBox="1"/>
           <p:nvPr/>
         </p:nvSpPr>
         <p:spPr>
           <a:xfrm>
-            <a:off x="3749040" y="3383280"/>
-            <a:ext cx="2468880" cy="365760"/>
+            <a:off x="6675120" y="1783080"/>
+            <a:ext cx="4937760" cy="411480"/>
           </a:xfrm>
           <a:prstGeom prst="rect">
             <a:avLst/>
@@ -5570,124 +6326,641 @@
           <a:bodyPr wrap="square" lIns="0" tIns="0" rIns="0" bIns="0" rtlCol="0" anchor="ctr"/>
           <a:lstStyle/>
           <a:p>
-            <a:pPr algn="ctr" indent="0" marL="0">
-              <a:buNone/>
-            </a:pPr>
-            <a:r>
-              <a:rPr lang="en-US" sz="1400" dirty="0">
-                <a:solidFill>
-                  <a:schemeClr val="accent6"/>
+            <a:pPr indent="0" marL="0">
+              <a:buNone/>
+            </a:pPr>
+            <a:r>
+              <a:rPr lang="en-US" sz="1800" b="1" dirty="0">
+                <a:solidFill>
+                  <a:schemeClr val="tx2"/>
                 </a:solidFill>
                 <a:latin typeface="Meiryo UI" pitchFamily="34" charset="0"/>
                 <a:ea typeface="Meiryo UI" pitchFamily="34" charset="-122"/>
                 <a:cs typeface="Meiryo UI" pitchFamily="34" charset="-120"/>
               </a:rPr>
-              <a:t>買い取ってもらう</a:t>
-            </a:r>
-            <a:endParaRPr lang="en-US" sz="1400" dirty="0"/>
-          </a:p>
-        </p:txBody>
-      </p:sp>
-      <p:sp>
-        <p:nvSpPr>
-          <p:cNvPr id="13" name="impact"/>
+              <a:t>交渉の経緯</a:t>
+            </a:r>
+            <a:endParaRPr lang="en-US" sz="1800" dirty="0"/>
+          </a:p>
+        </p:txBody>
+      </p:sp>
+      <p:sp>
+        <p:nvSpPr>
+          <p:cNvPr id="20" name="Shape 18"/>
           <p:cNvSpPr/>
           <p:nvPr/>
         </p:nvSpPr>
         <p:spPr>
           <a:xfrm>
-            <a:off x="548640" y="4251960"/>
-            <a:ext cx="5669280" cy="1600200"/>
-          </a:xfrm>
-          <a:prstGeom prst="roundRect">
-            <a:avLst>
-              <a:gd name="adj" fmla="val 6857"/>
-            </a:avLst>
+            <a:off x="6926580" y="2880360"/>
+            <a:ext cx="0" cy="457200"/>
+          </a:xfrm>
+          <a:prstGeom prst="line">
+            <a:avLst/>
+          </a:prstGeom>
+          <a:noFill/>
+          <a:ln w="25400">
+            <a:solidFill>
+              <a:schemeClr val="accent6"/>
+            </a:solidFill>
+            <a:prstDash val="solid"/>
+          </a:ln>
+        </p:spPr>
+      </p:sp>
+      <p:sp>
+        <p:nvSpPr>
+          <p:cNvPr id="21" name="Shape 19"/>
+          <p:cNvSpPr/>
+          <p:nvPr/>
+        </p:nvSpPr>
+        <p:spPr>
+          <a:xfrm>
+            <a:off x="6675120" y="2377440"/>
+            <a:ext cx="502920" cy="502920"/>
+          </a:xfrm>
+          <a:prstGeom prst="ellipse">
+            <a:avLst/>
           </a:prstGeom>
           <a:solidFill>
-            <a:schemeClr val="bg2"/>
+            <a:schemeClr val="accent2"/>
           </a:solidFill>
           <a:ln/>
         </p:spPr>
       </p:sp>
       <p:sp>
         <p:nvSpPr>
-          <p:cNvPr id="14" name="Text 12"/>
+          <p:cNvPr id="22" name="Text 20"/>
           <p:cNvSpPr txBox="1"/>
           <p:nvPr/>
         </p:nvSpPr>
         <p:spPr>
           <a:xfrm>
-            <a:off x="822960" y="4434840"/>
-            <a:ext cx="5120640" cy="1554480"/>
-          </a:xfrm>
-          <a:prstGeom prst="rect">
-            <a:avLst/>
-          </a:prstGeom>
-          <a:noFill/>
-          <a:ln/>
-        </p:spPr>
-        <p:txBody>
-          <a:bodyPr wrap="square" lIns="0" tIns="0" rIns="0" bIns="0" rtlCol="0" anchor="t"/>
-          <a:lstStyle/>
-          <a:p>
-            <a:pPr indent="0" marL="0">
-              <a:spcAft>
-                <a:spcPts val="600"/>
-              </a:spcAft>
-              <a:buNone/>
-            </a:pPr>
-            <a:r>
-              <a:rPr lang="en-US" sz="1700" b="1" dirty="0">
-                <a:solidFill>
-                  <a:schemeClr val="tx2"/>
+            <a:off x="6675120" y="2377440"/>
+            <a:ext cx="502920" cy="502920"/>
+          </a:xfrm>
+          <a:prstGeom prst="rect">
+            <a:avLst/>
+          </a:prstGeom>
+          <a:noFill/>
+          <a:ln/>
+        </p:spPr>
+        <p:txBody>
+          <a:bodyPr wrap="square" lIns="0" tIns="0" rIns="0" bIns="0" rtlCol="0" anchor="ctr"/>
+          <a:lstStyle/>
+          <a:p>
+            <a:pPr algn="ctr" indent="0" marL="0">
+              <a:buNone/>
+            </a:pPr>
+            <a:r>
+              <a:rPr lang="en-US" sz="1400" b="1" dirty="0">
+                <a:solidFill>
+                  <a:schemeClr val="bg1"/>
                 </a:solidFill>
                 <a:latin typeface="Meiryo UI" pitchFamily="34" charset="0"/>
                 <a:ea typeface="Meiryo UI" pitchFamily="34" charset="-122"/>
                 <a:cs typeface="Meiryo UI" pitchFamily="34" charset="-120"/>
               </a:rPr>
-              <a:t>1kgあたり29円、1tあたり29,000円の改善</a:t>
-            </a:r>
-            <a:endParaRPr lang="en-US" sz="1700" dirty="0"/>
-          </a:p>
+              <a:t>1</a:t>
+            </a:r>
+            <a:endParaRPr lang="en-US" sz="1400" dirty="0"/>
+          </a:p>
+        </p:txBody>
+      </p:sp>
+      <p:sp>
+        <p:nvSpPr>
+          <p:cNvPr id="23" name="Text 21"/>
+          <p:cNvSpPr txBox="1"/>
+          <p:nvPr/>
+        </p:nvSpPr>
+        <p:spPr>
+          <a:xfrm>
+            <a:off x="7406640" y="2331720"/>
+            <a:ext cx="4206240" cy="365760"/>
+          </a:xfrm>
+          <a:prstGeom prst="rect">
+            <a:avLst/>
+          </a:prstGeom>
+          <a:noFill/>
+          <a:ln/>
+        </p:spPr>
+        <p:txBody>
+          <a:bodyPr wrap="square" lIns="0" tIns="0" rIns="0" bIns="0" rtlCol="0" anchor="ctr"/>
+          <a:lstStyle/>
           <a:p>
             <a:pPr indent="0" marL="0">
-              <a:spcAft>
-                <a:spcPts val="600"/>
-              </a:spcAft>
-              <a:buNone/>
-            </a:pPr>
-            <a:r>
-              <a:rPr lang="en-US" sz="1400" dirty="0">
-                <a:solidFill>
-                  <a:schemeClr val="tx1"/>
+              <a:buNone/>
+            </a:pPr>
+            <a:r>
+              <a:rPr lang="en-US" sz="1600" b="1" dirty="0">
+                <a:solidFill>
+                  <a:schemeClr val="tx2"/>
                 </a:solidFill>
                 <a:latin typeface="Meiryo UI" pitchFamily="34" charset="0"/>
                 <a:ea typeface="Meiryo UI" pitchFamily="34" charset="-122"/>
                 <a:cs typeface="Meiryo UI" pitchFamily="34" charset="-120"/>
               </a:rPr>
-              <a:t>支払っていた処分費がなくなり、わずかでも売上が立つようになりました。取引先を自ら探して交渉し、新しい出し先を確保したことによる成果です。</a:t>
-            </a:r>
-            <a:endParaRPr lang="en-US" sz="1700" dirty="0"/>
-          </a:p>
-        </p:txBody>
-      </p:sp>
-      <p:graphicFrame>
-        <p:nvGraphicFramePr>
-          <p:cNvPr id="15" name="Chart 0" descr=""/>
-          <p:cNvGraphicFramePr/>
-          <p:nvPr/>
-        </p:nvGraphicFramePr>
-        <p:xfrm>
-          <a:off x="6583680" y="1783080"/>
-          <a:ext cx="5029200" cy="4343400"/>
-        </p:xfrm>
-        <a:graphic xmlns:a="http://schemas.openxmlformats.org/drawingml/2006/main">
-          <a:graphicData uri="http://schemas.openxmlformats.org/drawingml/2006/chart">
-            <c:chart xmlns:c="http://schemas.openxmlformats.org/drawingml/2006/chart" r:id="rId1"/>
-          </a:graphicData>
-        </a:graphic>
-      </p:graphicFrame>
+              <a:t>電話で打診</a:t>
+            </a:r>
+            <a:endParaRPr lang="en-US" sz="1600" dirty="0"/>
+          </a:p>
+        </p:txBody>
+      </p:sp>
+      <p:sp>
+        <p:nvSpPr>
+          <p:cNvPr id="24" name="Text 22"/>
+          <p:cNvSpPr txBox="1"/>
+          <p:nvPr/>
+        </p:nvSpPr>
+        <p:spPr>
+          <a:xfrm>
+            <a:off x="7406640" y="2697480"/>
+            <a:ext cx="4206240" cy="365760"/>
+          </a:xfrm>
+          <a:prstGeom prst="rect">
+            <a:avLst/>
+          </a:prstGeom>
+          <a:noFill/>
+          <a:ln/>
+        </p:spPr>
+        <p:txBody>
+          <a:bodyPr wrap="square" lIns="0" tIns="0" rIns="0" bIns="0" rtlCol="0" anchor="ctr"/>
+          <a:lstStyle/>
+          <a:p>
+            <a:pPr indent="0" marL="0">
+              <a:buNone/>
+            </a:pPr>
+            <a:r>
+              <a:rPr lang="en-US" sz="1400" dirty="0">
+                <a:solidFill>
+                  <a:schemeClr val="tx1"/>
+                </a:solidFill>
+                <a:latin typeface="Meiryo UI" pitchFamily="34" charset="0"/>
+                <a:ea typeface="Meiryo UI" pitchFamily="34" charset="-122"/>
+                <a:cs typeface="Meiryo UI" pitchFamily="34" charset="-120"/>
+              </a:rPr>
+              <a:t>担当者に何度か電話で相談</a:t>
+            </a:r>
+            <a:endParaRPr lang="en-US" sz="1400" dirty="0"/>
+          </a:p>
+        </p:txBody>
+      </p:sp>
+      <p:sp>
+        <p:nvSpPr>
+          <p:cNvPr id="25" name="Shape 23"/>
+          <p:cNvSpPr/>
+          <p:nvPr/>
+        </p:nvSpPr>
+        <p:spPr>
+          <a:xfrm>
+            <a:off x="6926580" y="3840480"/>
+            <a:ext cx="0" cy="457200"/>
+          </a:xfrm>
+          <a:prstGeom prst="line">
+            <a:avLst/>
+          </a:prstGeom>
+          <a:noFill/>
+          <a:ln w="25400">
+            <a:solidFill>
+              <a:schemeClr val="accent6"/>
+            </a:solidFill>
+            <a:prstDash val="solid"/>
+          </a:ln>
+        </p:spPr>
+      </p:sp>
+      <p:sp>
+        <p:nvSpPr>
+          <p:cNvPr id="26" name="Shape 24"/>
+          <p:cNvSpPr/>
+          <p:nvPr/>
+        </p:nvSpPr>
+        <p:spPr>
+          <a:xfrm>
+            <a:off x="6675120" y="3337560"/>
+            <a:ext cx="502920" cy="502920"/>
+          </a:xfrm>
+          <a:prstGeom prst="ellipse">
+            <a:avLst/>
+          </a:prstGeom>
+          <a:solidFill>
+            <a:schemeClr val="accent2"/>
+          </a:solidFill>
+          <a:ln/>
+        </p:spPr>
+      </p:sp>
+      <p:sp>
+        <p:nvSpPr>
+          <p:cNvPr id="27" name="Text 25"/>
+          <p:cNvSpPr txBox="1"/>
+          <p:nvPr/>
+        </p:nvSpPr>
+        <p:spPr>
+          <a:xfrm>
+            <a:off x="6675120" y="3337560"/>
+            <a:ext cx="502920" cy="502920"/>
+          </a:xfrm>
+          <a:prstGeom prst="rect">
+            <a:avLst/>
+          </a:prstGeom>
+          <a:noFill/>
+          <a:ln/>
+        </p:spPr>
+        <p:txBody>
+          <a:bodyPr wrap="square" lIns="0" tIns="0" rIns="0" bIns="0" rtlCol="0" anchor="ctr"/>
+          <a:lstStyle/>
+          <a:p>
+            <a:pPr algn="ctr" indent="0" marL="0">
+              <a:buNone/>
+            </a:pPr>
+            <a:r>
+              <a:rPr lang="en-US" sz="1400" b="1" dirty="0">
+                <a:solidFill>
+                  <a:schemeClr val="bg1"/>
+                </a:solidFill>
+                <a:latin typeface="Meiryo UI" pitchFamily="34" charset="0"/>
+                <a:ea typeface="Meiryo UI" pitchFamily="34" charset="-122"/>
+                <a:cs typeface="Meiryo UI" pitchFamily="34" charset="-120"/>
+              </a:rPr>
+              <a:t>2</a:t>
+            </a:r>
+            <a:endParaRPr lang="en-US" sz="1400" dirty="0"/>
+          </a:p>
+        </p:txBody>
+      </p:sp>
+      <p:sp>
+        <p:nvSpPr>
+          <p:cNvPr id="28" name="Text 26"/>
+          <p:cNvSpPr txBox="1"/>
+          <p:nvPr/>
+        </p:nvSpPr>
+        <p:spPr>
+          <a:xfrm>
+            <a:off x="7406640" y="3291840"/>
+            <a:ext cx="4206240" cy="365760"/>
+          </a:xfrm>
+          <a:prstGeom prst="rect">
+            <a:avLst/>
+          </a:prstGeom>
+          <a:noFill/>
+          <a:ln/>
+        </p:spPr>
+        <p:txBody>
+          <a:bodyPr wrap="square" lIns="0" tIns="0" rIns="0" bIns="0" rtlCol="0" anchor="ctr"/>
+          <a:lstStyle/>
+          <a:p>
+            <a:pPr indent="0" marL="0">
+              <a:buNone/>
+            </a:pPr>
+            <a:r>
+              <a:rPr lang="en-US" sz="1600" b="1" dirty="0">
+                <a:solidFill>
+                  <a:schemeClr val="tx2"/>
+                </a:solidFill>
+                <a:latin typeface="Meiryo UI" pitchFamily="34" charset="0"/>
+                <a:ea typeface="Meiryo UI" pitchFamily="34" charset="-122"/>
+                <a:cs typeface="Meiryo UI" pitchFamily="34" charset="-120"/>
+              </a:rPr>
+              <a:t>当初の回答</a:t>
+            </a:r>
+            <a:endParaRPr lang="en-US" sz="1600" dirty="0"/>
+          </a:p>
+        </p:txBody>
+      </p:sp>
+      <p:sp>
+        <p:nvSpPr>
+          <p:cNvPr id="29" name="Text 27"/>
+          <p:cNvSpPr txBox="1"/>
+          <p:nvPr/>
+        </p:nvSpPr>
+        <p:spPr>
+          <a:xfrm>
+            <a:off x="7406640" y="3657600"/>
+            <a:ext cx="4206240" cy="365760"/>
+          </a:xfrm>
+          <a:prstGeom prst="rect">
+            <a:avLst/>
+          </a:prstGeom>
+          <a:noFill/>
+          <a:ln/>
+        </p:spPr>
+        <p:txBody>
+          <a:bodyPr wrap="square" lIns="0" tIns="0" rIns="0" bIns="0" rtlCol="0" anchor="ctr"/>
+          <a:lstStyle/>
+          <a:p>
+            <a:pPr indent="0" marL="0">
+              <a:buNone/>
+            </a:pPr>
+            <a:r>
+              <a:rPr lang="en-US" sz="1400" dirty="0">
+                <a:solidFill>
+                  <a:schemeClr val="tx1"/>
+                </a:solidFill>
+                <a:latin typeface="Meiryo UI" pitchFamily="34" charset="0"/>
+                <a:ea typeface="Meiryo UI" pitchFamily="34" charset="-122"/>
+                <a:cs typeface="Meiryo UI" pitchFamily="34" charset="-120"/>
+              </a:rPr>
+              <a:t>「無償なら引き取る」という条件</a:t>
+            </a:r>
+            <a:endParaRPr lang="en-US" sz="1400" dirty="0"/>
+          </a:p>
+        </p:txBody>
+      </p:sp>
+      <p:sp>
+        <p:nvSpPr>
+          <p:cNvPr id="30" name="Shape 28"/>
+          <p:cNvSpPr/>
+          <p:nvPr/>
+        </p:nvSpPr>
+        <p:spPr>
+          <a:xfrm>
+            <a:off x="6926580" y="4800600"/>
+            <a:ext cx="0" cy="457200"/>
+          </a:xfrm>
+          <a:prstGeom prst="line">
+            <a:avLst/>
+          </a:prstGeom>
+          <a:noFill/>
+          <a:ln w="25400">
+            <a:solidFill>
+              <a:schemeClr val="accent6"/>
+            </a:solidFill>
+            <a:prstDash val="solid"/>
+          </a:ln>
+        </p:spPr>
+      </p:sp>
+      <p:sp>
+        <p:nvSpPr>
+          <p:cNvPr id="31" name="Shape 29"/>
+          <p:cNvSpPr/>
+          <p:nvPr/>
+        </p:nvSpPr>
+        <p:spPr>
+          <a:xfrm>
+            <a:off x="6675120" y="4297680"/>
+            <a:ext cx="502920" cy="502920"/>
+          </a:xfrm>
+          <a:prstGeom prst="ellipse">
+            <a:avLst/>
+          </a:prstGeom>
+          <a:solidFill>
+            <a:schemeClr val="accent2"/>
+          </a:solidFill>
+          <a:ln/>
+        </p:spPr>
+      </p:sp>
+      <p:sp>
+        <p:nvSpPr>
+          <p:cNvPr id="32" name="Text 30"/>
+          <p:cNvSpPr txBox="1"/>
+          <p:nvPr/>
+        </p:nvSpPr>
+        <p:spPr>
+          <a:xfrm>
+            <a:off x="6675120" y="4297680"/>
+            <a:ext cx="502920" cy="502920"/>
+          </a:xfrm>
+          <a:prstGeom prst="rect">
+            <a:avLst/>
+          </a:prstGeom>
+          <a:noFill/>
+          <a:ln/>
+        </p:spPr>
+        <p:txBody>
+          <a:bodyPr wrap="square" lIns="0" tIns="0" rIns="0" bIns="0" rtlCol="0" anchor="ctr"/>
+          <a:lstStyle/>
+          <a:p>
+            <a:pPr algn="ctr" indent="0" marL="0">
+              <a:buNone/>
+            </a:pPr>
+            <a:r>
+              <a:rPr lang="en-US" sz="1400" b="1" dirty="0">
+                <a:solidFill>
+                  <a:schemeClr val="bg1"/>
+                </a:solidFill>
+                <a:latin typeface="Meiryo UI" pitchFamily="34" charset="0"/>
+                <a:ea typeface="Meiryo UI" pitchFamily="34" charset="-122"/>
+                <a:cs typeface="Meiryo UI" pitchFamily="34" charset="-120"/>
+              </a:rPr>
+              <a:t>3</a:t>
+            </a:r>
+            <a:endParaRPr lang="en-US" sz="1400" dirty="0"/>
+          </a:p>
+        </p:txBody>
+      </p:sp>
+      <p:sp>
+        <p:nvSpPr>
+          <p:cNvPr id="33" name="Text 31"/>
+          <p:cNvSpPr txBox="1"/>
+          <p:nvPr/>
+        </p:nvSpPr>
+        <p:spPr>
+          <a:xfrm>
+            <a:off x="7406640" y="4251960"/>
+            <a:ext cx="4206240" cy="365760"/>
+          </a:xfrm>
+          <a:prstGeom prst="rect">
+            <a:avLst/>
+          </a:prstGeom>
+          <a:noFill/>
+          <a:ln/>
+        </p:spPr>
+        <p:txBody>
+          <a:bodyPr wrap="square" lIns="0" tIns="0" rIns="0" bIns="0" rtlCol="0" anchor="ctr"/>
+          <a:lstStyle/>
+          <a:p>
+            <a:pPr indent="0" marL="0">
+              <a:buNone/>
+            </a:pPr>
+            <a:r>
+              <a:rPr lang="en-US" sz="1600" b="1" dirty="0">
+                <a:solidFill>
+                  <a:schemeClr val="tx2"/>
+                </a:solidFill>
+                <a:latin typeface="Meiryo UI" pitchFamily="34" charset="0"/>
+                <a:ea typeface="Meiryo UI" pitchFamily="34" charset="-122"/>
+                <a:cs typeface="Meiryo UI" pitchFamily="34" charset="-120"/>
+              </a:rPr>
+              <a:t>直接訪問</a:t>
+            </a:r>
+            <a:endParaRPr lang="en-US" sz="1600" dirty="0"/>
+          </a:p>
+        </p:txBody>
+      </p:sp>
+      <p:sp>
+        <p:nvSpPr>
+          <p:cNvPr id="34" name="Text 32"/>
+          <p:cNvSpPr txBox="1"/>
+          <p:nvPr/>
+        </p:nvSpPr>
+        <p:spPr>
+          <a:xfrm>
+            <a:off x="7406640" y="4617720"/>
+            <a:ext cx="4206240" cy="365760"/>
+          </a:xfrm>
+          <a:prstGeom prst="rect">
+            <a:avLst/>
+          </a:prstGeom>
+          <a:noFill/>
+          <a:ln/>
+        </p:spPr>
+        <p:txBody>
+          <a:bodyPr wrap="square" lIns="0" tIns="0" rIns="0" bIns="0" rtlCol="0" anchor="ctr"/>
+          <a:lstStyle/>
+          <a:p>
+            <a:pPr indent="0" marL="0">
+              <a:buNone/>
+            </a:pPr>
+            <a:r>
+              <a:rPr lang="en-US" sz="1400" dirty="0">
+                <a:solidFill>
+                  <a:schemeClr val="tx1"/>
+                </a:solidFill>
+                <a:latin typeface="Meiryo UI" pitchFamily="34" charset="0"/>
+                <a:ea typeface="Meiryo UI" pitchFamily="34" charset="-122"/>
+                <a:cs typeface="Meiryo UI" pitchFamily="34" charset="-120"/>
+              </a:rPr>
+              <a:t>自ら足を運び、買い取りをお願い</a:t>
+            </a:r>
+            <a:endParaRPr lang="en-US" sz="1400" dirty="0"/>
+          </a:p>
+        </p:txBody>
+      </p:sp>
+      <p:sp>
+        <p:nvSpPr>
+          <p:cNvPr id="35" name="Shape 33"/>
+          <p:cNvSpPr/>
+          <p:nvPr/>
+        </p:nvSpPr>
+        <p:spPr>
+          <a:xfrm>
+            <a:off x="6675120" y="5257800"/>
+            <a:ext cx="502920" cy="502920"/>
+          </a:xfrm>
+          <a:prstGeom prst="ellipse">
+            <a:avLst/>
+          </a:prstGeom>
+          <a:solidFill>
+            <a:schemeClr val="accent3"/>
+          </a:solidFill>
+          <a:ln/>
+        </p:spPr>
+      </p:sp>
+      <p:sp>
+        <p:nvSpPr>
+          <p:cNvPr id="36" name="Text 34"/>
+          <p:cNvSpPr txBox="1"/>
+          <p:nvPr/>
+        </p:nvSpPr>
+        <p:spPr>
+          <a:xfrm>
+            <a:off x="6675120" y="5257800"/>
+            <a:ext cx="502920" cy="502920"/>
+          </a:xfrm>
+          <a:prstGeom prst="rect">
+            <a:avLst/>
+          </a:prstGeom>
+          <a:noFill/>
+          <a:ln/>
+        </p:spPr>
+        <p:txBody>
+          <a:bodyPr wrap="square" lIns="0" tIns="0" rIns="0" bIns="0" rtlCol="0" anchor="ctr"/>
+          <a:lstStyle/>
+          <a:p>
+            <a:pPr algn="ctr" indent="0" marL="0">
+              <a:buNone/>
+            </a:pPr>
+            <a:r>
+              <a:rPr lang="en-US" sz="1400" b="1" dirty="0">
+                <a:solidFill>
+                  <a:schemeClr val="bg1"/>
+                </a:solidFill>
+                <a:latin typeface="Meiryo UI" pitchFamily="34" charset="0"/>
+                <a:ea typeface="Meiryo UI" pitchFamily="34" charset="-122"/>
+                <a:cs typeface="Meiryo UI" pitchFamily="34" charset="-120"/>
+              </a:rPr>
+              <a:t>4</a:t>
+            </a:r>
+            <a:endParaRPr lang="en-US" sz="1400" dirty="0"/>
+          </a:p>
+        </p:txBody>
+      </p:sp>
+      <p:sp>
+        <p:nvSpPr>
+          <p:cNvPr id="37" name="Text 35"/>
+          <p:cNvSpPr txBox="1"/>
+          <p:nvPr/>
+        </p:nvSpPr>
+        <p:spPr>
+          <a:xfrm>
+            <a:off x="7406640" y="5212080"/>
+            <a:ext cx="4206240" cy="365760"/>
+          </a:xfrm>
+          <a:prstGeom prst="rect">
+            <a:avLst/>
+          </a:prstGeom>
+          <a:noFill/>
+          <a:ln/>
+        </p:spPr>
+        <p:txBody>
+          <a:bodyPr wrap="square" lIns="0" tIns="0" rIns="0" bIns="0" rtlCol="0" anchor="ctr"/>
+          <a:lstStyle/>
+          <a:p>
+            <a:pPr indent="0" marL="0">
+              <a:buNone/>
+            </a:pPr>
+            <a:r>
+              <a:rPr lang="en-US" sz="1600" b="1" dirty="0">
+                <a:solidFill>
+                  <a:schemeClr val="accent3"/>
+                </a:solidFill>
+                <a:latin typeface="Meiryo UI" pitchFamily="34" charset="0"/>
+                <a:ea typeface="Meiryo UI" pitchFamily="34" charset="-122"/>
+                <a:cs typeface="Meiryo UI" pitchFamily="34" charset="-120"/>
+              </a:rPr>
+              <a:t>売買契約</a:t>
+            </a:r>
+            <a:endParaRPr lang="en-US" sz="1600" dirty="0"/>
+          </a:p>
+        </p:txBody>
+      </p:sp>
+      <p:sp>
+        <p:nvSpPr>
+          <p:cNvPr id="38" name="Text 36"/>
+          <p:cNvSpPr txBox="1"/>
+          <p:nvPr/>
+        </p:nvSpPr>
+        <p:spPr>
+          <a:xfrm>
+            <a:off x="7406640" y="5577840"/>
+            <a:ext cx="4206240" cy="365760"/>
+          </a:xfrm>
+          <a:prstGeom prst="rect">
+            <a:avLst/>
+          </a:prstGeom>
+          <a:noFill/>
+          <a:ln/>
+        </p:spPr>
+        <p:txBody>
+          <a:bodyPr wrap="square" lIns="0" tIns="0" rIns="0" bIns="0" rtlCol="0" anchor="ctr"/>
+          <a:lstStyle/>
+          <a:p>
+            <a:pPr indent="0" marL="0">
+              <a:buNone/>
+            </a:pPr>
+            <a:r>
+              <a:rPr lang="en-US" sz="1400" dirty="0">
+                <a:solidFill>
+                  <a:schemeClr val="tx1"/>
+                </a:solidFill>
+                <a:latin typeface="Meiryo UI" pitchFamily="34" charset="0"/>
+                <a:ea typeface="Meiryo UI" pitchFamily="34" charset="-122"/>
+                <a:cs typeface="Meiryo UI" pitchFamily="34" charset="-120"/>
+              </a:rPr>
+              <a:t>1円/kgでの買い取りで合意・契約</a:t>
+            </a:r>
+            <a:endParaRPr lang="en-US" sz="1400" dirty="0"/>
+          </a:p>
+        </p:txBody>
+      </p:sp>
       <p:sp>
         <p:nvSpPr>
           <p:cNvPr id="25" name="Slide Number Placeholder 0"/>
@@ -5790,7 +7063,7 @@
                   <a:schemeClr val="tx2"/>
                 </a:solidFill>
               </a:rPr>
-              <a:t>② DX推進：4つの取り組み</a:t>
+              <a:t>成果2：安い処分先への振り替えを拡大</a:t>
             </a:r>
             <a:endParaRPr lang="en-US" sz="3000" dirty="0"/>
           </a:p>
@@ -5829,26 +7102,391 @@
                 <a:ea typeface="Meiryo UI" pitchFamily="34" charset="-122"/>
                 <a:cs typeface="Meiryo UI" pitchFamily="34" charset="-120"/>
               </a:rPr>
-              <a:t>手作業や「ファイルを開かないと分からない」状態を減らすため、ツールを自ら作り、現場で使える形にしました。</a:t>
+              <a:t>運送会社を増やして運搬量を確保し、処分単価の安い太平洋セメントへの搬出を月30tから100tに増やしました。</a:t>
             </a:r>
             <a:endParaRPr lang="en-US" sz="1600" dirty="0"/>
           </a:p>
         </p:txBody>
       </p:sp>
-      <p:sp>
-        <p:nvSpPr>
-          <p:cNvPr id="4" name="dx0"/>
+      <p:graphicFrame>
+        <p:nvGraphicFramePr>
+          <p:cNvPr id="4" name="Chart 0" descr=""/>
+          <p:cNvGraphicFramePr/>
+          <p:nvPr/>
+        </p:nvGraphicFramePr>
+        <p:xfrm>
+          <a:off x="457200" y="1737360"/>
+          <a:ext cx="4023360" cy="4434840"/>
+        </p:xfrm>
+        <a:graphic xmlns:a="http://schemas.openxmlformats.org/drawingml/2006/main">
+          <a:graphicData uri="http://schemas.openxmlformats.org/drawingml/2006/chart">
+            <c:chart xmlns:c="http://schemas.openxmlformats.org/drawingml/2006/chart" r:id="rId1"/>
+          </a:graphicData>
+        </a:graphic>
+      </p:graphicFrame>
+      <p:sp>
+        <p:nvSpPr>
+          <p:cNvPr id="5" name="Text 2"/>
+          <p:cNvSpPr txBox="1"/>
+          <p:nvPr/>
+        </p:nvSpPr>
+        <p:spPr>
+          <a:xfrm>
+            <a:off x="4846320" y="1783080"/>
+            <a:ext cx="6766560" cy="411480"/>
+          </a:xfrm>
+          <a:prstGeom prst="rect">
+            <a:avLst/>
+          </a:prstGeom>
+          <a:noFill/>
+          <a:ln/>
+        </p:spPr>
+        <p:txBody>
+          <a:bodyPr wrap="square" lIns="0" tIns="0" rIns="0" bIns="0" rtlCol="0" anchor="ctr"/>
+          <a:lstStyle/>
+          <a:p>
+            <a:pPr indent="0" marL="0">
+              <a:buNone/>
+            </a:pPr>
+            <a:r>
+              <a:rPr lang="en-US" sz="1800" b="1" dirty="0">
+                <a:solidFill>
+                  <a:schemeClr val="tx2"/>
+                </a:solidFill>
+                <a:latin typeface="Meiryo UI" pitchFamily="34" charset="0"/>
+                <a:ea typeface="Meiryo UI" pitchFamily="34" charset="-122"/>
+                <a:cs typeface="Meiryo UI" pitchFamily="34" charset="-120"/>
+              </a:rPr>
+              <a:t>処分単価の比較</a:t>
+            </a:r>
+            <a:endParaRPr lang="en-US" sz="1800" dirty="0"/>
+          </a:p>
+        </p:txBody>
+      </p:sp>
+      <p:sp>
+        <p:nvSpPr>
+          <p:cNvPr id="6" name="Text 3"/>
+          <p:cNvSpPr txBox="1"/>
+          <p:nvPr/>
+        </p:nvSpPr>
+        <p:spPr>
+          <a:xfrm>
+            <a:off x="4846320" y="2331720"/>
+            <a:ext cx="3108960" cy="502920"/>
+          </a:xfrm>
+          <a:prstGeom prst="rect">
+            <a:avLst/>
+          </a:prstGeom>
+          <a:noFill/>
+          <a:ln/>
+        </p:spPr>
+        <p:txBody>
+          <a:bodyPr wrap="square" lIns="0" tIns="0" rIns="0" bIns="0" rtlCol="0" anchor="ctr"/>
+          <a:lstStyle/>
+          <a:p>
+            <a:pPr indent="0" marL="0">
+              <a:buNone/>
+            </a:pPr>
+            <a:r>
+              <a:rPr lang="en-US" sz="1300" dirty="0">
+                <a:solidFill>
+                  <a:schemeClr val="tx1"/>
+                </a:solidFill>
+                <a:latin typeface="Meiryo UI" pitchFamily="34" charset="0"/>
+                <a:ea typeface="Meiryo UI" pitchFamily="34" charset="-122"/>
+                <a:cs typeface="Meiryo UI" pitchFamily="34" charset="-120"/>
+              </a:rPr>
+              <a:t>サニークリエーションプランニング</a:t>
+            </a:r>
+            <a:endParaRPr lang="en-US" sz="1300" dirty="0"/>
+          </a:p>
+        </p:txBody>
+      </p:sp>
+      <p:sp>
+        <p:nvSpPr>
+          <p:cNvPr id="7" name="Shape 4"/>
           <p:cNvSpPr/>
           <p:nvPr/>
         </p:nvSpPr>
         <p:spPr>
           <a:xfrm>
-            <a:off x="548640" y="1828800"/>
-            <a:ext cx="5440680" cy="1965960"/>
+            <a:off x="8046720" y="2404872"/>
+            <a:ext cx="2468880" cy="365760"/>
+          </a:xfrm>
+          <a:prstGeom prst="rect">
+            <a:avLst/>
+          </a:prstGeom>
+          <a:solidFill>
+            <a:schemeClr val="accent6"/>
+          </a:solidFill>
+          <a:ln/>
+        </p:spPr>
+      </p:sp>
+      <p:sp>
+        <p:nvSpPr>
+          <p:cNvPr id="8" name="Text 5"/>
+          <p:cNvSpPr txBox="1"/>
+          <p:nvPr/>
+        </p:nvSpPr>
+        <p:spPr>
+          <a:xfrm>
+            <a:off x="10607040" y="2331720"/>
+            <a:ext cx="1005840" cy="502920"/>
+          </a:xfrm>
+          <a:prstGeom prst="rect">
+            <a:avLst/>
+          </a:prstGeom>
+          <a:noFill/>
+          <a:ln/>
+        </p:spPr>
+        <p:txBody>
+          <a:bodyPr wrap="square" lIns="0" tIns="0" rIns="0" bIns="0" rtlCol="0" anchor="ctr"/>
+          <a:lstStyle/>
+          <a:p>
+            <a:pPr indent="0" marL="0">
+              <a:buNone/>
+            </a:pPr>
+            <a:r>
+              <a:rPr lang="en-US" sz="1400" b="1" dirty="0">
+                <a:solidFill>
+                  <a:schemeClr val="tx1"/>
+                </a:solidFill>
+                <a:latin typeface="Meiryo UI" pitchFamily="34" charset="0"/>
+                <a:ea typeface="Meiryo UI" pitchFamily="34" charset="-122"/>
+                <a:cs typeface="Meiryo UI" pitchFamily="34" charset="-120"/>
+              </a:rPr>
+              <a:t>18円/kg</a:t>
+            </a:r>
+            <a:endParaRPr lang="en-US" sz="1400" dirty="0"/>
+          </a:p>
+        </p:txBody>
+      </p:sp>
+      <p:sp>
+        <p:nvSpPr>
+          <p:cNvPr id="9" name="Text 6"/>
+          <p:cNvSpPr txBox="1"/>
+          <p:nvPr/>
+        </p:nvSpPr>
+        <p:spPr>
+          <a:xfrm>
+            <a:off x="4846320" y="3017520"/>
+            <a:ext cx="3108960" cy="502920"/>
+          </a:xfrm>
+          <a:prstGeom prst="rect">
+            <a:avLst/>
+          </a:prstGeom>
+          <a:noFill/>
+          <a:ln/>
+        </p:spPr>
+        <p:txBody>
+          <a:bodyPr wrap="square" lIns="0" tIns="0" rIns="0" bIns="0" rtlCol="0" anchor="ctr"/>
+          <a:lstStyle/>
+          <a:p>
+            <a:pPr indent="0" marL="0">
+              <a:buNone/>
+            </a:pPr>
+            <a:r>
+              <a:rPr lang="en-US" sz="1300" dirty="0">
+                <a:solidFill>
+                  <a:schemeClr val="tx1"/>
+                </a:solidFill>
+                <a:latin typeface="Meiryo UI" pitchFamily="34" charset="0"/>
+                <a:ea typeface="Meiryo UI" pitchFamily="34" charset="-122"/>
+                <a:cs typeface="Meiryo UI" pitchFamily="34" charset="-120"/>
+              </a:rPr>
+              <a:t>太平洋セメント</a:t>
+            </a:r>
+            <a:endParaRPr lang="en-US" sz="1300" dirty="0"/>
+          </a:p>
+        </p:txBody>
+      </p:sp>
+      <p:sp>
+        <p:nvSpPr>
+          <p:cNvPr id="10" name="Shape 7"/>
+          <p:cNvSpPr/>
+          <p:nvPr/>
+        </p:nvSpPr>
+        <p:spPr>
+          <a:xfrm>
+            <a:off x="8046720" y="3090672"/>
+            <a:ext cx="1508760" cy="365760"/>
+          </a:xfrm>
+          <a:prstGeom prst="rect">
+            <a:avLst/>
+          </a:prstGeom>
+          <a:solidFill>
+            <a:schemeClr val="accent2"/>
+          </a:solidFill>
+          <a:ln/>
+        </p:spPr>
+      </p:sp>
+      <p:sp>
+        <p:nvSpPr>
+          <p:cNvPr id="11" name="Text 8"/>
+          <p:cNvSpPr txBox="1"/>
+          <p:nvPr/>
+        </p:nvSpPr>
+        <p:spPr>
+          <a:xfrm>
+            <a:off x="9646920" y="3017520"/>
+            <a:ext cx="1005840" cy="502920"/>
+          </a:xfrm>
+          <a:prstGeom prst="rect">
+            <a:avLst/>
+          </a:prstGeom>
+          <a:noFill/>
+          <a:ln/>
+        </p:spPr>
+        <p:txBody>
+          <a:bodyPr wrap="square" lIns="0" tIns="0" rIns="0" bIns="0" rtlCol="0" anchor="ctr"/>
+          <a:lstStyle/>
+          <a:p>
+            <a:pPr indent="0" marL="0">
+              <a:buNone/>
+            </a:pPr>
+            <a:r>
+              <a:rPr lang="en-US" sz="1400" b="1" dirty="0">
+                <a:solidFill>
+                  <a:schemeClr val="tx1"/>
+                </a:solidFill>
+                <a:latin typeface="Meiryo UI" pitchFamily="34" charset="0"/>
+                <a:ea typeface="Meiryo UI" pitchFamily="34" charset="-122"/>
+                <a:cs typeface="Meiryo UI" pitchFamily="34" charset="-120"/>
+              </a:rPr>
+              <a:t>11円/kg</a:t>
+            </a:r>
+            <a:endParaRPr lang="en-US" sz="1400" dirty="0"/>
+          </a:p>
+        </p:txBody>
+      </p:sp>
+      <p:sp>
+        <p:nvSpPr>
+          <p:cNvPr id="12" name="tc1"/>
+          <p:cNvSpPr/>
+          <p:nvPr/>
+        </p:nvSpPr>
+        <p:spPr>
+          <a:xfrm>
+            <a:off x="4846320" y="3840480"/>
+            <a:ext cx="3246120" cy="2286000"/>
           </a:xfrm>
           <a:prstGeom prst="roundRect">
             <a:avLst>
-              <a:gd name="adj" fmla="val 5581"/>
+              <a:gd name="adj" fmla="val 4800"/>
+            </a:avLst>
+          </a:prstGeom>
+          <a:solidFill>
+            <a:schemeClr val="tx2"/>
+          </a:solidFill>
+          <a:ln/>
+        </p:spPr>
+      </p:sp>
+      <p:sp>
+        <p:nvSpPr>
+          <p:cNvPr id="13" name="Text 10"/>
+          <p:cNvSpPr txBox="1"/>
+          <p:nvPr/>
+        </p:nvSpPr>
+        <p:spPr>
+          <a:xfrm>
+            <a:off x="5074920" y="4023360"/>
+            <a:ext cx="2834640" cy="868680"/>
+          </a:xfrm>
+          <a:prstGeom prst="rect">
+            <a:avLst/>
+          </a:prstGeom>
+          <a:noFill/>
+          <a:ln/>
+        </p:spPr>
+        <p:txBody>
+          <a:bodyPr wrap="square" lIns="0" tIns="0" rIns="0" bIns="0" rtlCol="0" anchor="b"/>
+          <a:lstStyle/>
+          <a:p>
+            <a:pPr indent="0" marL="0">
+              <a:buNone/>
+            </a:pPr>
+            <a:r>
+              <a:rPr lang="en-US" sz="4400" b="1" dirty="0">
+                <a:solidFill>
+                  <a:schemeClr val="bg1"/>
+                </a:solidFill>
+                <a:latin typeface="Meiryo UI" pitchFamily="34" charset="0"/>
+                <a:ea typeface="Meiryo UI" pitchFamily="34" charset="-122"/>
+                <a:cs typeface="Meiryo UI" pitchFamily="34" charset="-120"/>
+              </a:rPr>
+              <a:t>7</a:t>
+            </a:r>
+            <a:pPr indent="0" marL="0">
+              <a:buNone/>
+            </a:pPr>
+            <a:r>
+              <a:rPr lang="en-US" sz="1500" b="1" dirty="0">
+                <a:solidFill>
+                  <a:schemeClr val="accent4"/>
+                </a:solidFill>
+                <a:latin typeface="Meiryo UI" pitchFamily="34" charset="0"/>
+                <a:ea typeface="Meiryo UI" pitchFamily="34" charset="-122"/>
+                <a:cs typeface="Meiryo UI" pitchFamily="34" charset="-120"/>
+              </a:rPr>
+              <a:t> 円/kg 安い</a:t>
+            </a:r>
+            <a:endParaRPr lang="en-US" sz="4400" dirty="0"/>
+          </a:p>
+        </p:txBody>
+      </p:sp>
+      <p:sp>
+        <p:nvSpPr>
+          <p:cNvPr id="14" name="Text 11"/>
+          <p:cNvSpPr txBox="1"/>
+          <p:nvPr/>
+        </p:nvSpPr>
+        <p:spPr>
+          <a:xfrm>
+            <a:off x="5074920" y="4983480"/>
+            <a:ext cx="2834640" cy="1005840"/>
+          </a:xfrm>
+          <a:prstGeom prst="rect">
+            <a:avLst/>
+          </a:prstGeom>
+          <a:noFill/>
+          <a:ln/>
+        </p:spPr>
+        <p:txBody>
+          <a:bodyPr wrap="square" lIns="0" tIns="0" rIns="0" bIns="0" rtlCol="0" anchor="t"/>
+          <a:lstStyle/>
+          <a:p>
+            <a:pPr indent="0" marL="0">
+              <a:buNone/>
+            </a:pPr>
+            <a:r>
+              <a:rPr lang="en-US" sz="1300" dirty="0">
+                <a:solidFill>
+                  <a:schemeClr val="bg1"/>
+                </a:solidFill>
+                <a:latin typeface="Meiryo UI" pitchFamily="34" charset="0"/>
+                <a:ea typeface="Meiryo UI" pitchFamily="34" charset="-122"/>
+                <a:cs typeface="Meiryo UI" pitchFamily="34" charset="-120"/>
+              </a:rPr>
+              <a:t>増えた70t/月を他社に出した場合と比べて、月49万円・年588万円の削減</a:t>
+            </a:r>
+            <a:endParaRPr lang="en-US" sz="1300" dirty="0"/>
+          </a:p>
+        </p:txBody>
+      </p:sp>
+      <p:sp>
+        <p:nvSpPr>
+          <p:cNvPr id="15" name="tc2"/>
+          <p:cNvSpPr/>
+          <p:nvPr/>
+        </p:nvSpPr>
+        <p:spPr>
+          <a:xfrm>
+            <a:off x="8366760" y="3840480"/>
+            <a:ext cx="3246120" cy="2286000"/>
+          </a:xfrm>
+          <a:prstGeom prst="roundRect">
+            <a:avLst>
+              <a:gd name="adj" fmla="val 4800"/>
             </a:avLst>
           </a:prstGeom>
           <a:solidFill>
@@ -5859,615 +7497,63 @@
       </p:sp>
       <p:sp>
         <p:nvSpPr>
-          <p:cNvPr id="5" name="Shape 3"/>
-          <p:cNvSpPr/>
-          <p:nvPr/>
-        </p:nvSpPr>
-        <p:spPr>
-          <a:xfrm>
-            <a:off x="822960" y="2103120"/>
-            <a:ext cx="502920" cy="502920"/>
-          </a:xfrm>
-          <a:prstGeom prst="ellipse">
-            <a:avLst/>
-          </a:prstGeom>
-          <a:solidFill>
-            <a:schemeClr val="accent2"/>
-          </a:solidFill>
-          <a:ln/>
-        </p:spPr>
-      </p:sp>
-      <p:sp>
-        <p:nvSpPr>
-          <p:cNvPr id="6" name="Text 4"/>
+          <p:cNvPr id="16" name="Text 13"/>
           <p:cNvSpPr txBox="1"/>
           <p:nvPr/>
         </p:nvSpPr>
         <p:spPr>
           <a:xfrm>
-            <a:off x="822960" y="2103120"/>
-            <a:ext cx="502920" cy="502920"/>
-          </a:xfrm>
-          <a:prstGeom prst="rect">
-            <a:avLst/>
-          </a:prstGeom>
-          <a:noFill/>
-          <a:ln/>
-        </p:spPr>
-        <p:txBody>
-          <a:bodyPr wrap="square" lIns="0" tIns="0" rIns="0" bIns="0" rtlCol="0" anchor="ctr"/>
-          <a:lstStyle/>
-          <a:p>
-            <a:pPr algn="ctr" indent="0" marL="0">
-              <a:buNone/>
-            </a:pPr>
-            <a:r>
-              <a:rPr lang="en-US" sz="1400" b="1" dirty="0">
-                <a:solidFill>
-                  <a:schemeClr val="bg1"/>
+            <a:off x="8595360" y="4023360"/>
+            <a:ext cx="2834640" cy="1965960"/>
+          </a:xfrm>
+          <a:prstGeom prst="rect">
+            <a:avLst/>
+          </a:prstGeom>
+          <a:noFill/>
+          <a:ln/>
+        </p:spPr>
+        <p:txBody>
+          <a:bodyPr wrap="square" lIns="0" tIns="0" rIns="0" bIns="0" rtlCol="0" anchor="t"/>
+          <a:lstStyle/>
+          <a:p>
+            <a:pPr indent="0" marL="0">
+              <a:spcAft>
+                <a:spcPts val="600"/>
+              </a:spcAft>
+              <a:buNone/>
+            </a:pPr>
+            <a:r>
+              <a:rPr lang="en-US" sz="1600" b="1" dirty="0">
+                <a:solidFill>
+                  <a:schemeClr val="tx2"/>
                 </a:solidFill>
                 <a:latin typeface="Meiryo UI" pitchFamily="34" charset="0"/>
                 <a:ea typeface="Meiryo UI" pitchFamily="34" charset="-122"/>
                 <a:cs typeface="Meiryo UI" pitchFamily="34" charset="-120"/>
               </a:rPr>
-              <a:t>1</a:t>
-            </a:r>
-            <a:endParaRPr lang="en-US" sz="1400" dirty="0"/>
-          </a:p>
-        </p:txBody>
-      </p:sp>
-      <p:sp>
-        <p:nvSpPr>
-          <p:cNvPr id="7" name="Text 5"/>
-          <p:cNvSpPr txBox="1"/>
-          <p:nvPr/>
-        </p:nvSpPr>
-        <p:spPr>
-          <a:xfrm>
-            <a:off x="1508760" y="2103120"/>
-            <a:ext cx="4206240" cy="502920"/>
-          </a:xfrm>
-          <a:prstGeom prst="rect">
-            <a:avLst/>
-          </a:prstGeom>
-          <a:noFill/>
-          <a:ln/>
-        </p:spPr>
-        <p:txBody>
-          <a:bodyPr wrap="square" lIns="0" tIns="0" rIns="0" bIns="0" rtlCol="0" anchor="ctr"/>
-          <a:lstStyle/>
+              <a:t>ポイント</a:t>
+            </a:r>
+            <a:endParaRPr lang="en-US" sz="1600" dirty="0"/>
+          </a:p>
           <a:p>
             <a:pPr indent="0" marL="0">
-              <a:buNone/>
-            </a:pPr>
-            <a:r>
-              <a:rPr lang="en-US" sz="1800" b="1" dirty="0">
-                <a:solidFill>
-                  <a:schemeClr val="tx2"/>
+              <a:spcAft>
+                <a:spcPts val="600"/>
+              </a:spcAft>
+              <a:buNone/>
+            </a:pPr>
+            <a:r>
+              <a:rPr lang="en-US" sz="1300" dirty="0">
+                <a:solidFill>
+                  <a:schemeClr val="tx1"/>
                 </a:solidFill>
                 <a:latin typeface="Meiryo UI" pitchFamily="34" charset="0"/>
                 <a:ea typeface="Meiryo UI" pitchFamily="34" charset="-122"/>
                 <a:cs typeface="Meiryo UI" pitchFamily="34" charset="-120"/>
               </a:rPr>
-              <a:t>請求書照合の自動化</a:t>
-            </a:r>
-            <a:endParaRPr lang="en-US" sz="1800" dirty="0"/>
-          </a:p>
-        </p:txBody>
-      </p:sp>
-      <p:sp>
-        <p:nvSpPr>
-          <p:cNvPr id="8" name="Text 6"/>
-          <p:cNvSpPr txBox="1"/>
-          <p:nvPr/>
-        </p:nvSpPr>
-        <p:spPr>
-          <a:xfrm>
-            <a:off x="1508760" y="2697480"/>
-            <a:ext cx="4206240" cy="960120"/>
-          </a:xfrm>
-          <a:prstGeom prst="rect">
-            <a:avLst/>
-          </a:prstGeom>
-          <a:noFill/>
-          <a:ln/>
-        </p:spPr>
-        <p:txBody>
-          <a:bodyPr wrap="square" lIns="0" tIns="0" rIns="0" bIns="0" rtlCol="0" anchor="t"/>
-          <a:lstStyle/>
-          <a:p>
-            <a:pPr indent="0" marL="0">
-              <a:buNone/>
-            </a:pPr>
-            <a:r>
-              <a:rPr lang="en-US" sz="1400" dirty="0">
-                <a:solidFill>
-                  <a:schemeClr val="tx1"/>
-                </a:solidFill>
-                <a:latin typeface="Meiryo UI" pitchFamily="34" charset="0"/>
-                <a:ea typeface="Meiryo UI" pitchFamily="34" charset="-122"/>
-                <a:cs typeface="Meiryo UI" pitchFamily="34" charset="-120"/>
-              </a:rPr>
-              <a:t>運送会社の請求書（PDF）を読み取り、自社の出荷データ・契約運賃表と自動で突き合わせ。食い違いだけを「要確認」として一覧化</a:t>
-            </a:r>
-            <a:endParaRPr lang="en-US" sz="1400" dirty="0"/>
-          </a:p>
-        </p:txBody>
-      </p:sp>
-      <p:sp>
-        <p:nvSpPr>
-          <p:cNvPr id="9" name="dx1"/>
-          <p:cNvSpPr/>
-          <p:nvPr/>
-        </p:nvSpPr>
-        <p:spPr>
-          <a:xfrm>
-            <a:off x="6172200" y="1828800"/>
-            <a:ext cx="5440680" cy="1965960"/>
-          </a:xfrm>
-          <a:prstGeom prst="roundRect">
-            <a:avLst>
-              <a:gd name="adj" fmla="val 5581"/>
-            </a:avLst>
-          </a:prstGeom>
-          <a:solidFill>
-            <a:schemeClr val="bg2"/>
-          </a:solidFill>
-          <a:ln/>
-        </p:spPr>
-      </p:sp>
-      <p:sp>
-        <p:nvSpPr>
-          <p:cNvPr id="10" name="Shape 8"/>
-          <p:cNvSpPr/>
-          <p:nvPr/>
-        </p:nvSpPr>
-        <p:spPr>
-          <a:xfrm>
-            <a:off x="6446520" y="2103120"/>
-            <a:ext cx="502920" cy="502920"/>
-          </a:xfrm>
-          <a:prstGeom prst="ellipse">
-            <a:avLst/>
-          </a:prstGeom>
-          <a:solidFill>
-            <a:schemeClr val="accent2"/>
-          </a:solidFill>
-          <a:ln/>
-        </p:spPr>
-      </p:sp>
-      <p:sp>
-        <p:nvSpPr>
-          <p:cNvPr id="11" name="Text 9"/>
-          <p:cNvSpPr txBox="1"/>
-          <p:nvPr/>
-        </p:nvSpPr>
-        <p:spPr>
-          <a:xfrm>
-            <a:off x="6446520" y="2103120"/>
-            <a:ext cx="502920" cy="502920"/>
-          </a:xfrm>
-          <a:prstGeom prst="rect">
-            <a:avLst/>
-          </a:prstGeom>
-          <a:noFill/>
-          <a:ln/>
-        </p:spPr>
-        <p:txBody>
-          <a:bodyPr wrap="square" lIns="0" tIns="0" rIns="0" bIns="0" rtlCol="0" anchor="ctr"/>
-          <a:lstStyle/>
-          <a:p>
-            <a:pPr algn="ctr" indent="0" marL="0">
-              <a:buNone/>
-            </a:pPr>
-            <a:r>
-              <a:rPr lang="en-US" sz="1400" b="1" dirty="0">
-                <a:solidFill>
-                  <a:schemeClr val="bg1"/>
-                </a:solidFill>
-                <a:latin typeface="Meiryo UI" pitchFamily="34" charset="0"/>
-                <a:ea typeface="Meiryo UI" pitchFamily="34" charset="-122"/>
-                <a:cs typeface="Meiryo UI" pitchFamily="34" charset="-120"/>
-              </a:rPr>
-              <a:t>2</a:t>
-            </a:r>
-            <a:endParaRPr lang="en-US" sz="1400" dirty="0"/>
-          </a:p>
-        </p:txBody>
-      </p:sp>
-      <p:sp>
-        <p:nvSpPr>
-          <p:cNvPr id="12" name="Text 10"/>
-          <p:cNvSpPr txBox="1"/>
-          <p:nvPr/>
-        </p:nvSpPr>
-        <p:spPr>
-          <a:xfrm>
-            <a:off x="7132320" y="2103120"/>
-            <a:ext cx="4206240" cy="502920"/>
-          </a:xfrm>
-          <a:prstGeom prst="rect">
-            <a:avLst/>
-          </a:prstGeom>
-          <a:noFill/>
-          <a:ln/>
-        </p:spPr>
-        <p:txBody>
-          <a:bodyPr wrap="square" lIns="0" tIns="0" rIns="0" bIns="0" rtlCol="0" anchor="ctr"/>
-          <a:lstStyle/>
-          <a:p>
-            <a:pPr indent="0" marL="0">
-              <a:buNone/>
-            </a:pPr>
-            <a:r>
-              <a:rPr lang="en-US" sz="1800" b="1" dirty="0">
-                <a:solidFill>
-                  <a:schemeClr val="tx2"/>
-                </a:solidFill>
-                <a:latin typeface="Meiryo UI" pitchFamily="34" charset="0"/>
-                <a:ea typeface="Meiryo UI" pitchFamily="34" charset="-122"/>
-                <a:cs typeface="Meiryo UI" pitchFamily="34" charset="-120"/>
-              </a:rPr>
-              <a:t>操業日報ビューワー</a:t>
-            </a:r>
-            <a:endParaRPr lang="en-US" sz="1800" dirty="0"/>
-          </a:p>
-        </p:txBody>
-      </p:sp>
-      <p:sp>
-        <p:nvSpPr>
-          <p:cNvPr id="13" name="Text 11"/>
-          <p:cNvSpPr txBox="1"/>
-          <p:nvPr/>
-        </p:nvSpPr>
-        <p:spPr>
-          <a:xfrm>
-            <a:off x="7132320" y="2697480"/>
-            <a:ext cx="4206240" cy="960120"/>
-          </a:xfrm>
-          <a:prstGeom prst="rect">
-            <a:avLst/>
-          </a:prstGeom>
-          <a:noFill/>
-          <a:ln/>
-        </p:spPr>
-        <p:txBody>
-          <a:bodyPr wrap="square" lIns="0" tIns="0" rIns="0" bIns="0" rtlCol="0" anchor="t"/>
-          <a:lstStyle/>
-          <a:p>
-            <a:pPr indent="0" marL="0">
-              <a:buNone/>
-            </a:pPr>
-            <a:r>
-              <a:rPr lang="en-US" sz="1400" dirty="0">
-                <a:solidFill>
-                  <a:schemeClr val="tx1"/>
-                </a:solidFill>
-                <a:latin typeface="Meiryo UI" pitchFamily="34" charset="0"/>
-                <a:ea typeface="Meiryo UI" pitchFamily="34" charset="-122"/>
-                <a:cs typeface="Meiryo UI" pitchFamily="34" charset="-120"/>
-              </a:rPr>
-              <a:t>操業日報のデータを画面で見やすく確認できるようにし、日報ファイルを探して開く手間を削減</a:t>
-            </a:r>
-            <a:endParaRPr lang="en-US" sz="1400" dirty="0"/>
-          </a:p>
-        </p:txBody>
-      </p:sp>
-      <p:sp>
-        <p:nvSpPr>
-          <p:cNvPr id="14" name="dx2"/>
-          <p:cNvSpPr/>
-          <p:nvPr/>
-        </p:nvSpPr>
-        <p:spPr>
-          <a:xfrm>
-            <a:off x="548640" y="4023360"/>
-            <a:ext cx="5440680" cy="1965960"/>
-          </a:xfrm>
-          <a:prstGeom prst="roundRect">
-            <a:avLst>
-              <a:gd name="adj" fmla="val 5581"/>
-            </a:avLst>
-          </a:prstGeom>
-          <a:solidFill>
-            <a:schemeClr val="bg2"/>
-          </a:solidFill>
-          <a:ln/>
-        </p:spPr>
-      </p:sp>
-      <p:sp>
-        <p:nvSpPr>
-          <p:cNvPr id="15" name="Shape 13"/>
-          <p:cNvSpPr/>
-          <p:nvPr/>
-        </p:nvSpPr>
-        <p:spPr>
-          <a:xfrm>
-            <a:off x="822960" y="4297680"/>
-            <a:ext cx="502920" cy="502920"/>
-          </a:xfrm>
-          <a:prstGeom prst="ellipse">
-            <a:avLst/>
-          </a:prstGeom>
-          <a:solidFill>
-            <a:schemeClr val="accent2"/>
-          </a:solidFill>
-          <a:ln/>
-        </p:spPr>
-      </p:sp>
-      <p:sp>
-        <p:nvSpPr>
-          <p:cNvPr id="16" name="Text 14"/>
-          <p:cNvSpPr txBox="1"/>
-          <p:nvPr/>
-        </p:nvSpPr>
-        <p:spPr>
-          <a:xfrm>
-            <a:off x="822960" y="4297680"/>
-            <a:ext cx="502920" cy="502920"/>
-          </a:xfrm>
-          <a:prstGeom prst="rect">
-            <a:avLst/>
-          </a:prstGeom>
-          <a:noFill/>
-          <a:ln/>
-        </p:spPr>
-        <p:txBody>
-          <a:bodyPr wrap="square" lIns="0" tIns="0" rIns="0" bIns="0" rtlCol="0" anchor="ctr"/>
-          <a:lstStyle/>
-          <a:p>
-            <a:pPr algn="ctr" indent="0" marL="0">
-              <a:buNone/>
-            </a:pPr>
-            <a:r>
-              <a:rPr lang="en-US" sz="1400" b="1" dirty="0">
-                <a:solidFill>
-                  <a:schemeClr val="bg1"/>
-                </a:solidFill>
-                <a:latin typeface="Meiryo UI" pitchFamily="34" charset="0"/>
-                <a:ea typeface="Meiryo UI" pitchFamily="34" charset="-122"/>
-                <a:cs typeface="Meiryo UI" pitchFamily="34" charset="-120"/>
-              </a:rPr>
-              <a:t>3</a:t>
-            </a:r>
-            <a:endParaRPr lang="en-US" sz="1400" dirty="0"/>
-          </a:p>
-        </p:txBody>
-      </p:sp>
-      <p:sp>
-        <p:nvSpPr>
-          <p:cNvPr id="17" name="Text 15"/>
-          <p:cNvSpPr txBox="1"/>
-          <p:nvPr/>
-        </p:nvSpPr>
-        <p:spPr>
-          <a:xfrm>
-            <a:off x="1508760" y="4297680"/>
-            <a:ext cx="4206240" cy="502920"/>
-          </a:xfrm>
-          <a:prstGeom prst="rect">
-            <a:avLst/>
-          </a:prstGeom>
-          <a:noFill/>
-          <a:ln/>
-        </p:spPr>
-        <p:txBody>
-          <a:bodyPr wrap="square" lIns="0" tIns="0" rIns="0" bIns="0" rtlCol="0" anchor="ctr"/>
-          <a:lstStyle/>
-          <a:p>
-            <a:pPr indent="0" marL="0">
-              <a:buNone/>
-            </a:pPr>
-            <a:r>
-              <a:rPr lang="en-US" sz="1800" b="1" dirty="0">
-                <a:solidFill>
-                  <a:schemeClr val="tx2"/>
-                </a:solidFill>
-                <a:latin typeface="Meiryo UI" pitchFamily="34" charset="0"/>
-                <a:ea typeface="Meiryo UI" pitchFamily="34" charset="-122"/>
-                <a:cs typeface="Meiryo UI" pitchFamily="34" charset="-120"/>
-              </a:rPr>
-              <a:t>配車ビューワー</a:t>
-            </a:r>
-            <a:endParaRPr lang="en-US" sz="1800" dirty="0"/>
-          </a:p>
-        </p:txBody>
-      </p:sp>
-      <p:sp>
-        <p:nvSpPr>
-          <p:cNvPr id="18" name="Text 16"/>
-          <p:cNvSpPr txBox="1"/>
-          <p:nvPr/>
-        </p:nvSpPr>
-        <p:spPr>
-          <a:xfrm>
-            <a:off x="1508760" y="4892040"/>
-            <a:ext cx="4206240" cy="960120"/>
-          </a:xfrm>
-          <a:prstGeom prst="rect">
-            <a:avLst/>
-          </a:prstGeom>
-          <a:noFill/>
-          <a:ln/>
-        </p:spPr>
-        <p:txBody>
-          <a:bodyPr wrap="square" lIns="0" tIns="0" rIns="0" bIns="0" rtlCol="0" anchor="t"/>
-          <a:lstStyle/>
-          <a:p>
-            <a:pPr indent="0" marL="0">
-              <a:buNone/>
-            </a:pPr>
-            <a:r>
-              <a:rPr lang="en-US" sz="1400" dirty="0">
-                <a:solidFill>
-                  <a:schemeClr val="tx1"/>
-                </a:solidFill>
-                <a:latin typeface="Meiryo UI" pitchFamily="34" charset="0"/>
-                <a:ea typeface="Meiryo UI" pitchFamily="34" charset="-122"/>
-                <a:cs typeface="Meiryo UI" pitchFamily="34" charset="-120"/>
-              </a:rPr>
-              <a:t>配車の状況を一覧で確認できるようにし、関係者の間で情報を共有しやすくした</a:t>
-            </a:r>
-            <a:endParaRPr lang="en-US" sz="1400" dirty="0"/>
-          </a:p>
-        </p:txBody>
-      </p:sp>
-      <p:sp>
-        <p:nvSpPr>
-          <p:cNvPr id="19" name="dx3"/>
-          <p:cNvSpPr/>
-          <p:nvPr/>
-        </p:nvSpPr>
-        <p:spPr>
-          <a:xfrm>
-            <a:off x="6172200" y="4023360"/>
-            <a:ext cx="5440680" cy="1965960"/>
-          </a:xfrm>
-          <a:prstGeom prst="roundRect">
-            <a:avLst>
-              <a:gd name="adj" fmla="val 5581"/>
-            </a:avLst>
-          </a:prstGeom>
-          <a:solidFill>
-            <a:schemeClr val="bg2"/>
-          </a:solidFill>
-          <a:ln/>
-        </p:spPr>
-      </p:sp>
-      <p:sp>
-        <p:nvSpPr>
-          <p:cNvPr id="20" name="Shape 18"/>
-          <p:cNvSpPr/>
-          <p:nvPr/>
-        </p:nvSpPr>
-        <p:spPr>
-          <a:xfrm>
-            <a:off x="6446520" y="4297680"/>
-            <a:ext cx="502920" cy="502920"/>
-          </a:xfrm>
-          <a:prstGeom prst="ellipse">
-            <a:avLst/>
-          </a:prstGeom>
-          <a:solidFill>
-            <a:schemeClr val="accent2"/>
-          </a:solidFill>
-          <a:ln/>
-        </p:spPr>
-      </p:sp>
-      <p:sp>
-        <p:nvSpPr>
-          <p:cNvPr id="21" name="Text 19"/>
-          <p:cNvSpPr txBox="1"/>
-          <p:nvPr/>
-        </p:nvSpPr>
-        <p:spPr>
-          <a:xfrm>
-            <a:off x="6446520" y="4297680"/>
-            <a:ext cx="502920" cy="502920"/>
-          </a:xfrm>
-          <a:prstGeom prst="rect">
-            <a:avLst/>
-          </a:prstGeom>
-          <a:noFill/>
-          <a:ln/>
-        </p:spPr>
-        <p:txBody>
-          <a:bodyPr wrap="square" lIns="0" tIns="0" rIns="0" bIns="0" rtlCol="0" anchor="ctr"/>
-          <a:lstStyle/>
-          <a:p>
-            <a:pPr algn="ctr" indent="0" marL="0">
-              <a:buNone/>
-            </a:pPr>
-            <a:r>
-              <a:rPr lang="en-US" sz="1400" b="1" dirty="0">
-                <a:solidFill>
-                  <a:schemeClr val="bg1"/>
-                </a:solidFill>
-                <a:latin typeface="Meiryo UI" pitchFamily="34" charset="0"/>
-                <a:ea typeface="Meiryo UI" pitchFamily="34" charset="-122"/>
-                <a:cs typeface="Meiryo UI" pitchFamily="34" charset="-120"/>
-              </a:rPr>
-              <a:t>4</a:t>
-            </a:r>
-            <a:endParaRPr lang="en-US" sz="1400" dirty="0"/>
-          </a:p>
-        </p:txBody>
-      </p:sp>
-      <p:sp>
-        <p:nvSpPr>
-          <p:cNvPr id="22" name="Text 20"/>
-          <p:cNvSpPr txBox="1"/>
-          <p:nvPr/>
-        </p:nvSpPr>
-        <p:spPr>
-          <a:xfrm>
-            <a:off x="7132320" y="4297680"/>
-            <a:ext cx="4206240" cy="502920"/>
-          </a:xfrm>
-          <a:prstGeom prst="rect">
-            <a:avLst/>
-          </a:prstGeom>
-          <a:noFill/>
-          <a:ln/>
-        </p:spPr>
-        <p:txBody>
-          <a:bodyPr wrap="square" lIns="0" tIns="0" rIns="0" bIns="0" rtlCol="0" anchor="ctr"/>
-          <a:lstStyle/>
-          <a:p>
-            <a:pPr indent="0" marL="0">
-              <a:buNone/>
-            </a:pPr>
-            <a:r>
-              <a:rPr lang="en-US" sz="1800" b="1" dirty="0">
-                <a:solidFill>
-                  <a:schemeClr val="tx2"/>
-                </a:solidFill>
-                <a:latin typeface="Meiryo UI" pitchFamily="34" charset="0"/>
-                <a:ea typeface="Meiryo UI" pitchFamily="34" charset="-122"/>
-                <a:cs typeface="Meiryo UI" pitchFamily="34" charset="-120"/>
-              </a:rPr>
-              <a:t>生成AI（Claude）の活用</a:t>
-            </a:r>
-            <a:endParaRPr lang="en-US" sz="1800" dirty="0"/>
-          </a:p>
-        </p:txBody>
-      </p:sp>
-      <p:sp>
-        <p:nvSpPr>
-          <p:cNvPr id="23" name="Text 21"/>
-          <p:cNvSpPr txBox="1"/>
-          <p:nvPr/>
-        </p:nvSpPr>
-        <p:spPr>
-          <a:xfrm>
-            <a:off x="7132320" y="4892040"/>
-            <a:ext cx="4206240" cy="960120"/>
-          </a:xfrm>
-          <a:prstGeom prst="rect">
-            <a:avLst/>
-          </a:prstGeom>
-          <a:noFill/>
-          <a:ln/>
-        </p:spPr>
-        <p:txBody>
-          <a:bodyPr wrap="square" lIns="0" tIns="0" rIns="0" bIns="0" rtlCol="0" anchor="t"/>
-          <a:lstStyle/>
-          <a:p>
-            <a:pPr indent="0" marL="0">
-              <a:buNone/>
-            </a:pPr>
-            <a:r>
-              <a:rPr lang="en-US" sz="1400" dirty="0">
-                <a:solidFill>
-                  <a:schemeClr val="tx1"/>
-                </a:solidFill>
-                <a:latin typeface="Meiryo UI" pitchFamily="34" charset="0"/>
-                <a:ea typeface="Meiryo UI" pitchFamily="34" charset="-122"/>
-                <a:cs typeface="Meiryo UI" pitchFamily="34" charset="-120"/>
-              </a:rPr>
-              <a:t>ツール開発・資料作成・毎月の定型作業の手順化にAIを活用し、少人数・短期間での開発を実現</a:t>
-            </a:r>
-            <a:endParaRPr lang="en-US" sz="1400" dirty="0"/>
+              <a:t>受け入れ枠があっても、運ぶ手段がなければ量は増やせない。運送会社を増やして運搬の能力を確保したことで、搬出量を3倍以上にできた。</a:t>
+            </a:r>
+            <a:endParaRPr lang="en-US" sz="1600" dirty="0"/>
           </a:p>
         </p:txBody>
       </p:sp>
@@ -6573,7 +7659,7 @@
                   <a:schemeClr val="tx2"/>
                 </a:solidFill>
               </a:rPr>
-              <a:t>請求書照合の自動化：しくみ</a:t>
+              <a:t>② DX推進：4つの取り組み</a:t>
             </a:r>
             <a:endParaRPr lang="en-US" sz="3000" dirty="0"/>
           </a:p>
@@ -6612,7 +7698,7 @@
                 <a:ea typeface="Meiryo UI" pitchFamily="34" charset="-122"/>
                 <a:cs typeface="Meiryo UI" pitchFamily="34" charset="-120"/>
               </a:rPr>
-              <a:t>毎月3つのファイルを入れてボタンを押すだけで、請求内容と契約単価・出荷実績の食い違いが分かります。</a:t>
+              <a:t>手作業や「ファイルを開かないと分からない」状態を減らすため、ツールを自ら作り、現場で使える形にしました。</a:t>
             </a:r>
             <a:endParaRPr lang="en-US" sz="1600" dirty="0"/>
           </a:p>
@@ -6620,18 +7706,18 @@
       </p:sp>
       <p:sp>
         <p:nvSpPr>
-          <p:cNvPr id="4" name="flow0"/>
+          <p:cNvPr id="4" name="dx0"/>
           <p:cNvSpPr/>
           <p:nvPr/>
         </p:nvSpPr>
         <p:spPr>
           <a:xfrm>
             <a:off x="548640" y="1828800"/>
-            <a:ext cx="2468880" cy="1737360"/>
+            <a:ext cx="5440680" cy="1965960"/>
           </a:xfrm>
           <a:prstGeom prst="roundRect">
             <a:avLst>
-              <a:gd name="adj" fmla="val 6316"/>
+              <a:gd name="adj" fmla="val 5581"/>
             </a:avLst>
           </a:prstGeom>
           <a:solidFill>
@@ -6642,14 +7728,34 @@
       </p:sp>
       <p:sp>
         <p:nvSpPr>
-          <p:cNvPr id="5" name="Text 3"/>
+          <p:cNvPr id="5" name="Shape 3"/>
+          <p:cNvSpPr/>
+          <p:nvPr/>
+        </p:nvSpPr>
+        <p:spPr>
+          <a:xfrm>
+            <a:off x="822960" y="2103120"/>
+            <a:ext cx="502920" cy="502920"/>
+          </a:xfrm>
+          <a:prstGeom prst="ellipse">
+            <a:avLst/>
+          </a:prstGeom>
+          <a:solidFill>
+            <a:schemeClr val="accent2"/>
+          </a:solidFill>
+          <a:ln/>
+        </p:spPr>
+      </p:sp>
+      <p:sp>
+        <p:nvSpPr>
+          <p:cNvPr id="6" name="Text 4"/>
           <p:cNvSpPr txBox="1"/>
           <p:nvPr/>
         </p:nvSpPr>
         <p:spPr>
           <a:xfrm>
-            <a:off x="731520" y="2011680"/>
-            <a:ext cx="2103120" cy="731520"/>
+            <a:off x="822960" y="2103120"/>
+            <a:ext cx="502920" cy="502920"/>
           </a:xfrm>
           <a:prstGeom prst="rect">
             <a:avLst/>
@@ -6665,24 +7771,46 @@
               <a:buNone/>
             </a:pPr>
             <a:r>
-              <a:rPr lang="en-US" sz="1600" b="1" dirty="0">
-                <a:solidFill>
-                  <a:schemeClr val="tx2"/>
+              <a:rPr lang="en-US" sz="1400" b="1" dirty="0">
+                <a:solidFill>
+                  <a:schemeClr val="bg1"/>
                 </a:solidFill>
                 <a:latin typeface="Meiryo UI" pitchFamily="34" charset="0"/>
                 <a:ea typeface="Meiryo UI" pitchFamily="34" charset="-122"/>
                 <a:cs typeface="Meiryo UI" pitchFamily="34" charset="-120"/>
               </a:rPr>
-              <a:t>3ファイルを</a:t>
-            </a:r>
-            <a:endParaRPr lang="en-US" sz="1600" dirty="0"/>
-          </a:p>
-          <a:p>
-            <a:pPr algn="ctr" indent="0" marL="0">
-              <a:buNone/>
-            </a:pPr>
-            <a:r>
-              <a:rPr lang="en-US" sz="1600" b="1" dirty="0">
+              <a:t>1</a:t>
+            </a:r>
+            <a:endParaRPr lang="en-US" sz="1400" dirty="0"/>
+          </a:p>
+        </p:txBody>
+      </p:sp>
+      <p:sp>
+        <p:nvSpPr>
+          <p:cNvPr id="7" name="Text 5"/>
+          <p:cNvSpPr txBox="1"/>
+          <p:nvPr/>
+        </p:nvSpPr>
+        <p:spPr>
+          <a:xfrm>
+            <a:off x="1508760" y="2103120"/>
+            <a:ext cx="4206240" cy="502920"/>
+          </a:xfrm>
+          <a:prstGeom prst="rect">
+            <a:avLst/>
+          </a:prstGeom>
+          <a:noFill/>
+          <a:ln/>
+        </p:spPr>
+        <p:txBody>
+          <a:bodyPr wrap="square" lIns="0" tIns="0" rIns="0" bIns="0" rtlCol="0" anchor="ctr"/>
+          <a:lstStyle/>
+          <a:p>
+            <a:pPr indent="0" marL="0">
+              <a:buNone/>
+            </a:pPr>
+            <a:r>
+              <a:rPr lang="en-US" sz="1800" b="1" dirty="0">
                 <a:solidFill>
                   <a:schemeClr val="tx2"/>
                 </a:solidFill>
@@ -6690,22 +7818,22 @@
                 <a:ea typeface="Meiryo UI" pitchFamily="34" charset="-122"/>
                 <a:cs typeface="Meiryo UI" pitchFamily="34" charset="-120"/>
               </a:rPr>
-              <a:t>まとめて投入</a:t>
-            </a:r>
-            <a:endParaRPr lang="en-US" sz="1600" dirty="0"/>
-          </a:p>
-        </p:txBody>
-      </p:sp>
-      <p:sp>
-        <p:nvSpPr>
-          <p:cNvPr id="6" name="Text 4"/>
+              <a:t>請求書照合の自動化</a:t>
+            </a:r>
+            <a:endParaRPr lang="en-US" sz="1800" dirty="0"/>
+          </a:p>
+        </p:txBody>
+      </p:sp>
+      <p:sp>
+        <p:nvSpPr>
+          <p:cNvPr id="8" name="Text 6"/>
           <p:cNvSpPr txBox="1"/>
           <p:nvPr/>
         </p:nvSpPr>
         <p:spPr>
           <a:xfrm>
-            <a:off x="731520" y="2788920"/>
-            <a:ext cx="2103120" cy="640080"/>
+            <a:off x="1508760" y="2697480"/>
+            <a:ext cx="4206240" cy="960120"/>
           </a:xfrm>
           <a:prstGeom prst="rect">
             <a:avLst/>
@@ -6717,59 +7845,59 @@
           <a:bodyPr wrap="square" lIns="0" tIns="0" rIns="0" bIns="0" rtlCol="0" anchor="t"/>
           <a:lstStyle/>
           <a:p>
-            <a:pPr algn="ctr" indent="0" marL="0">
-              <a:buNone/>
-            </a:pPr>
-            <a:r>
-              <a:rPr lang="en-US" sz="1200" dirty="0">
-                <a:solidFill>
-                  <a:schemeClr val="tx2"/>
+            <a:pPr indent="0" marL="0">
+              <a:buNone/>
+            </a:pPr>
+            <a:r>
+              <a:rPr lang="en-US" sz="1400" dirty="0">
+                <a:solidFill>
+                  <a:schemeClr val="tx1"/>
                 </a:solidFill>
                 <a:latin typeface="Meiryo UI" pitchFamily="34" charset="0"/>
                 <a:ea typeface="Meiryo UI" pitchFamily="34" charset="-122"/>
                 <a:cs typeface="Meiryo UI" pitchFamily="34" charset="-120"/>
               </a:rPr>
-              <a:t>請求書PDF・出荷データ・契約運賃表</a:t>
-            </a:r>
-            <a:endParaRPr lang="en-US" sz="1200" dirty="0"/>
-          </a:p>
-        </p:txBody>
-      </p:sp>
-      <p:sp>
-        <p:nvSpPr>
-          <p:cNvPr id="7" name="Shape 5"/>
+              <a:t>運送会社の請求書（PDF）を読み取り、自社の出荷データ・契約運賃表と自動で突き合わせ。食い違いだけを「要確認」として一覧化</a:t>
+            </a:r>
+            <a:endParaRPr lang="en-US" sz="1400" dirty="0"/>
+          </a:p>
+        </p:txBody>
+      </p:sp>
+      <p:sp>
+        <p:nvSpPr>
+          <p:cNvPr id="9" name="dx1"/>
           <p:cNvSpPr/>
           <p:nvPr/>
         </p:nvSpPr>
         <p:spPr>
           <a:xfrm>
-            <a:off x="3099816" y="2468880"/>
-            <a:ext cx="228600" cy="457200"/>
-          </a:xfrm>
-          <a:prstGeom prst="chevron">
-            <a:avLst/>
-          </a:prstGeom>
-          <a:solidFill>
-            <a:schemeClr val="accent4"/>
-          </a:solidFill>
-          <a:ln/>
-        </p:spPr>
-      </p:sp>
-      <p:sp>
-        <p:nvSpPr>
-          <p:cNvPr id="8" name="flow1"/>
-          <p:cNvSpPr/>
-          <p:nvPr/>
-        </p:nvSpPr>
-        <p:spPr>
-          <a:xfrm>
-            <a:off x="3413455" y="1828800"/>
-            <a:ext cx="2468880" cy="1737360"/>
+            <a:off x="6172200" y="1828800"/>
+            <a:ext cx="5440680" cy="1965960"/>
           </a:xfrm>
           <a:prstGeom prst="roundRect">
             <a:avLst>
-              <a:gd name="adj" fmla="val 6316"/>
+              <a:gd name="adj" fmla="val 5581"/>
             </a:avLst>
+          </a:prstGeom>
+          <a:solidFill>
+            <a:schemeClr val="bg2"/>
+          </a:solidFill>
+          <a:ln/>
+        </p:spPr>
+      </p:sp>
+      <p:sp>
+        <p:nvSpPr>
+          <p:cNvPr id="10" name="Shape 8"/>
+          <p:cNvSpPr/>
+          <p:nvPr/>
+        </p:nvSpPr>
+        <p:spPr>
+          <a:xfrm>
+            <a:off x="6446520" y="2103120"/>
+            <a:ext cx="502920" cy="502920"/>
+          </a:xfrm>
+          <a:prstGeom prst="ellipse">
+            <a:avLst/>
           </a:prstGeom>
           <a:solidFill>
             <a:schemeClr val="accent2"/>
@@ -6779,14 +7907,14 @@
       </p:sp>
       <p:sp>
         <p:nvSpPr>
-          <p:cNvPr id="9" name="Text 7"/>
+          <p:cNvPr id="11" name="Text 9"/>
           <p:cNvSpPr txBox="1"/>
           <p:nvPr/>
         </p:nvSpPr>
         <p:spPr>
           <a:xfrm>
-            <a:off x="3596335" y="2011680"/>
-            <a:ext cx="2103120" cy="731520"/>
+            <a:off x="6446520" y="2103120"/>
+            <a:ext cx="502920" cy="502920"/>
           </a:xfrm>
           <a:prstGeom prst="rect">
             <a:avLst/>
@@ -6802,7 +7930,7 @@
               <a:buNone/>
             </a:pPr>
             <a:r>
-              <a:rPr lang="en-US" sz="1600" b="1" dirty="0">
+              <a:rPr lang="en-US" sz="1400" b="1" dirty="0">
                 <a:solidFill>
                   <a:schemeClr val="bg1"/>
                 </a:solidFill>
@@ -6810,86 +7938,125 @@
                 <a:ea typeface="Meiryo UI" pitchFamily="34" charset="-122"/>
                 <a:cs typeface="Meiryo UI" pitchFamily="34" charset="-120"/>
               </a:rPr>
-              <a:t>自動で読み取り</a:t>
-            </a:r>
-            <a:endParaRPr lang="en-US" sz="1600" dirty="0"/>
-          </a:p>
-        </p:txBody>
-      </p:sp>
-      <p:sp>
-        <p:nvSpPr>
-          <p:cNvPr id="10" name="Text 8"/>
+              <a:t>2</a:t>
+            </a:r>
+            <a:endParaRPr lang="en-US" sz="1400" dirty="0"/>
+          </a:p>
+        </p:txBody>
+      </p:sp>
+      <p:sp>
+        <p:nvSpPr>
+          <p:cNvPr id="12" name="Text 10"/>
           <p:cNvSpPr txBox="1"/>
           <p:nvPr/>
         </p:nvSpPr>
         <p:spPr>
           <a:xfrm>
-            <a:off x="3596335" y="2788920"/>
-            <a:ext cx="2103120" cy="640080"/>
-          </a:xfrm>
-          <a:prstGeom prst="rect">
-            <a:avLst/>
-          </a:prstGeom>
-          <a:noFill/>
-          <a:ln/>
-        </p:spPr>
-        <p:txBody>
-          <a:bodyPr wrap="square" lIns="0" tIns="0" rIns="0" bIns="0" rtlCol="0" anchor="t"/>
-          <a:lstStyle/>
-          <a:p>
-            <a:pPr algn="ctr" indent="0" marL="0">
-              <a:buNone/>
-            </a:pPr>
-            <a:r>
-              <a:rPr lang="en-US" sz="1200" dirty="0">
-                <a:solidFill>
-                  <a:schemeClr val="bg1"/>
+            <a:off x="7132320" y="2103120"/>
+            <a:ext cx="4206240" cy="502920"/>
+          </a:xfrm>
+          <a:prstGeom prst="rect">
+            <a:avLst/>
+          </a:prstGeom>
+          <a:noFill/>
+          <a:ln/>
+        </p:spPr>
+        <p:txBody>
+          <a:bodyPr wrap="square" lIns="0" tIns="0" rIns="0" bIns="0" rtlCol="0" anchor="ctr"/>
+          <a:lstStyle/>
+          <a:p>
+            <a:pPr indent="0" marL="0">
+              <a:buNone/>
+            </a:pPr>
+            <a:r>
+              <a:rPr lang="en-US" sz="1800" b="1" dirty="0">
+                <a:solidFill>
+                  <a:schemeClr val="tx2"/>
                 </a:solidFill>
                 <a:latin typeface="Meiryo UI" pitchFamily="34" charset="0"/>
                 <a:ea typeface="Meiryo UI" pitchFamily="34" charset="-122"/>
                 <a:cs typeface="Meiryo UI" pitchFamily="34" charset="-120"/>
               </a:rPr>
-              <a:t>画像のPDFも文字認識（OCR）で読み取る</a:t>
-            </a:r>
-            <a:endParaRPr lang="en-US" sz="1200" dirty="0"/>
-          </a:p>
-        </p:txBody>
-      </p:sp>
-      <p:sp>
-        <p:nvSpPr>
-          <p:cNvPr id="11" name="Shape 9"/>
+              <a:t>操業日報ビューワー</a:t>
+            </a:r>
+            <a:endParaRPr lang="en-US" sz="1800" dirty="0"/>
+          </a:p>
+        </p:txBody>
+      </p:sp>
+      <p:sp>
+        <p:nvSpPr>
+          <p:cNvPr id="13" name="Text 11"/>
+          <p:cNvSpPr txBox="1"/>
+          <p:nvPr/>
+        </p:nvSpPr>
+        <p:spPr>
+          <a:xfrm>
+            <a:off x="7132320" y="2697480"/>
+            <a:ext cx="4206240" cy="960120"/>
+          </a:xfrm>
+          <a:prstGeom prst="rect">
+            <a:avLst/>
+          </a:prstGeom>
+          <a:noFill/>
+          <a:ln/>
+        </p:spPr>
+        <p:txBody>
+          <a:bodyPr wrap="square" lIns="0" tIns="0" rIns="0" bIns="0" rtlCol="0" anchor="t"/>
+          <a:lstStyle/>
+          <a:p>
+            <a:pPr indent="0" marL="0">
+              <a:buNone/>
+            </a:pPr>
+            <a:r>
+              <a:rPr lang="en-US" sz="1400" dirty="0">
+                <a:solidFill>
+                  <a:schemeClr val="tx1"/>
+                </a:solidFill>
+                <a:latin typeface="Meiryo UI" pitchFamily="34" charset="0"/>
+                <a:ea typeface="Meiryo UI" pitchFamily="34" charset="-122"/>
+                <a:cs typeface="Meiryo UI" pitchFamily="34" charset="-120"/>
+              </a:rPr>
+              <a:t>操業日報のデータを画面で見やすく確認できるようにし、日報ファイルを探して開く手間を削減</a:t>
+            </a:r>
+            <a:endParaRPr lang="en-US" sz="1400" dirty="0"/>
+          </a:p>
+        </p:txBody>
+      </p:sp>
+      <p:sp>
+        <p:nvSpPr>
+          <p:cNvPr id="14" name="dx2"/>
           <p:cNvSpPr/>
           <p:nvPr/>
         </p:nvSpPr>
         <p:spPr>
           <a:xfrm>
-            <a:off x="5964631" y="2468880"/>
-            <a:ext cx="228600" cy="457200"/>
-          </a:xfrm>
-          <a:prstGeom prst="chevron">
-            <a:avLst/>
-          </a:prstGeom>
-          <a:solidFill>
-            <a:schemeClr val="accent4"/>
-          </a:solidFill>
-          <a:ln/>
-        </p:spPr>
-      </p:sp>
-      <p:sp>
-        <p:nvSpPr>
-          <p:cNvPr id="12" name="flow2"/>
-          <p:cNvSpPr/>
-          <p:nvPr/>
-        </p:nvSpPr>
-        <p:spPr>
-          <a:xfrm>
-            <a:off x="6278270" y="1828800"/>
-            <a:ext cx="2468880" cy="1737360"/>
+            <a:off x="548640" y="4023360"/>
+            <a:ext cx="5440680" cy="1965960"/>
           </a:xfrm>
           <a:prstGeom prst="roundRect">
             <a:avLst>
-              <a:gd name="adj" fmla="val 6316"/>
+              <a:gd name="adj" fmla="val 5581"/>
             </a:avLst>
+          </a:prstGeom>
+          <a:solidFill>
+            <a:schemeClr val="bg2"/>
+          </a:solidFill>
+          <a:ln/>
+        </p:spPr>
+      </p:sp>
+      <p:sp>
+        <p:nvSpPr>
+          <p:cNvPr id="15" name="Shape 13"/>
+          <p:cNvSpPr/>
+          <p:nvPr/>
+        </p:nvSpPr>
+        <p:spPr>
+          <a:xfrm>
+            <a:off x="822960" y="4297680"/>
+            <a:ext cx="502920" cy="502920"/>
+          </a:xfrm>
+          <a:prstGeom prst="ellipse">
+            <a:avLst/>
           </a:prstGeom>
           <a:solidFill>
             <a:schemeClr val="accent2"/>
@@ -6899,14 +8066,14 @@
       </p:sp>
       <p:sp>
         <p:nvSpPr>
-          <p:cNvPr id="13" name="Text 11"/>
+          <p:cNvPr id="16" name="Text 14"/>
           <p:cNvSpPr txBox="1"/>
           <p:nvPr/>
         </p:nvSpPr>
         <p:spPr>
           <a:xfrm>
-            <a:off x="6461150" y="2011680"/>
-            <a:ext cx="2103120" cy="731520"/>
+            <a:off x="822960" y="4297680"/>
+            <a:ext cx="502920" cy="502920"/>
           </a:xfrm>
           <a:prstGeom prst="rect">
             <a:avLst/>
@@ -6922,7 +8089,7 @@
               <a:buNone/>
             </a:pPr>
             <a:r>
-              <a:rPr lang="en-US" sz="1600" b="1" dirty="0">
+              <a:rPr lang="en-US" sz="1400" b="1" dirty="0">
                 <a:solidFill>
                   <a:schemeClr val="bg1"/>
                 </a:solidFill>
@@ -6930,158 +8097,158 @@
                 <a:ea typeface="Meiryo UI" pitchFamily="34" charset="-122"/>
                 <a:cs typeface="Meiryo UI" pitchFamily="34" charset="-120"/>
               </a:rPr>
-              <a:t>自動で突き合わせ</a:t>
-            </a:r>
-            <a:endParaRPr lang="en-US" sz="1600" dirty="0"/>
-          </a:p>
-        </p:txBody>
-      </p:sp>
-      <p:sp>
-        <p:nvSpPr>
-          <p:cNvPr id="14" name="Text 12"/>
+              <a:t>3</a:t>
+            </a:r>
+            <a:endParaRPr lang="en-US" sz="1400" dirty="0"/>
+          </a:p>
+        </p:txBody>
+      </p:sp>
+      <p:sp>
+        <p:nvSpPr>
+          <p:cNvPr id="17" name="Text 15"/>
           <p:cNvSpPr txBox="1"/>
           <p:nvPr/>
         </p:nvSpPr>
         <p:spPr>
           <a:xfrm>
-            <a:off x="6461150" y="2788920"/>
-            <a:ext cx="2103120" cy="640080"/>
-          </a:xfrm>
-          <a:prstGeom prst="rect">
-            <a:avLst/>
-          </a:prstGeom>
-          <a:noFill/>
-          <a:ln/>
-        </p:spPr>
-        <p:txBody>
-          <a:bodyPr wrap="square" lIns="0" tIns="0" rIns="0" bIns="0" rtlCol="0" anchor="t"/>
-          <a:lstStyle/>
-          <a:p>
-            <a:pPr algn="ctr" indent="0" marL="0">
-              <a:buNone/>
-            </a:pPr>
-            <a:r>
-              <a:rPr lang="en-US" sz="1200" dirty="0">
-                <a:solidFill>
-                  <a:schemeClr val="bg1"/>
+            <a:off x="1508760" y="4297680"/>
+            <a:ext cx="4206240" cy="502920"/>
+          </a:xfrm>
+          <a:prstGeom prst="rect">
+            <a:avLst/>
+          </a:prstGeom>
+          <a:noFill/>
+          <a:ln/>
+        </p:spPr>
+        <p:txBody>
+          <a:bodyPr wrap="square" lIns="0" tIns="0" rIns="0" bIns="0" rtlCol="0" anchor="ctr"/>
+          <a:lstStyle/>
+          <a:p>
+            <a:pPr indent="0" marL="0">
+              <a:buNone/>
+            </a:pPr>
+            <a:r>
+              <a:rPr lang="en-US" sz="1800" b="1" dirty="0">
+                <a:solidFill>
+                  <a:schemeClr val="tx2"/>
                 </a:solidFill>
                 <a:latin typeface="Meiryo UI" pitchFamily="34" charset="0"/>
                 <a:ea typeface="Meiryo UI" pitchFamily="34" charset="-122"/>
                 <a:cs typeface="Meiryo UI" pitchFamily="34" charset="-120"/>
               </a:rPr>
-              <a:t>契約単価・自社の出荷実績と照合</a:t>
-            </a:r>
-            <a:endParaRPr lang="en-US" sz="1200" dirty="0"/>
-          </a:p>
-        </p:txBody>
-      </p:sp>
-      <p:sp>
-        <p:nvSpPr>
-          <p:cNvPr id="15" name="Shape 13"/>
-          <p:cNvSpPr/>
-          <p:nvPr/>
-        </p:nvSpPr>
-        <p:spPr>
-          <a:xfrm>
-            <a:off x="8829446" y="2468880"/>
-            <a:ext cx="228600" cy="457200"/>
-          </a:xfrm>
-          <a:prstGeom prst="chevron">
-            <a:avLst/>
-          </a:prstGeom>
-          <a:solidFill>
-            <a:schemeClr val="accent4"/>
-          </a:solidFill>
-          <a:ln/>
-        </p:spPr>
-      </p:sp>
-      <p:sp>
-        <p:nvSpPr>
-          <p:cNvPr id="16" name="flow3"/>
-          <p:cNvSpPr/>
-          <p:nvPr/>
-        </p:nvSpPr>
-        <p:spPr>
-          <a:xfrm>
-            <a:off x="9143086" y="1828800"/>
-            <a:ext cx="2468880" cy="1737360"/>
-          </a:xfrm>
-          <a:prstGeom prst="roundRect">
-            <a:avLst>
-              <a:gd name="adj" fmla="val 6316"/>
-            </a:avLst>
-          </a:prstGeom>
-          <a:solidFill>
-            <a:schemeClr val="tx2"/>
-          </a:solidFill>
-          <a:ln/>
-        </p:spPr>
-      </p:sp>
-      <p:sp>
-        <p:nvSpPr>
-          <p:cNvPr id="17" name="Text 15"/>
+              <a:t>配車ビューワー</a:t>
+            </a:r>
+            <a:endParaRPr lang="en-US" sz="1800" dirty="0"/>
+          </a:p>
+        </p:txBody>
+      </p:sp>
+      <p:sp>
+        <p:nvSpPr>
+          <p:cNvPr id="18" name="Text 16"/>
           <p:cNvSpPr txBox="1"/>
           <p:nvPr/>
         </p:nvSpPr>
         <p:spPr>
           <a:xfrm>
-            <a:off x="9325966" y="2011680"/>
-            <a:ext cx="2103120" cy="731520"/>
-          </a:xfrm>
-          <a:prstGeom prst="rect">
-            <a:avLst/>
-          </a:prstGeom>
-          <a:noFill/>
-          <a:ln/>
-        </p:spPr>
-        <p:txBody>
-          <a:bodyPr wrap="square" lIns="0" tIns="0" rIns="0" bIns="0" rtlCol="0" anchor="ctr"/>
-          <a:lstStyle/>
-          <a:p>
-            <a:pPr algn="ctr" indent="0" marL="0">
-              <a:buNone/>
-            </a:pPr>
-            <a:r>
-              <a:rPr lang="en-US" sz="1600" b="1" dirty="0">
-                <a:solidFill>
-                  <a:schemeClr val="bg1"/>
+            <a:off x="1508760" y="4892040"/>
+            <a:ext cx="4206240" cy="960120"/>
+          </a:xfrm>
+          <a:prstGeom prst="rect">
+            <a:avLst/>
+          </a:prstGeom>
+          <a:noFill/>
+          <a:ln/>
+        </p:spPr>
+        <p:txBody>
+          <a:bodyPr wrap="square" lIns="0" tIns="0" rIns="0" bIns="0" rtlCol="0" anchor="t"/>
+          <a:lstStyle/>
+          <a:p>
+            <a:pPr indent="0" marL="0">
+              <a:buNone/>
+            </a:pPr>
+            <a:r>
+              <a:rPr lang="en-US" sz="1400" dirty="0">
+                <a:solidFill>
+                  <a:schemeClr val="tx1"/>
                 </a:solidFill>
                 <a:latin typeface="Meiryo UI" pitchFamily="34" charset="0"/>
                 <a:ea typeface="Meiryo UI" pitchFamily="34" charset="-122"/>
                 <a:cs typeface="Meiryo UI" pitchFamily="34" charset="-120"/>
               </a:rPr>
-              <a:t>「要確認」を一覧化</a:t>
-            </a:r>
-            <a:endParaRPr lang="en-US" sz="1600" dirty="0"/>
-          </a:p>
-        </p:txBody>
-      </p:sp>
-      <p:sp>
-        <p:nvSpPr>
-          <p:cNvPr id="18" name="Text 16"/>
+              <a:t>配車の状況を一覧で確認できるようにし、関係者の間で情報を共有しやすくした</a:t>
+            </a:r>
+            <a:endParaRPr lang="en-US" sz="1400" dirty="0"/>
+          </a:p>
+        </p:txBody>
+      </p:sp>
+      <p:sp>
+        <p:nvSpPr>
+          <p:cNvPr id="19" name="dx3"/>
+          <p:cNvSpPr/>
+          <p:nvPr/>
+        </p:nvSpPr>
+        <p:spPr>
+          <a:xfrm>
+            <a:off x="6172200" y="4023360"/>
+            <a:ext cx="5440680" cy="1965960"/>
+          </a:xfrm>
+          <a:prstGeom prst="roundRect">
+            <a:avLst>
+              <a:gd name="adj" fmla="val 5581"/>
+            </a:avLst>
+          </a:prstGeom>
+          <a:solidFill>
+            <a:schemeClr val="bg2"/>
+          </a:solidFill>
+          <a:ln/>
+        </p:spPr>
+      </p:sp>
+      <p:sp>
+        <p:nvSpPr>
+          <p:cNvPr id="20" name="Shape 18"/>
+          <p:cNvSpPr/>
+          <p:nvPr/>
+        </p:nvSpPr>
+        <p:spPr>
+          <a:xfrm>
+            <a:off x="6446520" y="4297680"/>
+            <a:ext cx="502920" cy="502920"/>
+          </a:xfrm>
+          <a:prstGeom prst="ellipse">
+            <a:avLst/>
+          </a:prstGeom>
+          <a:solidFill>
+            <a:schemeClr val="accent2"/>
+          </a:solidFill>
+          <a:ln/>
+        </p:spPr>
+      </p:sp>
+      <p:sp>
+        <p:nvSpPr>
+          <p:cNvPr id="21" name="Text 19"/>
           <p:cNvSpPr txBox="1"/>
           <p:nvPr/>
         </p:nvSpPr>
         <p:spPr>
           <a:xfrm>
-            <a:off x="9325966" y="2788920"/>
-            <a:ext cx="2103120" cy="640080"/>
-          </a:xfrm>
-          <a:prstGeom prst="rect">
-            <a:avLst/>
-          </a:prstGeom>
-          <a:noFill/>
-          <a:ln/>
-        </p:spPr>
-        <p:txBody>
-          <a:bodyPr wrap="square" lIns="0" tIns="0" rIns="0" bIns="0" rtlCol="0" anchor="t"/>
+            <a:off x="6446520" y="4297680"/>
+            <a:ext cx="502920" cy="502920"/>
+          </a:xfrm>
+          <a:prstGeom prst="rect">
+            <a:avLst/>
+          </a:prstGeom>
+          <a:noFill/>
+          <a:ln/>
+        </p:spPr>
+        <p:txBody>
+          <a:bodyPr wrap="square" lIns="0" tIns="0" rIns="0" bIns="0" rtlCol="0" anchor="ctr"/>
           <a:lstStyle/>
           <a:p>
             <a:pPr algn="ctr" indent="0" marL="0">
               <a:buNone/>
             </a:pPr>
             <a:r>
-              <a:rPr lang="en-US" sz="1200" dirty="0">
+              <a:rPr lang="en-US" sz="1400" b="1" dirty="0">
                 <a:solidFill>
                   <a:schemeClr val="bg1"/>
                 </a:solidFill>
@@ -7089,77 +8256,11 @@
                 <a:ea typeface="Meiryo UI" pitchFamily="34" charset="-122"/>
                 <a:cs typeface="Meiryo UI" pitchFamily="34" charset="-120"/>
               </a:rPr>
-              <a:t>運送会社への確認材料に。CSVで記録</a:t>
-            </a:r>
-            <a:endParaRPr lang="en-US" sz="1200" dirty="0"/>
-          </a:p>
-        </p:txBody>
-      </p:sp>
-      <p:sp>
-        <p:nvSpPr>
-          <p:cNvPr id="19" name="pt0"/>
-          <p:cNvSpPr/>
-          <p:nvPr/>
-        </p:nvSpPr>
-        <p:spPr>
-          <a:xfrm>
-            <a:off x="548640" y="3977640"/>
-            <a:ext cx="3566160" cy="1737360"/>
-          </a:xfrm>
-          <a:prstGeom prst="roundRect">
-            <a:avLst>
-              <a:gd name="adj" fmla="val 6316"/>
-            </a:avLst>
-          </a:prstGeom>
-          <a:solidFill>
-            <a:schemeClr val="bg1"/>
-          </a:solidFill>
-          <a:ln/>
-        </p:spPr>
-      </p:sp>
-      <p:sp>
-        <p:nvSpPr>
-          <p:cNvPr id="20" name="Shape 18"/>
-          <p:cNvSpPr/>
-          <p:nvPr/>
-        </p:nvSpPr>
-        <p:spPr>
-          <a:xfrm>
-            <a:off x="548640" y="3977640"/>
-            <a:ext cx="3566160" cy="1737360"/>
-          </a:xfrm>
-          <a:prstGeom prst="roundRect">
-            <a:avLst>
-              <a:gd name="adj" fmla="val 6316"/>
-            </a:avLst>
-          </a:prstGeom>
-          <a:ln w="19050">
-            <a:solidFill>
-              <a:schemeClr val="accent6"/>
-            </a:solidFill>
-            <a:prstDash val="solid"/>
-          </a:ln>
-        </p:spPr>
-      </p:sp>
-      <p:sp>
-        <p:nvSpPr>
-          <p:cNvPr id="21" name="Shape 19"/>
-          <p:cNvSpPr/>
-          <p:nvPr/>
-        </p:nvSpPr>
-        <p:spPr>
-          <a:xfrm>
-            <a:off x="822960" y="4206240"/>
-            <a:ext cx="411480" cy="411480"/>
-          </a:xfrm>
-          <a:prstGeom prst="ellipse">
-            <a:avLst/>
-          </a:prstGeom>
-          <a:solidFill>
-            <a:schemeClr val="accent2"/>
-          </a:solidFill>
-          <a:ln/>
-        </p:spPr>
+              <a:t>4</a:t>
+            </a:r>
+            <a:endParaRPr lang="en-US" sz="1400" dirty="0"/>
+          </a:p>
+        </p:txBody>
       </p:sp>
       <p:sp>
         <p:nvSpPr>
@@ -7169,8 +8270,8 @@
         </p:nvSpPr>
         <p:spPr>
           <a:xfrm>
-            <a:off x="822960" y="4206240"/>
-            <a:ext cx="411480" cy="411480"/>
+            <a:off x="7132320" y="4297680"/>
+            <a:ext cx="4206240" cy="502920"/>
           </a:xfrm>
           <a:prstGeom prst="rect">
             <a:avLst/>
@@ -7182,21 +8283,21 @@
           <a:bodyPr wrap="square" lIns="0" tIns="0" rIns="0" bIns="0" rtlCol="0" anchor="ctr"/>
           <a:lstStyle/>
           <a:p>
-            <a:pPr algn="ctr" indent="0" marL="0">
-              <a:buNone/>
-            </a:pPr>
-            <a:r>
-              <a:rPr lang="en-US" sz="1400" b="1" dirty="0">
-                <a:solidFill>
-                  <a:schemeClr val="bg1"/>
+            <a:pPr indent="0" marL="0">
+              <a:buNone/>
+            </a:pPr>
+            <a:r>
+              <a:rPr lang="en-US" sz="1800" b="1" dirty="0">
+                <a:solidFill>
+                  <a:schemeClr val="tx2"/>
                 </a:solidFill>
                 <a:latin typeface="Meiryo UI" pitchFamily="34" charset="0"/>
                 <a:ea typeface="Meiryo UI" pitchFamily="34" charset="-122"/>
                 <a:cs typeface="Meiryo UI" pitchFamily="34" charset="-120"/>
               </a:rPr>
-              <a:t>✓</a:t>
-            </a:r>
-            <a:endParaRPr lang="en-US" sz="1400" dirty="0"/>
+              <a:t>生成AI（Claude）の活用</a:t>
+            </a:r>
+            <a:endParaRPr lang="en-US" sz="1800" dirty="0"/>
           </a:p>
         </p:txBody>
       </p:sp>
@@ -7208,437 +8309,32 @@
         </p:nvSpPr>
         <p:spPr>
           <a:xfrm>
-            <a:off x="1371600" y="4206240"/>
-            <a:ext cx="2560320" cy="411480"/>
-          </a:xfrm>
-          <a:prstGeom prst="rect">
-            <a:avLst/>
-          </a:prstGeom>
-          <a:noFill/>
-          <a:ln/>
-        </p:spPr>
-        <p:txBody>
-          <a:bodyPr wrap="square" lIns="0" tIns="0" rIns="0" bIns="0" rtlCol="0" anchor="ctr"/>
+            <a:off x="7132320" y="4892040"/>
+            <a:ext cx="4206240" cy="960120"/>
+          </a:xfrm>
+          <a:prstGeom prst="rect">
+            <a:avLst/>
+          </a:prstGeom>
+          <a:noFill/>
+          <a:ln/>
+        </p:spPr>
+        <p:txBody>
+          <a:bodyPr wrap="square" lIns="0" tIns="0" rIns="0" bIns="0" rtlCol="0" anchor="t"/>
           <a:lstStyle/>
           <a:p>
             <a:pPr indent="0" marL="0">
               <a:buNone/>
             </a:pPr>
             <a:r>
-              <a:rPr lang="en-US" sz="1600" b="1" dirty="0">
-                <a:solidFill>
-                  <a:schemeClr val="tx2"/>
+              <a:rPr lang="en-US" sz="1400" dirty="0">
+                <a:solidFill>
+                  <a:schemeClr val="tx1"/>
                 </a:solidFill>
                 <a:latin typeface="Meiryo UI" pitchFamily="34" charset="0"/>
                 <a:ea typeface="Meiryo UI" pitchFamily="34" charset="-122"/>
                 <a:cs typeface="Meiryo UI" pitchFamily="34" charset="-120"/>
               </a:rPr>
-              <a:t>照合の見落としを防ぐ</a:t>
-            </a:r>
-            <a:endParaRPr lang="en-US" sz="1600" dirty="0"/>
-          </a:p>
-        </p:txBody>
-      </p:sp>
-      <p:sp>
-        <p:nvSpPr>
-          <p:cNvPr id="24" name="Text 22"/>
-          <p:cNvSpPr txBox="1"/>
-          <p:nvPr/>
-        </p:nvSpPr>
-        <p:spPr>
-          <a:xfrm>
-            <a:off x="822960" y="4800600"/>
-            <a:ext cx="3017520" cy="1097280"/>
-          </a:xfrm>
-          <a:prstGeom prst="rect">
-            <a:avLst/>
-          </a:prstGeom>
-          <a:noFill/>
-          <a:ln/>
-        </p:spPr>
-        <p:txBody>
-          <a:bodyPr wrap="square" lIns="0" tIns="0" rIns="0" bIns="0" rtlCol="0" anchor="t"/>
-          <a:lstStyle/>
-          <a:p>
-            <a:pPr indent="0" marL="0">
-              <a:buNone/>
-            </a:pPr>
-            <a:r>
-              <a:rPr lang="en-US" sz="1400" dirty="0">
-                <a:solidFill>
-                  <a:schemeClr val="tx1"/>
-                </a:solidFill>
-                <a:latin typeface="Meiryo UI" pitchFamily="34" charset="0"/>
-                <a:ea typeface="Meiryo UI" pitchFamily="34" charset="-122"/>
-                <a:cs typeface="Meiryo UI" pitchFamily="34" charset="-120"/>
-              </a:rPr>
-              <a:t>1件ずつ目で追う作業を、食い違いだけ確認する作業に変えた</a:t>
-            </a:r>
-            <a:endParaRPr lang="en-US" sz="1400" dirty="0"/>
-          </a:p>
-        </p:txBody>
-      </p:sp>
-      <p:sp>
-        <p:nvSpPr>
-          <p:cNvPr id="25" name="pt1"/>
-          <p:cNvSpPr/>
-          <p:nvPr/>
-        </p:nvSpPr>
-        <p:spPr>
-          <a:xfrm>
-            <a:off x="4297680" y="3977640"/>
-            <a:ext cx="3566160" cy="1737360"/>
-          </a:xfrm>
-          <a:prstGeom prst="roundRect">
-            <a:avLst>
-              <a:gd name="adj" fmla="val 6316"/>
-            </a:avLst>
-          </a:prstGeom>
-          <a:solidFill>
-            <a:schemeClr val="bg1"/>
-          </a:solidFill>
-          <a:ln/>
-        </p:spPr>
-      </p:sp>
-      <p:sp>
-        <p:nvSpPr>
-          <p:cNvPr id="26" name="Shape 24"/>
-          <p:cNvSpPr/>
-          <p:nvPr/>
-        </p:nvSpPr>
-        <p:spPr>
-          <a:xfrm>
-            <a:off x="4297680" y="3977640"/>
-            <a:ext cx="3566160" cy="1737360"/>
-          </a:xfrm>
-          <a:prstGeom prst="roundRect">
-            <a:avLst>
-              <a:gd name="adj" fmla="val 6316"/>
-            </a:avLst>
-          </a:prstGeom>
-          <a:ln w="19050">
-            <a:solidFill>
-              <a:schemeClr val="accent6"/>
-            </a:solidFill>
-            <a:prstDash val="solid"/>
-          </a:ln>
-        </p:spPr>
-      </p:sp>
-      <p:sp>
-        <p:nvSpPr>
-          <p:cNvPr id="27" name="Shape 25"/>
-          <p:cNvSpPr/>
-          <p:nvPr/>
-        </p:nvSpPr>
-        <p:spPr>
-          <a:xfrm>
-            <a:off x="4572000" y="4206240"/>
-            <a:ext cx="411480" cy="411480"/>
-          </a:xfrm>
-          <a:prstGeom prst="ellipse">
-            <a:avLst/>
-          </a:prstGeom>
-          <a:solidFill>
-            <a:schemeClr val="accent2"/>
-          </a:solidFill>
-          <a:ln/>
-        </p:spPr>
-      </p:sp>
-      <p:sp>
-        <p:nvSpPr>
-          <p:cNvPr id="28" name="Text 26"/>
-          <p:cNvSpPr txBox="1"/>
-          <p:nvPr/>
-        </p:nvSpPr>
-        <p:spPr>
-          <a:xfrm>
-            <a:off x="4572000" y="4206240"/>
-            <a:ext cx="411480" cy="411480"/>
-          </a:xfrm>
-          <a:prstGeom prst="rect">
-            <a:avLst/>
-          </a:prstGeom>
-          <a:noFill/>
-          <a:ln/>
-        </p:spPr>
-        <p:txBody>
-          <a:bodyPr wrap="square" lIns="0" tIns="0" rIns="0" bIns="0" rtlCol="0" anchor="ctr"/>
-          <a:lstStyle/>
-          <a:p>
-            <a:pPr algn="ctr" indent="0" marL="0">
-              <a:buNone/>
-            </a:pPr>
-            <a:r>
-              <a:rPr lang="en-US" sz="1400" b="1" dirty="0">
-                <a:solidFill>
-                  <a:schemeClr val="bg1"/>
-                </a:solidFill>
-                <a:latin typeface="Meiryo UI" pitchFamily="34" charset="0"/>
-                <a:ea typeface="Meiryo UI" pitchFamily="34" charset="-122"/>
-                <a:cs typeface="Meiryo UI" pitchFamily="34" charset="-120"/>
-              </a:rPr>
-              <a:t>✓</a:t>
-            </a:r>
-            <a:endParaRPr lang="en-US" sz="1400" dirty="0"/>
-          </a:p>
-        </p:txBody>
-      </p:sp>
-      <p:sp>
-        <p:nvSpPr>
-          <p:cNvPr id="29" name="Text 27"/>
-          <p:cNvSpPr txBox="1"/>
-          <p:nvPr/>
-        </p:nvSpPr>
-        <p:spPr>
-          <a:xfrm>
-            <a:off x="5120640" y="4206240"/>
-            <a:ext cx="2560320" cy="411480"/>
-          </a:xfrm>
-          <a:prstGeom prst="rect">
-            <a:avLst/>
-          </a:prstGeom>
-          <a:noFill/>
-          <a:ln/>
-        </p:spPr>
-        <p:txBody>
-          <a:bodyPr wrap="square" lIns="0" tIns="0" rIns="0" bIns="0" rtlCol="0" anchor="ctr"/>
-          <a:lstStyle/>
-          <a:p>
-            <a:pPr indent="0" marL="0">
-              <a:buNone/>
-            </a:pPr>
-            <a:r>
-              <a:rPr lang="en-US" sz="1600" b="1" dirty="0">
-                <a:solidFill>
-                  <a:schemeClr val="tx2"/>
-                </a:solidFill>
-                <a:latin typeface="Meiryo UI" pitchFamily="34" charset="0"/>
-                <a:ea typeface="Meiryo UI" pitchFamily="34" charset="-122"/>
-                <a:cs typeface="Meiryo UI" pitchFamily="34" charset="-120"/>
-              </a:rPr>
-              <a:t>情報を外に出さない</a:t>
-            </a:r>
-            <a:endParaRPr lang="en-US" sz="1600" dirty="0"/>
-          </a:p>
-        </p:txBody>
-      </p:sp>
-      <p:sp>
-        <p:nvSpPr>
-          <p:cNvPr id="30" name="Text 28"/>
-          <p:cNvSpPr txBox="1"/>
-          <p:nvPr/>
-        </p:nvSpPr>
-        <p:spPr>
-          <a:xfrm>
-            <a:off x="4572000" y="4800600"/>
-            <a:ext cx="3017520" cy="1097280"/>
-          </a:xfrm>
-          <a:prstGeom prst="rect">
-            <a:avLst/>
-          </a:prstGeom>
-          <a:noFill/>
-          <a:ln/>
-        </p:spPr>
-        <p:txBody>
-          <a:bodyPr wrap="square" lIns="0" tIns="0" rIns="0" bIns="0" rtlCol="0" anchor="t"/>
-          <a:lstStyle/>
-          <a:p>
-            <a:pPr indent="0" marL="0">
-              <a:buNone/>
-            </a:pPr>
-            <a:r>
-              <a:rPr lang="en-US" sz="1400" dirty="0">
-                <a:solidFill>
-                  <a:schemeClr val="tx1"/>
-                </a:solidFill>
-                <a:latin typeface="Meiryo UI" pitchFamily="34" charset="0"/>
-                <a:ea typeface="Meiryo UI" pitchFamily="34" charset="-122"/>
-                <a:cs typeface="Meiryo UI" pitchFamily="34" charset="-120"/>
-              </a:rPr>
-              <a:t>ブラウザの中だけで動き、請求金額などのデータを外部に送らない設計</a:t>
-            </a:r>
-            <a:endParaRPr lang="en-US" sz="1400" dirty="0"/>
-          </a:p>
-        </p:txBody>
-      </p:sp>
-      <p:sp>
-        <p:nvSpPr>
-          <p:cNvPr id="31" name="pt2"/>
-          <p:cNvSpPr/>
-          <p:nvPr/>
-        </p:nvSpPr>
-        <p:spPr>
-          <a:xfrm>
-            <a:off x="8046720" y="3977640"/>
-            <a:ext cx="3566160" cy="1737360"/>
-          </a:xfrm>
-          <a:prstGeom prst="roundRect">
-            <a:avLst>
-              <a:gd name="adj" fmla="val 6316"/>
-            </a:avLst>
-          </a:prstGeom>
-          <a:solidFill>
-            <a:schemeClr val="bg1"/>
-          </a:solidFill>
-          <a:ln/>
-        </p:spPr>
-      </p:sp>
-      <p:sp>
-        <p:nvSpPr>
-          <p:cNvPr id="32" name="Shape 30"/>
-          <p:cNvSpPr/>
-          <p:nvPr/>
-        </p:nvSpPr>
-        <p:spPr>
-          <a:xfrm>
-            <a:off x="8046720" y="3977640"/>
-            <a:ext cx="3566160" cy="1737360"/>
-          </a:xfrm>
-          <a:prstGeom prst="roundRect">
-            <a:avLst>
-              <a:gd name="adj" fmla="val 6316"/>
-            </a:avLst>
-          </a:prstGeom>
-          <a:ln w="19050">
-            <a:solidFill>
-              <a:schemeClr val="accent6"/>
-            </a:solidFill>
-            <a:prstDash val="solid"/>
-          </a:ln>
-        </p:spPr>
-      </p:sp>
-      <p:sp>
-        <p:nvSpPr>
-          <p:cNvPr id="33" name="Shape 31"/>
-          <p:cNvSpPr/>
-          <p:nvPr/>
-        </p:nvSpPr>
-        <p:spPr>
-          <a:xfrm>
-            <a:off x="8321040" y="4206240"/>
-            <a:ext cx="411480" cy="411480"/>
-          </a:xfrm>
-          <a:prstGeom prst="ellipse">
-            <a:avLst/>
-          </a:prstGeom>
-          <a:solidFill>
-            <a:schemeClr val="accent2"/>
-          </a:solidFill>
-          <a:ln/>
-        </p:spPr>
-      </p:sp>
-      <p:sp>
-        <p:nvSpPr>
-          <p:cNvPr id="34" name="Text 32"/>
-          <p:cNvSpPr txBox="1"/>
-          <p:nvPr/>
-        </p:nvSpPr>
-        <p:spPr>
-          <a:xfrm>
-            <a:off x="8321040" y="4206240"/>
-            <a:ext cx="411480" cy="411480"/>
-          </a:xfrm>
-          <a:prstGeom prst="rect">
-            <a:avLst/>
-          </a:prstGeom>
-          <a:noFill/>
-          <a:ln/>
-        </p:spPr>
-        <p:txBody>
-          <a:bodyPr wrap="square" lIns="0" tIns="0" rIns="0" bIns="0" rtlCol="0" anchor="ctr"/>
-          <a:lstStyle/>
-          <a:p>
-            <a:pPr algn="ctr" indent="0" marL="0">
-              <a:buNone/>
-            </a:pPr>
-            <a:r>
-              <a:rPr lang="en-US" sz="1400" b="1" dirty="0">
-                <a:solidFill>
-                  <a:schemeClr val="bg1"/>
-                </a:solidFill>
-                <a:latin typeface="Meiryo UI" pitchFamily="34" charset="0"/>
-                <a:ea typeface="Meiryo UI" pitchFamily="34" charset="-122"/>
-                <a:cs typeface="Meiryo UI" pitchFamily="34" charset="-120"/>
-              </a:rPr>
-              <a:t>✓</a:t>
-            </a:r>
-            <a:endParaRPr lang="en-US" sz="1400" dirty="0"/>
-          </a:p>
-        </p:txBody>
-      </p:sp>
-      <p:sp>
-        <p:nvSpPr>
-          <p:cNvPr id="35" name="Text 33"/>
-          <p:cNvSpPr txBox="1"/>
-          <p:nvPr/>
-        </p:nvSpPr>
-        <p:spPr>
-          <a:xfrm>
-            <a:off x="8869680" y="4206240"/>
-            <a:ext cx="2560320" cy="411480"/>
-          </a:xfrm>
-          <a:prstGeom prst="rect">
-            <a:avLst/>
-          </a:prstGeom>
-          <a:noFill/>
-          <a:ln/>
-        </p:spPr>
-        <p:txBody>
-          <a:bodyPr wrap="square" lIns="0" tIns="0" rIns="0" bIns="0" rtlCol="0" anchor="ctr"/>
-          <a:lstStyle/>
-          <a:p>
-            <a:pPr indent="0" marL="0">
-              <a:buNone/>
-            </a:pPr>
-            <a:r>
-              <a:rPr lang="en-US" sz="1600" b="1" dirty="0">
-                <a:solidFill>
-                  <a:schemeClr val="tx2"/>
-                </a:solidFill>
-                <a:latin typeface="Meiryo UI" pitchFamily="34" charset="0"/>
-                <a:ea typeface="Meiryo UI" pitchFamily="34" charset="-122"/>
-                <a:cs typeface="Meiryo UI" pitchFamily="34" charset="-120"/>
-              </a:rPr>
-              <a:t>毎月そのまま使える</a:t>
-            </a:r>
-            <a:endParaRPr lang="en-US" sz="1600" dirty="0"/>
-          </a:p>
-        </p:txBody>
-      </p:sp>
-      <p:sp>
-        <p:nvSpPr>
-          <p:cNvPr id="36" name="Text 34"/>
-          <p:cNvSpPr txBox="1"/>
-          <p:nvPr/>
-        </p:nvSpPr>
-        <p:spPr>
-          <a:xfrm>
-            <a:off x="8321040" y="4800600"/>
-            <a:ext cx="3017520" cy="1097280"/>
-          </a:xfrm>
-          <a:prstGeom prst="rect">
-            <a:avLst/>
-          </a:prstGeom>
-          <a:noFill/>
-          <a:ln/>
-        </p:spPr>
-        <p:txBody>
-          <a:bodyPr wrap="square" lIns="0" tIns="0" rIns="0" bIns="0" rtlCol="0" anchor="t"/>
-          <a:lstStyle/>
-          <a:p>
-            <a:pPr indent="0" marL="0">
-              <a:buNone/>
-            </a:pPr>
-            <a:r>
-              <a:rPr lang="en-US" sz="1400" dirty="0">
-                <a:solidFill>
-                  <a:schemeClr val="tx1"/>
-                </a:solidFill>
-                <a:latin typeface="Meiryo UI" pitchFamily="34" charset="0"/>
-                <a:ea typeface="Meiryo UI" pitchFamily="34" charset="-122"/>
-                <a:cs typeface="Meiryo UI" pitchFamily="34" charset="-120"/>
-              </a:rPr>
-              <a:t>対象月の自動選択など、毎月の運用手順まで整えて定着させた</a:t>
+              <a:t>ツール開発・資料作成・毎月の定型作業の手順化にAIを活用し、少人数・短期間での開発を実現</a:t>
             </a:r>
             <a:endParaRPr lang="en-US" sz="1400" dirty="0"/>
           </a:p>
@@ -7746,7 +8442,7 @@
                   <a:schemeClr val="tx2"/>
                 </a:solidFill>
               </a:rPr>
-              <a:t>まとめと今後の取り組み</a:t>
+              <a:t>請求書照合の自動化：しくみ</a:t>
             </a:r>
             <a:endParaRPr lang="en-US" sz="3000" dirty="0"/>
           </a:p>
@@ -7785,7 +8481,7 @@
                 <a:ea typeface="Meiryo UI" pitchFamily="34" charset="-122"/>
                 <a:cs typeface="Meiryo UI" pitchFamily="34" charset="-120"/>
               </a:rPr>
-              <a:t>「取引条件の改善」と「仕組みづくり」の両面で、会社の収益と業務効率に貢献しました。</a:t>
+              <a:t>毎月3つのファイルを入れてボタンを押すだけで、請求内容と契約単価・出荷実績の食い違いが分かります。</a:t>
             </a:r>
             <a:endParaRPr lang="en-US" sz="1600" dirty="0"/>
           </a:p>
@@ -7793,18 +8489,395 @@
       </p:sp>
       <p:sp>
         <p:nvSpPr>
-          <p:cNvPr id="4" name="done"/>
+          <p:cNvPr id="4" name="flow0"/>
           <p:cNvSpPr/>
           <p:nvPr/>
         </p:nvSpPr>
         <p:spPr>
           <a:xfrm>
-            <a:off x="548640" y="1783080"/>
-            <a:ext cx="5394960" cy="4343400"/>
+            <a:off x="548640" y="1828800"/>
+            <a:ext cx="2468880" cy="1737360"/>
           </a:xfrm>
           <a:prstGeom prst="roundRect">
             <a:avLst>
-              <a:gd name="adj" fmla="val 2526"/>
+              <a:gd name="adj" fmla="val 6316"/>
+            </a:avLst>
+          </a:prstGeom>
+          <a:solidFill>
+            <a:schemeClr val="bg2"/>
+          </a:solidFill>
+          <a:ln/>
+        </p:spPr>
+      </p:sp>
+      <p:sp>
+        <p:nvSpPr>
+          <p:cNvPr id="5" name="Text 3"/>
+          <p:cNvSpPr txBox="1"/>
+          <p:nvPr/>
+        </p:nvSpPr>
+        <p:spPr>
+          <a:xfrm>
+            <a:off x="731520" y="2011680"/>
+            <a:ext cx="2103120" cy="731520"/>
+          </a:xfrm>
+          <a:prstGeom prst="rect">
+            <a:avLst/>
+          </a:prstGeom>
+          <a:noFill/>
+          <a:ln/>
+        </p:spPr>
+        <p:txBody>
+          <a:bodyPr wrap="square" lIns="0" tIns="0" rIns="0" bIns="0" rtlCol="0" anchor="ctr"/>
+          <a:lstStyle/>
+          <a:p>
+            <a:pPr algn="ctr" indent="0" marL="0">
+              <a:buNone/>
+            </a:pPr>
+            <a:r>
+              <a:rPr lang="en-US" sz="1600" b="1" dirty="0">
+                <a:solidFill>
+                  <a:schemeClr val="tx2"/>
+                </a:solidFill>
+                <a:latin typeface="Meiryo UI" pitchFamily="34" charset="0"/>
+                <a:ea typeface="Meiryo UI" pitchFamily="34" charset="-122"/>
+                <a:cs typeface="Meiryo UI" pitchFamily="34" charset="-120"/>
+              </a:rPr>
+              <a:t>3ファイルを</a:t>
+            </a:r>
+            <a:endParaRPr lang="en-US" sz="1600" dirty="0"/>
+          </a:p>
+          <a:p>
+            <a:pPr algn="ctr" indent="0" marL="0">
+              <a:buNone/>
+            </a:pPr>
+            <a:r>
+              <a:rPr lang="en-US" sz="1600" b="1" dirty="0">
+                <a:solidFill>
+                  <a:schemeClr val="tx2"/>
+                </a:solidFill>
+                <a:latin typeface="Meiryo UI" pitchFamily="34" charset="0"/>
+                <a:ea typeface="Meiryo UI" pitchFamily="34" charset="-122"/>
+                <a:cs typeface="Meiryo UI" pitchFamily="34" charset="-120"/>
+              </a:rPr>
+              <a:t>まとめて投入</a:t>
+            </a:r>
+            <a:endParaRPr lang="en-US" sz="1600" dirty="0"/>
+          </a:p>
+        </p:txBody>
+      </p:sp>
+      <p:sp>
+        <p:nvSpPr>
+          <p:cNvPr id="6" name="Text 4"/>
+          <p:cNvSpPr txBox="1"/>
+          <p:nvPr/>
+        </p:nvSpPr>
+        <p:spPr>
+          <a:xfrm>
+            <a:off x="731520" y="2788920"/>
+            <a:ext cx="2103120" cy="640080"/>
+          </a:xfrm>
+          <a:prstGeom prst="rect">
+            <a:avLst/>
+          </a:prstGeom>
+          <a:noFill/>
+          <a:ln/>
+        </p:spPr>
+        <p:txBody>
+          <a:bodyPr wrap="square" lIns="0" tIns="0" rIns="0" bIns="0" rtlCol="0" anchor="t"/>
+          <a:lstStyle/>
+          <a:p>
+            <a:pPr algn="ctr" indent="0" marL="0">
+              <a:buNone/>
+            </a:pPr>
+            <a:r>
+              <a:rPr lang="en-US" sz="1200" dirty="0">
+                <a:solidFill>
+                  <a:schemeClr val="tx2"/>
+                </a:solidFill>
+                <a:latin typeface="Meiryo UI" pitchFamily="34" charset="0"/>
+                <a:ea typeface="Meiryo UI" pitchFamily="34" charset="-122"/>
+                <a:cs typeface="Meiryo UI" pitchFamily="34" charset="-120"/>
+              </a:rPr>
+              <a:t>請求書PDF・出荷データ・契約運賃表</a:t>
+            </a:r>
+            <a:endParaRPr lang="en-US" sz="1200" dirty="0"/>
+          </a:p>
+        </p:txBody>
+      </p:sp>
+      <p:sp>
+        <p:nvSpPr>
+          <p:cNvPr id="7" name="Shape 5"/>
+          <p:cNvSpPr/>
+          <p:nvPr/>
+        </p:nvSpPr>
+        <p:spPr>
+          <a:xfrm>
+            <a:off x="3099816" y="2468880"/>
+            <a:ext cx="228600" cy="457200"/>
+          </a:xfrm>
+          <a:prstGeom prst="chevron">
+            <a:avLst/>
+          </a:prstGeom>
+          <a:solidFill>
+            <a:schemeClr val="accent4"/>
+          </a:solidFill>
+          <a:ln/>
+        </p:spPr>
+      </p:sp>
+      <p:sp>
+        <p:nvSpPr>
+          <p:cNvPr id="8" name="flow1"/>
+          <p:cNvSpPr/>
+          <p:nvPr/>
+        </p:nvSpPr>
+        <p:spPr>
+          <a:xfrm>
+            <a:off x="3413455" y="1828800"/>
+            <a:ext cx="2468880" cy="1737360"/>
+          </a:xfrm>
+          <a:prstGeom prst="roundRect">
+            <a:avLst>
+              <a:gd name="adj" fmla="val 6316"/>
+            </a:avLst>
+          </a:prstGeom>
+          <a:solidFill>
+            <a:schemeClr val="accent2"/>
+          </a:solidFill>
+          <a:ln/>
+        </p:spPr>
+      </p:sp>
+      <p:sp>
+        <p:nvSpPr>
+          <p:cNvPr id="9" name="Text 7"/>
+          <p:cNvSpPr txBox="1"/>
+          <p:nvPr/>
+        </p:nvSpPr>
+        <p:spPr>
+          <a:xfrm>
+            <a:off x="3596335" y="2011680"/>
+            <a:ext cx="2103120" cy="731520"/>
+          </a:xfrm>
+          <a:prstGeom prst="rect">
+            <a:avLst/>
+          </a:prstGeom>
+          <a:noFill/>
+          <a:ln/>
+        </p:spPr>
+        <p:txBody>
+          <a:bodyPr wrap="square" lIns="0" tIns="0" rIns="0" bIns="0" rtlCol="0" anchor="ctr"/>
+          <a:lstStyle/>
+          <a:p>
+            <a:pPr algn="ctr" indent="0" marL="0">
+              <a:buNone/>
+            </a:pPr>
+            <a:r>
+              <a:rPr lang="en-US" sz="1600" b="1" dirty="0">
+                <a:solidFill>
+                  <a:schemeClr val="bg1"/>
+                </a:solidFill>
+                <a:latin typeface="Meiryo UI" pitchFamily="34" charset="0"/>
+                <a:ea typeface="Meiryo UI" pitchFamily="34" charset="-122"/>
+                <a:cs typeface="Meiryo UI" pitchFamily="34" charset="-120"/>
+              </a:rPr>
+              <a:t>自動で読み取り</a:t>
+            </a:r>
+            <a:endParaRPr lang="en-US" sz="1600" dirty="0"/>
+          </a:p>
+        </p:txBody>
+      </p:sp>
+      <p:sp>
+        <p:nvSpPr>
+          <p:cNvPr id="10" name="Text 8"/>
+          <p:cNvSpPr txBox="1"/>
+          <p:nvPr/>
+        </p:nvSpPr>
+        <p:spPr>
+          <a:xfrm>
+            <a:off x="3596335" y="2788920"/>
+            <a:ext cx="2103120" cy="640080"/>
+          </a:xfrm>
+          <a:prstGeom prst="rect">
+            <a:avLst/>
+          </a:prstGeom>
+          <a:noFill/>
+          <a:ln/>
+        </p:spPr>
+        <p:txBody>
+          <a:bodyPr wrap="square" lIns="0" tIns="0" rIns="0" bIns="0" rtlCol="0" anchor="t"/>
+          <a:lstStyle/>
+          <a:p>
+            <a:pPr algn="ctr" indent="0" marL="0">
+              <a:buNone/>
+            </a:pPr>
+            <a:r>
+              <a:rPr lang="en-US" sz="1200" dirty="0">
+                <a:solidFill>
+                  <a:schemeClr val="bg1"/>
+                </a:solidFill>
+                <a:latin typeface="Meiryo UI" pitchFamily="34" charset="0"/>
+                <a:ea typeface="Meiryo UI" pitchFamily="34" charset="-122"/>
+                <a:cs typeface="Meiryo UI" pitchFamily="34" charset="-120"/>
+              </a:rPr>
+              <a:t>画像のPDFも文字認識（OCR）で読み取る</a:t>
+            </a:r>
+            <a:endParaRPr lang="en-US" sz="1200" dirty="0"/>
+          </a:p>
+        </p:txBody>
+      </p:sp>
+      <p:sp>
+        <p:nvSpPr>
+          <p:cNvPr id="11" name="Shape 9"/>
+          <p:cNvSpPr/>
+          <p:nvPr/>
+        </p:nvSpPr>
+        <p:spPr>
+          <a:xfrm>
+            <a:off x="5964631" y="2468880"/>
+            <a:ext cx="228600" cy="457200"/>
+          </a:xfrm>
+          <a:prstGeom prst="chevron">
+            <a:avLst/>
+          </a:prstGeom>
+          <a:solidFill>
+            <a:schemeClr val="accent4"/>
+          </a:solidFill>
+          <a:ln/>
+        </p:spPr>
+      </p:sp>
+      <p:sp>
+        <p:nvSpPr>
+          <p:cNvPr id="12" name="flow2"/>
+          <p:cNvSpPr/>
+          <p:nvPr/>
+        </p:nvSpPr>
+        <p:spPr>
+          <a:xfrm>
+            <a:off x="6278270" y="1828800"/>
+            <a:ext cx="2468880" cy="1737360"/>
+          </a:xfrm>
+          <a:prstGeom prst="roundRect">
+            <a:avLst>
+              <a:gd name="adj" fmla="val 6316"/>
+            </a:avLst>
+          </a:prstGeom>
+          <a:solidFill>
+            <a:schemeClr val="accent2"/>
+          </a:solidFill>
+          <a:ln/>
+        </p:spPr>
+      </p:sp>
+      <p:sp>
+        <p:nvSpPr>
+          <p:cNvPr id="13" name="Text 11"/>
+          <p:cNvSpPr txBox="1"/>
+          <p:nvPr/>
+        </p:nvSpPr>
+        <p:spPr>
+          <a:xfrm>
+            <a:off x="6461150" y="2011680"/>
+            <a:ext cx="2103120" cy="731520"/>
+          </a:xfrm>
+          <a:prstGeom prst="rect">
+            <a:avLst/>
+          </a:prstGeom>
+          <a:noFill/>
+          <a:ln/>
+        </p:spPr>
+        <p:txBody>
+          <a:bodyPr wrap="square" lIns="0" tIns="0" rIns="0" bIns="0" rtlCol="0" anchor="ctr"/>
+          <a:lstStyle/>
+          <a:p>
+            <a:pPr algn="ctr" indent="0" marL="0">
+              <a:buNone/>
+            </a:pPr>
+            <a:r>
+              <a:rPr lang="en-US" sz="1600" b="1" dirty="0">
+                <a:solidFill>
+                  <a:schemeClr val="bg1"/>
+                </a:solidFill>
+                <a:latin typeface="Meiryo UI" pitchFamily="34" charset="0"/>
+                <a:ea typeface="Meiryo UI" pitchFamily="34" charset="-122"/>
+                <a:cs typeface="Meiryo UI" pitchFamily="34" charset="-120"/>
+              </a:rPr>
+              <a:t>自動で突き合わせ</a:t>
+            </a:r>
+            <a:endParaRPr lang="en-US" sz="1600" dirty="0"/>
+          </a:p>
+        </p:txBody>
+      </p:sp>
+      <p:sp>
+        <p:nvSpPr>
+          <p:cNvPr id="14" name="Text 12"/>
+          <p:cNvSpPr txBox="1"/>
+          <p:nvPr/>
+        </p:nvSpPr>
+        <p:spPr>
+          <a:xfrm>
+            <a:off x="6461150" y="2788920"/>
+            <a:ext cx="2103120" cy="640080"/>
+          </a:xfrm>
+          <a:prstGeom prst="rect">
+            <a:avLst/>
+          </a:prstGeom>
+          <a:noFill/>
+          <a:ln/>
+        </p:spPr>
+        <p:txBody>
+          <a:bodyPr wrap="square" lIns="0" tIns="0" rIns="0" bIns="0" rtlCol="0" anchor="t"/>
+          <a:lstStyle/>
+          <a:p>
+            <a:pPr algn="ctr" indent="0" marL="0">
+              <a:buNone/>
+            </a:pPr>
+            <a:r>
+              <a:rPr lang="en-US" sz="1200" dirty="0">
+                <a:solidFill>
+                  <a:schemeClr val="bg1"/>
+                </a:solidFill>
+                <a:latin typeface="Meiryo UI" pitchFamily="34" charset="0"/>
+                <a:ea typeface="Meiryo UI" pitchFamily="34" charset="-122"/>
+                <a:cs typeface="Meiryo UI" pitchFamily="34" charset="-120"/>
+              </a:rPr>
+              <a:t>契約単価・自社の出荷実績と照合</a:t>
+            </a:r>
+            <a:endParaRPr lang="en-US" sz="1200" dirty="0"/>
+          </a:p>
+        </p:txBody>
+      </p:sp>
+      <p:sp>
+        <p:nvSpPr>
+          <p:cNvPr id="15" name="Shape 13"/>
+          <p:cNvSpPr/>
+          <p:nvPr/>
+        </p:nvSpPr>
+        <p:spPr>
+          <a:xfrm>
+            <a:off x="8829446" y="2468880"/>
+            <a:ext cx="228600" cy="457200"/>
+          </a:xfrm>
+          <a:prstGeom prst="chevron">
+            <a:avLst/>
+          </a:prstGeom>
+          <a:solidFill>
+            <a:schemeClr val="accent4"/>
+          </a:solidFill>
+          <a:ln/>
+        </p:spPr>
+      </p:sp>
+      <p:sp>
+        <p:nvSpPr>
+          <p:cNvPr id="16" name="flow3"/>
+          <p:cNvSpPr/>
+          <p:nvPr/>
+        </p:nvSpPr>
+        <p:spPr>
+          <a:xfrm>
+            <a:off x="9143086" y="1828800"/>
+            <a:ext cx="2468880" cy="1737360"/>
+          </a:xfrm>
+          <a:prstGeom prst="roundRect">
+            <a:avLst>
+              <a:gd name="adj" fmla="val 6316"/>
             </a:avLst>
           </a:prstGeom>
           <a:solidFill>
@@ -7815,14 +8888,14 @@
       </p:sp>
       <p:sp>
         <p:nvSpPr>
-          <p:cNvPr id="5" name="Text 3"/>
+          <p:cNvPr id="17" name="Text 15"/>
           <p:cNvSpPr txBox="1"/>
           <p:nvPr/>
         </p:nvSpPr>
         <p:spPr>
           <a:xfrm>
-            <a:off x="868680" y="2011680"/>
-            <a:ext cx="4754880" cy="457200"/>
+            <a:off x="9325966" y="2011680"/>
+            <a:ext cx="2103120" cy="731520"/>
           </a:xfrm>
           <a:prstGeom prst="rect">
             <a:avLst/>
@@ -7834,11 +8907,11 @@
           <a:bodyPr wrap="square" lIns="0" tIns="0" rIns="0" bIns="0" rtlCol="0" anchor="ctr"/>
           <a:lstStyle/>
           <a:p>
-            <a:pPr indent="0" marL="0">
-              <a:buNone/>
-            </a:pPr>
-            <a:r>
-              <a:rPr lang="en-US" sz="1800" b="1" dirty="0">
+            <a:pPr algn="ctr" indent="0" marL="0">
+              <a:buNone/>
+            </a:pPr>
+            <a:r>
+              <a:rPr lang="en-US" sz="1600" b="1" dirty="0">
                 <a:solidFill>
                   <a:schemeClr val="bg1"/>
                 </a:solidFill>
@@ -7846,22 +8919,22 @@
                 <a:ea typeface="Meiryo UI" pitchFamily="34" charset="-122"/>
                 <a:cs typeface="Meiryo UI" pitchFamily="34" charset="-120"/>
               </a:rPr>
-              <a:t>この1年間の成果</a:t>
-            </a:r>
-            <a:endParaRPr lang="en-US" sz="1800" dirty="0"/>
-          </a:p>
-        </p:txBody>
-      </p:sp>
-      <p:sp>
-        <p:nvSpPr>
-          <p:cNvPr id="6" name="Text 4"/>
+              <a:t>「要確認」を一覧化</a:t>
+            </a:r>
+            <a:endParaRPr lang="en-US" sz="1600" dirty="0"/>
+          </a:p>
+        </p:txBody>
+      </p:sp>
+      <p:sp>
+        <p:nvSpPr>
+          <p:cNvPr id="18" name="Text 16"/>
           <p:cNvSpPr txBox="1"/>
           <p:nvPr/>
         </p:nvSpPr>
         <p:spPr>
           <a:xfrm>
-            <a:off x="868680" y="2606040"/>
-            <a:ext cx="4846320" cy="3383280"/>
+            <a:off x="9325966" y="2788920"/>
+            <a:ext cx="2103120" cy="640080"/>
           </a:xfrm>
           <a:prstGeom prst="rect">
             <a:avLst/>
@@ -7873,15 +8946,11 @@
           <a:bodyPr wrap="square" lIns="0" tIns="0" rIns="0" bIns="0" rtlCol="0" anchor="t"/>
           <a:lstStyle/>
           <a:p>
-            <a:pPr marL="342900" indent="-342900">
-              <a:spcAft>
-                <a:spcPts val="800"/>
-              </a:spcAft>
-              <a:buSzPct val="100000"/>
-              <a:buChar char="•"/>
-            </a:pPr>
-            <a:r>
-              <a:rPr lang="en-US" sz="1600" dirty="0">
+            <a:pPr algn="ctr" indent="0" marL="0">
+              <a:buNone/>
+            </a:pPr>
+            <a:r>
+              <a:rPr lang="en-US" sz="1200" dirty="0">
                 <a:solidFill>
                   <a:schemeClr val="bg1"/>
                 </a:solidFill>
@@ -7889,20 +8958,104 @@
                 <a:ea typeface="Meiryo UI" pitchFamily="34" charset="-122"/>
                 <a:cs typeface="Meiryo UI" pitchFamily="34" charset="-120"/>
               </a:rPr>
-              <a:t>新規開拓でC級パレットを処分から買取へ（29円/kg改善）</a:t>
-            </a:r>
-            <a:endParaRPr lang="en-US" sz="1600" dirty="0"/>
-          </a:p>
-          <a:p>
-            <a:pPr marL="342900" indent="-342900">
-              <a:spcAft>
-                <a:spcPts val="800"/>
-              </a:spcAft>
-              <a:buSzPct val="100000"/>
-              <a:buChar char="•"/>
-            </a:pPr>
-            <a:r>
-              <a:rPr lang="en-US" sz="1600" dirty="0">
+              <a:t>運送会社への確認材料に。CSVで記録</a:t>
+            </a:r>
+            <a:endParaRPr lang="en-US" sz="1200" dirty="0"/>
+          </a:p>
+        </p:txBody>
+      </p:sp>
+      <p:sp>
+        <p:nvSpPr>
+          <p:cNvPr id="19" name="pt0"/>
+          <p:cNvSpPr/>
+          <p:nvPr/>
+        </p:nvSpPr>
+        <p:spPr>
+          <a:xfrm>
+            <a:off x="548640" y="3977640"/>
+            <a:ext cx="3566160" cy="1737360"/>
+          </a:xfrm>
+          <a:prstGeom prst="roundRect">
+            <a:avLst>
+              <a:gd name="adj" fmla="val 6316"/>
+            </a:avLst>
+          </a:prstGeom>
+          <a:solidFill>
+            <a:schemeClr val="bg1"/>
+          </a:solidFill>
+          <a:ln/>
+        </p:spPr>
+      </p:sp>
+      <p:sp>
+        <p:nvSpPr>
+          <p:cNvPr id="20" name="Shape 18"/>
+          <p:cNvSpPr/>
+          <p:nvPr/>
+        </p:nvSpPr>
+        <p:spPr>
+          <a:xfrm>
+            <a:off x="548640" y="3977640"/>
+            <a:ext cx="3566160" cy="1737360"/>
+          </a:xfrm>
+          <a:prstGeom prst="roundRect">
+            <a:avLst>
+              <a:gd name="adj" fmla="val 6316"/>
+            </a:avLst>
+          </a:prstGeom>
+          <a:ln w="19050">
+            <a:solidFill>
+              <a:schemeClr val="accent6"/>
+            </a:solidFill>
+            <a:prstDash val="solid"/>
+          </a:ln>
+        </p:spPr>
+      </p:sp>
+      <p:sp>
+        <p:nvSpPr>
+          <p:cNvPr id="21" name="Shape 19"/>
+          <p:cNvSpPr/>
+          <p:nvPr/>
+        </p:nvSpPr>
+        <p:spPr>
+          <a:xfrm>
+            <a:off x="822960" y="4206240"/>
+            <a:ext cx="411480" cy="411480"/>
+          </a:xfrm>
+          <a:prstGeom prst="ellipse">
+            <a:avLst/>
+          </a:prstGeom>
+          <a:solidFill>
+            <a:schemeClr val="accent2"/>
+          </a:solidFill>
+          <a:ln/>
+        </p:spPr>
+      </p:sp>
+      <p:sp>
+        <p:nvSpPr>
+          <p:cNvPr id="22" name="Text 20"/>
+          <p:cNvSpPr txBox="1"/>
+          <p:nvPr/>
+        </p:nvSpPr>
+        <p:spPr>
+          <a:xfrm>
+            <a:off x="822960" y="4206240"/>
+            <a:ext cx="411480" cy="411480"/>
+          </a:xfrm>
+          <a:prstGeom prst="rect">
+            <a:avLst/>
+          </a:prstGeom>
+          <a:noFill/>
+          <a:ln/>
+        </p:spPr>
+        <p:txBody>
+          <a:bodyPr wrap="square" lIns="0" tIns="0" rIns="0" bIns="0" rtlCol="0" anchor="ctr"/>
+          <a:lstStyle/>
+          <a:p>
+            <a:pPr algn="ctr" indent="0" marL="0">
+              <a:buNone/>
+            </a:pPr>
+            <a:r>
+              <a:rPr lang="en-US" sz="1400" b="1" dirty="0">
                 <a:solidFill>
                   <a:schemeClr val="bg1"/>
                 </a:solidFill>
@@ -7910,62 +9063,182 @@
                 <a:ea typeface="Meiryo UI" pitchFamily="34" charset="-122"/>
                 <a:cs typeface="Meiryo UI" pitchFamily="34" charset="-120"/>
               </a:rPr>
-              <a:t>減容品の販売単価を7円→10円/kgに値上げ</a:t>
-            </a:r>
-            <a:endParaRPr lang="en-US" sz="1600" dirty="0"/>
-          </a:p>
-          <a:p>
-            <a:pPr marL="342900" indent="-342900">
-              <a:spcAft>
-                <a:spcPts val="800"/>
-              </a:spcAft>
-              <a:buSzPct val="100000"/>
-              <a:buChar char="•"/>
-            </a:pPr>
-            <a:r>
-              <a:rPr lang="en-US" sz="1600" dirty="0">
-                <a:solidFill>
-                  <a:schemeClr val="bg1"/>
+              <a:t>✓</a:t>
+            </a:r>
+            <a:endParaRPr lang="en-US" sz="1400" dirty="0"/>
+          </a:p>
+        </p:txBody>
+      </p:sp>
+      <p:sp>
+        <p:nvSpPr>
+          <p:cNvPr id="23" name="Text 21"/>
+          <p:cNvSpPr txBox="1"/>
+          <p:nvPr/>
+        </p:nvSpPr>
+        <p:spPr>
+          <a:xfrm>
+            <a:off x="1371600" y="4206240"/>
+            <a:ext cx="2560320" cy="411480"/>
+          </a:xfrm>
+          <a:prstGeom prst="rect">
+            <a:avLst/>
+          </a:prstGeom>
+          <a:noFill/>
+          <a:ln/>
+        </p:spPr>
+        <p:txBody>
+          <a:bodyPr wrap="square" lIns="0" tIns="0" rIns="0" bIns="0" rtlCol="0" anchor="ctr"/>
+          <a:lstStyle/>
+          <a:p>
+            <a:pPr indent="0" marL="0">
+              <a:buNone/>
+            </a:pPr>
+            <a:r>
+              <a:rPr lang="en-US" sz="1600" b="1" dirty="0">
+                <a:solidFill>
+                  <a:schemeClr val="tx2"/>
                 </a:solidFill>
                 <a:latin typeface="Meiryo UI" pitchFamily="34" charset="0"/>
                 <a:ea typeface="Meiryo UI" pitchFamily="34" charset="-122"/>
                 <a:cs typeface="Meiryo UI" pitchFamily="34" charset="-120"/>
               </a:rPr>
-              <a:t>処分費を24円→23円/kgに値下げ</a:t>
+              <a:t>照合の見落としを防ぐ</a:t>
             </a:r>
             <a:endParaRPr lang="en-US" sz="1600" dirty="0"/>
           </a:p>
-          <a:p>
-            <a:pPr marL="342900" indent="-342900">
-              <a:spcAft>
-                <a:spcPts val="800"/>
-              </a:spcAft>
-              <a:buSzPct val="100000"/>
-              <a:buChar char="•"/>
-            </a:pPr>
-            <a:r>
-              <a:rPr lang="en-US" sz="1600" dirty="0">
-                <a:solidFill>
-                  <a:schemeClr val="bg1"/>
+        </p:txBody>
+      </p:sp>
+      <p:sp>
+        <p:nvSpPr>
+          <p:cNvPr id="24" name="Text 22"/>
+          <p:cNvSpPr txBox="1"/>
+          <p:nvPr/>
+        </p:nvSpPr>
+        <p:spPr>
+          <a:xfrm>
+            <a:off x="822960" y="4800600"/>
+            <a:ext cx="3017520" cy="1097280"/>
+          </a:xfrm>
+          <a:prstGeom prst="rect">
+            <a:avLst/>
+          </a:prstGeom>
+          <a:noFill/>
+          <a:ln/>
+        </p:spPr>
+        <p:txBody>
+          <a:bodyPr wrap="square" lIns="0" tIns="0" rIns="0" bIns="0" rtlCol="0" anchor="t"/>
+          <a:lstStyle/>
+          <a:p>
+            <a:pPr indent="0" marL="0">
+              <a:buNone/>
+            </a:pPr>
+            <a:r>
+              <a:rPr lang="en-US" sz="1400" dirty="0">
+                <a:solidFill>
+                  <a:schemeClr val="tx1"/>
                 </a:solidFill>
                 <a:latin typeface="Meiryo UI" pitchFamily="34" charset="0"/>
                 <a:ea typeface="Meiryo UI" pitchFamily="34" charset="-122"/>
                 <a:cs typeface="Meiryo UI" pitchFamily="34" charset="-120"/>
               </a:rPr>
-              <a:t>太平洋セメントの受け入れ量を大幅に拡大</a:t>
-            </a:r>
-            <a:endParaRPr lang="en-US" sz="1600" dirty="0"/>
-          </a:p>
-          <a:p>
-            <a:pPr marL="342900" indent="-342900">
-              <a:spcAft>
-                <a:spcPts val="800"/>
-              </a:spcAft>
-              <a:buSzPct val="100000"/>
-              <a:buChar char="•"/>
-            </a:pPr>
-            <a:r>
-              <a:rPr lang="en-US" sz="1600" dirty="0">
+              <a:t>1件ずつ目で追う作業を、食い違いだけ確認する作業に変えた</a:t>
+            </a:r>
+            <a:endParaRPr lang="en-US" sz="1400" dirty="0"/>
+          </a:p>
+        </p:txBody>
+      </p:sp>
+      <p:sp>
+        <p:nvSpPr>
+          <p:cNvPr id="25" name="pt1"/>
+          <p:cNvSpPr/>
+          <p:nvPr/>
+        </p:nvSpPr>
+        <p:spPr>
+          <a:xfrm>
+            <a:off x="4297680" y="3977640"/>
+            <a:ext cx="3566160" cy="1737360"/>
+          </a:xfrm>
+          <a:prstGeom prst="roundRect">
+            <a:avLst>
+              <a:gd name="adj" fmla="val 6316"/>
+            </a:avLst>
+          </a:prstGeom>
+          <a:solidFill>
+            <a:schemeClr val="bg1"/>
+          </a:solidFill>
+          <a:ln/>
+        </p:spPr>
+      </p:sp>
+      <p:sp>
+        <p:nvSpPr>
+          <p:cNvPr id="26" name="Shape 24"/>
+          <p:cNvSpPr/>
+          <p:nvPr/>
+        </p:nvSpPr>
+        <p:spPr>
+          <a:xfrm>
+            <a:off x="4297680" y="3977640"/>
+            <a:ext cx="3566160" cy="1737360"/>
+          </a:xfrm>
+          <a:prstGeom prst="roundRect">
+            <a:avLst>
+              <a:gd name="adj" fmla="val 6316"/>
+            </a:avLst>
+          </a:prstGeom>
+          <a:ln w="19050">
+            <a:solidFill>
+              <a:schemeClr val="accent6"/>
+            </a:solidFill>
+            <a:prstDash val="solid"/>
+          </a:ln>
+        </p:spPr>
+      </p:sp>
+      <p:sp>
+        <p:nvSpPr>
+          <p:cNvPr id="27" name="Shape 25"/>
+          <p:cNvSpPr/>
+          <p:nvPr/>
+        </p:nvSpPr>
+        <p:spPr>
+          <a:xfrm>
+            <a:off x="4572000" y="4206240"/>
+            <a:ext cx="411480" cy="411480"/>
+          </a:xfrm>
+          <a:prstGeom prst="ellipse">
+            <a:avLst/>
+          </a:prstGeom>
+          <a:solidFill>
+            <a:schemeClr val="accent2"/>
+          </a:solidFill>
+          <a:ln/>
+        </p:spPr>
+      </p:sp>
+      <p:sp>
+        <p:nvSpPr>
+          <p:cNvPr id="28" name="Text 26"/>
+          <p:cNvSpPr txBox="1"/>
+          <p:nvPr/>
+        </p:nvSpPr>
+        <p:spPr>
+          <a:xfrm>
+            <a:off x="4572000" y="4206240"/>
+            <a:ext cx="411480" cy="411480"/>
+          </a:xfrm>
+          <a:prstGeom prst="rect">
+            <a:avLst/>
+          </a:prstGeom>
+          <a:noFill/>
+          <a:ln/>
+        </p:spPr>
+        <p:txBody>
+          <a:bodyPr wrap="square" lIns="0" tIns="0" rIns="0" bIns="0" rtlCol="0" anchor="ctr"/>
+          <a:lstStyle/>
+          <a:p>
+            <a:pPr algn="ctr" indent="0" marL="0">
+              <a:buNone/>
+            </a:pPr>
+            <a:r>
+              <a:rPr lang="en-US" sz="1400" b="1" dirty="0">
                 <a:solidFill>
                   <a:schemeClr val="bg1"/>
                 </a:solidFill>
@@ -7973,28 +9246,46 @@
                 <a:ea typeface="Meiryo UI" pitchFamily="34" charset="-122"/>
                 <a:cs typeface="Meiryo UI" pitchFamily="34" charset="-120"/>
               </a:rPr>
-              <a:t>請求書照合の自動化、2つのビューワーを作成</a:t>
-            </a:r>
-            <a:endParaRPr lang="en-US" sz="1600" dirty="0"/>
-          </a:p>
-          <a:p>
-            <a:pPr marL="342900" indent="-342900">
-              <a:spcAft>
-                <a:spcPts val="800"/>
-              </a:spcAft>
-              <a:buSzPct val="100000"/>
-              <a:buChar char="•"/>
-            </a:pPr>
-            <a:r>
-              <a:rPr lang="en-US" sz="1600" dirty="0">
-                <a:solidFill>
-                  <a:schemeClr val="bg1"/>
+              <a:t>✓</a:t>
+            </a:r>
+            <a:endParaRPr lang="en-US" sz="1400" dirty="0"/>
+          </a:p>
+        </p:txBody>
+      </p:sp>
+      <p:sp>
+        <p:nvSpPr>
+          <p:cNvPr id="29" name="Text 27"/>
+          <p:cNvSpPr txBox="1"/>
+          <p:nvPr/>
+        </p:nvSpPr>
+        <p:spPr>
+          <a:xfrm>
+            <a:off x="5120640" y="4206240"/>
+            <a:ext cx="2560320" cy="411480"/>
+          </a:xfrm>
+          <a:prstGeom prst="rect">
+            <a:avLst/>
+          </a:prstGeom>
+          <a:noFill/>
+          <a:ln/>
+        </p:spPr>
+        <p:txBody>
+          <a:bodyPr wrap="square" lIns="0" tIns="0" rIns="0" bIns="0" rtlCol="0" anchor="ctr"/>
+          <a:lstStyle/>
+          <a:p>
+            <a:pPr indent="0" marL="0">
+              <a:buNone/>
+            </a:pPr>
+            <a:r>
+              <a:rPr lang="en-US" sz="1600" b="1" dirty="0">
+                <a:solidFill>
+                  <a:schemeClr val="tx2"/>
                 </a:solidFill>
                 <a:latin typeface="Meiryo UI" pitchFamily="34" charset="0"/>
                 <a:ea typeface="Meiryo UI" pitchFamily="34" charset="-122"/>
                 <a:cs typeface="Meiryo UI" pitchFamily="34" charset="-120"/>
               </a:rPr>
-              <a:t>生成AIを業務に取り入れ、開発を短期間で実現</a:t>
+              <a:t>情報を外に出さない</a:t>
             </a:r>
             <a:endParaRPr lang="en-US" sz="1600" dirty="0"/>
           </a:p>
@@ -8002,53 +9293,99 @@
       </p:sp>
       <p:sp>
         <p:nvSpPr>
-          <p:cNvPr id="7" name="Text 5"/>
+          <p:cNvPr id="30" name="Text 28"/>
           <p:cNvSpPr txBox="1"/>
           <p:nvPr/>
         </p:nvSpPr>
         <p:spPr>
           <a:xfrm>
-            <a:off x="6309360" y="1828800"/>
-            <a:ext cx="5303520" cy="457200"/>
-          </a:xfrm>
-          <a:prstGeom prst="rect">
-            <a:avLst/>
-          </a:prstGeom>
-          <a:noFill/>
-          <a:ln/>
-        </p:spPr>
-        <p:txBody>
-          <a:bodyPr wrap="square" lIns="0" tIns="0" rIns="0" bIns="0" rtlCol="0" anchor="ctr"/>
+            <a:off x="4572000" y="4800600"/>
+            <a:ext cx="3017520" cy="1097280"/>
+          </a:xfrm>
+          <a:prstGeom prst="rect">
+            <a:avLst/>
+          </a:prstGeom>
+          <a:noFill/>
+          <a:ln/>
+        </p:spPr>
+        <p:txBody>
+          <a:bodyPr wrap="square" lIns="0" tIns="0" rIns="0" bIns="0" rtlCol="0" anchor="t"/>
           <a:lstStyle/>
           <a:p>
             <a:pPr indent="0" marL="0">
               <a:buNone/>
             </a:pPr>
             <a:r>
-              <a:rPr lang="en-US" sz="1800" b="1" dirty="0">
-                <a:solidFill>
-                  <a:schemeClr val="tx2"/>
+              <a:rPr lang="en-US" sz="1400" dirty="0">
+                <a:solidFill>
+                  <a:schemeClr val="tx1"/>
                 </a:solidFill>
                 <a:latin typeface="Meiryo UI" pitchFamily="34" charset="0"/>
                 <a:ea typeface="Meiryo UI" pitchFamily="34" charset="-122"/>
                 <a:cs typeface="Meiryo UI" pitchFamily="34" charset="-120"/>
               </a:rPr>
-              <a:t>今後の取り組み</a:t>
-            </a:r>
-            <a:endParaRPr lang="en-US" sz="1800" dirty="0"/>
-          </a:p>
-        </p:txBody>
-      </p:sp>
-      <p:sp>
-        <p:nvSpPr>
-          <p:cNvPr id="8" name="Shape 6"/>
+              <a:t>ブラウザの中だけで動き、請求金額などのデータを外部に送らない設計</a:t>
+            </a:r>
+            <a:endParaRPr lang="en-US" sz="1400" dirty="0"/>
+          </a:p>
+        </p:txBody>
+      </p:sp>
+      <p:sp>
+        <p:nvSpPr>
+          <p:cNvPr id="31" name="pt2"/>
           <p:cNvSpPr/>
           <p:nvPr/>
         </p:nvSpPr>
         <p:spPr>
           <a:xfrm>
-            <a:off x="6309360" y="2468880"/>
-            <a:ext cx="457200" cy="457200"/>
+            <a:off x="8046720" y="3977640"/>
+            <a:ext cx="3566160" cy="1737360"/>
+          </a:xfrm>
+          <a:prstGeom prst="roundRect">
+            <a:avLst>
+              <a:gd name="adj" fmla="val 6316"/>
+            </a:avLst>
+          </a:prstGeom>
+          <a:solidFill>
+            <a:schemeClr val="bg1"/>
+          </a:solidFill>
+          <a:ln/>
+        </p:spPr>
+      </p:sp>
+      <p:sp>
+        <p:nvSpPr>
+          <p:cNvPr id="32" name="Shape 30"/>
+          <p:cNvSpPr/>
+          <p:nvPr/>
+        </p:nvSpPr>
+        <p:spPr>
+          <a:xfrm>
+            <a:off x="8046720" y="3977640"/>
+            <a:ext cx="3566160" cy="1737360"/>
+          </a:xfrm>
+          <a:prstGeom prst="roundRect">
+            <a:avLst>
+              <a:gd name="adj" fmla="val 6316"/>
+            </a:avLst>
+          </a:prstGeom>
+          <a:ln w="19050">
+            <a:solidFill>
+              <a:schemeClr val="accent6"/>
+            </a:solidFill>
+            <a:prstDash val="solid"/>
+          </a:ln>
+        </p:spPr>
+      </p:sp>
+      <p:sp>
+        <p:nvSpPr>
+          <p:cNvPr id="33" name="Shape 31"/>
+          <p:cNvSpPr/>
+          <p:nvPr/>
+        </p:nvSpPr>
+        <p:spPr>
+          <a:xfrm>
+            <a:off x="8321040" y="4206240"/>
+            <a:ext cx="411480" cy="411480"/>
           </a:xfrm>
           <a:prstGeom prst="ellipse">
             <a:avLst/>
@@ -8061,14 +9398,14 @@
       </p:sp>
       <p:sp>
         <p:nvSpPr>
-          <p:cNvPr id="9" name="Text 7"/>
+          <p:cNvPr id="34" name="Text 32"/>
           <p:cNvSpPr txBox="1"/>
           <p:nvPr/>
         </p:nvSpPr>
         <p:spPr>
           <a:xfrm>
-            <a:off x="6309360" y="2468880"/>
-            <a:ext cx="457200" cy="457200"/>
+            <a:off x="8321040" y="4206240"/>
+            <a:ext cx="411480" cy="411480"/>
           </a:xfrm>
           <a:prstGeom prst="rect">
             <a:avLst/>
@@ -8092,7 +9429,7 @@
                 <a:ea typeface="Meiryo UI" pitchFamily="34" charset="-122"/>
                 <a:cs typeface="Meiryo UI" pitchFamily="34" charset="-120"/>
               </a:rPr>
-              <a:t>1</a:t>
+              <a:t>✓</a:t>
             </a:r>
             <a:endParaRPr lang="en-US" sz="1400" dirty="0"/>
           </a:p>
@@ -8100,14 +9437,14 @@
       </p:sp>
       <p:sp>
         <p:nvSpPr>
-          <p:cNvPr id="10" name="Text 8"/>
+          <p:cNvPr id="35" name="Text 33"/>
           <p:cNvSpPr txBox="1"/>
           <p:nvPr/>
         </p:nvSpPr>
         <p:spPr>
           <a:xfrm>
-            <a:off x="6949440" y="2423160"/>
-            <a:ext cx="4663440" cy="411480"/>
+            <a:off x="8869680" y="4206240"/>
+            <a:ext cx="2560320" cy="411480"/>
           </a:xfrm>
           <a:prstGeom prst="rect">
             <a:avLst/>
@@ -8131,7 +9468,7 @@
                 <a:ea typeface="Meiryo UI" pitchFamily="34" charset="-122"/>
                 <a:cs typeface="Meiryo UI" pitchFamily="34" charset="-120"/>
               </a:rPr>
-              <a:t>効果額の見える化</a:t>
+              <a:t>毎月そのまま使える</a:t>
             </a:r>
             <a:endParaRPr lang="en-US" sz="1600" dirty="0"/>
           </a:p>
@@ -8139,14 +9476,14 @@
       </p:sp>
       <p:sp>
         <p:nvSpPr>
-          <p:cNvPr id="11" name="Text 9"/>
+          <p:cNvPr id="36" name="Text 34"/>
           <p:cNvSpPr txBox="1"/>
           <p:nvPr/>
         </p:nvSpPr>
         <p:spPr>
           <a:xfrm>
-            <a:off x="6949440" y="2880360"/>
-            <a:ext cx="4663440" cy="640080"/>
+            <a:off x="8321040" y="4800600"/>
+            <a:ext cx="3017520" cy="1097280"/>
           </a:xfrm>
           <a:prstGeom prst="rect">
             <a:avLst/>
@@ -8170,281 +9507,7 @@
                 <a:ea typeface="Meiryo UI" pitchFamily="34" charset="-122"/>
                 <a:cs typeface="Meiryo UI" pitchFamily="34" charset="-120"/>
               </a:rPr>
-              <a:t>取り扱い量をもとに年間の効果額を集計し、毎月追えるようにする</a:t>
-            </a:r>
-            <a:endParaRPr lang="en-US" sz="1400" dirty="0"/>
-          </a:p>
-        </p:txBody>
-      </p:sp>
-      <p:sp>
-        <p:nvSpPr>
-          <p:cNvPr id="12" name="Shape 10"/>
-          <p:cNvSpPr/>
-          <p:nvPr/>
-        </p:nvSpPr>
-        <p:spPr>
-          <a:xfrm>
-            <a:off x="6309360" y="3703320"/>
-            <a:ext cx="457200" cy="457200"/>
-          </a:xfrm>
-          <a:prstGeom prst="ellipse">
-            <a:avLst/>
-          </a:prstGeom>
-          <a:solidFill>
-            <a:schemeClr val="accent2"/>
-          </a:solidFill>
-          <a:ln/>
-        </p:spPr>
-      </p:sp>
-      <p:sp>
-        <p:nvSpPr>
-          <p:cNvPr id="13" name="Text 11"/>
-          <p:cNvSpPr txBox="1"/>
-          <p:nvPr/>
-        </p:nvSpPr>
-        <p:spPr>
-          <a:xfrm>
-            <a:off x="6309360" y="3703320"/>
-            <a:ext cx="457200" cy="457200"/>
-          </a:xfrm>
-          <a:prstGeom prst="rect">
-            <a:avLst/>
-          </a:prstGeom>
-          <a:noFill/>
-          <a:ln/>
-        </p:spPr>
-        <p:txBody>
-          <a:bodyPr wrap="square" lIns="0" tIns="0" rIns="0" bIns="0" rtlCol="0" anchor="ctr"/>
-          <a:lstStyle/>
-          <a:p>
-            <a:pPr algn="ctr" indent="0" marL="0">
-              <a:buNone/>
-            </a:pPr>
-            <a:r>
-              <a:rPr lang="en-US" sz="1400" b="1" dirty="0">
-                <a:solidFill>
-                  <a:schemeClr val="bg1"/>
-                </a:solidFill>
-                <a:latin typeface="Meiryo UI" pitchFamily="34" charset="0"/>
-                <a:ea typeface="Meiryo UI" pitchFamily="34" charset="-122"/>
-                <a:cs typeface="Meiryo UI" pitchFamily="34" charset="-120"/>
-              </a:rPr>
-              <a:t>2</a:t>
-            </a:r>
-            <a:endParaRPr lang="en-US" sz="1400" dirty="0"/>
-          </a:p>
-        </p:txBody>
-      </p:sp>
-      <p:sp>
-        <p:nvSpPr>
-          <p:cNvPr id="14" name="Text 12"/>
-          <p:cNvSpPr txBox="1"/>
-          <p:nvPr/>
-        </p:nvSpPr>
-        <p:spPr>
-          <a:xfrm>
-            <a:off x="6949440" y="3657600"/>
-            <a:ext cx="4663440" cy="411480"/>
-          </a:xfrm>
-          <a:prstGeom prst="rect">
-            <a:avLst/>
-          </a:prstGeom>
-          <a:noFill/>
-          <a:ln/>
-        </p:spPr>
-        <p:txBody>
-          <a:bodyPr wrap="square" lIns="0" tIns="0" rIns="0" bIns="0" rtlCol="0" anchor="ctr"/>
-          <a:lstStyle/>
-          <a:p>
-            <a:pPr indent="0" marL="0">
-              <a:buNone/>
-            </a:pPr>
-            <a:r>
-              <a:rPr lang="en-US" sz="1600" b="1" dirty="0">
-                <a:solidFill>
-                  <a:schemeClr val="tx2"/>
-                </a:solidFill>
-                <a:latin typeface="Meiryo UI" pitchFamily="34" charset="0"/>
-                <a:ea typeface="Meiryo UI" pitchFamily="34" charset="-122"/>
-                <a:cs typeface="Meiryo UI" pitchFamily="34" charset="-120"/>
-              </a:rPr>
-              <a:t>ツールの定着と展開</a:t>
-            </a:r>
-            <a:endParaRPr lang="en-US" sz="1600" dirty="0"/>
-          </a:p>
-        </p:txBody>
-      </p:sp>
-      <p:sp>
-        <p:nvSpPr>
-          <p:cNvPr id="15" name="Text 13"/>
-          <p:cNvSpPr txBox="1"/>
-          <p:nvPr/>
-        </p:nvSpPr>
-        <p:spPr>
-          <a:xfrm>
-            <a:off x="6949440" y="4114800"/>
-            <a:ext cx="4663440" cy="640080"/>
-          </a:xfrm>
-          <a:prstGeom prst="rect">
-            <a:avLst/>
-          </a:prstGeom>
-          <a:noFill/>
-          <a:ln/>
-        </p:spPr>
-        <p:txBody>
-          <a:bodyPr wrap="square" lIns="0" tIns="0" rIns="0" bIns="0" rtlCol="0" anchor="t"/>
-          <a:lstStyle/>
-          <a:p>
-            <a:pPr indent="0" marL="0">
-              <a:buNone/>
-            </a:pPr>
-            <a:r>
-              <a:rPr lang="en-US" sz="1400" dirty="0">
-                <a:solidFill>
-                  <a:schemeClr val="tx1"/>
-                </a:solidFill>
-                <a:latin typeface="Meiryo UI" pitchFamily="34" charset="0"/>
-                <a:ea typeface="Meiryo UI" pitchFamily="34" charset="-122"/>
-                <a:cs typeface="Meiryo UI" pitchFamily="34" charset="-120"/>
-              </a:rPr>
-              <a:t>照合ツール・ビューワーを他の運送会社や他の業務にも広げる</a:t>
-            </a:r>
-            <a:endParaRPr lang="en-US" sz="1400" dirty="0"/>
-          </a:p>
-        </p:txBody>
-      </p:sp>
-      <p:sp>
-        <p:nvSpPr>
-          <p:cNvPr id="16" name="Shape 14"/>
-          <p:cNvSpPr/>
-          <p:nvPr/>
-        </p:nvSpPr>
-        <p:spPr>
-          <a:xfrm>
-            <a:off x="6309360" y="4937760"/>
-            <a:ext cx="457200" cy="457200"/>
-          </a:xfrm>
-          <a:prstGeom prst="ellipse">
-            <a:avLst/>
-          </a:prstGeom>
-          <a:solidFill>
-            <a:schemeClr val="accent2"/>
-          </a:solidFill>
-          <a:ln/>
-        </p:spPr>
-      </p:sp>
-      <p:sp>
-        <p:nvSpPr>
-          <p:cNvPr id="17" name="Text 15"/>
-          <p:cNvSpPr txBox="1"/>
-          <p:nvPr/>
-        </p:nvSpPr>
-        <p:spPr>
-          <a:xfrm>
-            <a:off x="6309360" y="4937760"/>
-            <a:ext cx="457200" cy="457200"/>
-          </a:xfrm>
-          <a:prstGeom prst="rect">
-            <a:avLst/>
-          </a:prstGeom>
-          <a:noFill/>
-          <a:ln/>
-        </p:spPr>
-        <p:txBody>
-          <a:bodyPr wrap="square" lIns="0" tIns="0" rIns="0" bIns="0" rtlCol="0" anchor="ctr"/>
-          <a:lstStyle/>
-          <a:p>
-            <a:pPr algn="ctr" indent="0" marL="0">
-              <a:buNone/>
-            </a:pPr>
-            <a:r>
-              <a:rPr lang="en-US" sz="1400" b="1" dirty="0">
-                <a:solidFill>
-                  <a:schemeClr val="bg1"/>
-                </a:solidFill>
-                <a:latin typeface="Meiryo UI" pitchFamily="34" charset="0"/>
-                <a:ea typeface="Meiryo UI" pitchFamily="34" charset="-122"/>
-                <a:cs typeface="Meiryo UI" pitchFamily="34" charset="-120"/>
-              </a:rPr>
-              <a:t>3</a:t>
-            </a:r>
-            <a:endParaRPr lang="en-US" sz="1400" dirty="0"/>
-          </a:p>
-        </p:txBody>
-      </p:sp>
-      <p:sp>
-        <p:nvSpPr>
-          <p:cNvPr id="18" name="Text 16"/>
-          <p:cNvSpPr txBox="1"/>
-          <p:nvPr/>
-        </p:nvSpPr>
-        <p:spPr>
-          <a:xfrm>
-            <a:off x="6949440" y="4892040"/>
-            <a:ext cx="4663440" cy="411480"/>
-          </a:xfrm>
-          <a:prstGeom prst="rect">
-            <a:avLst/>
-          </a:prstGeom>
-          <a:noFill/>
-          <a:ln/>
-        </p:spPr>
-        <p:txBody>
-          <a:bodyPr wrap="square" lIns="0" tIns="0" rIns="0" bIns="0" rtlCol="0" anchor="ctr"/>
-          <a:lstStyle/>
-          <a:p>
-            <a:pPr indent="0" marL="0">
-              <a:buNone/>
-            </a:pPr>
-            <a:r>
-              <a:rPr lang="en-US" sz="1600" b="1" dirty="0">
-                <a:solidFill>
-                  <a:schemeClr val="tx2"/>
-                </a:solidFill>
-                <a:latin typeface="Meiryo UI" pitchFamily="34" charset="0"/>
-                <a:ea typeface="Meiryo UI" pitchFamily="34" charset="-122"/>
-                <a:cs typeface="Meiryo UI" pitchFamily="34" charset="-120"/>
-              </a:rPr>
-              <a:t>さらなる条件改善</a:t>
-            </a:r>
-            <a:endParaRPr lang="en-US" sz="1600" dirty="0"/>
-          </a:p>
-        </p:txBody>
-      </p:sp>
-      <p:sp>
-        <p:nvSpPr>
-          <p:cNvPr id="19" name="Text 17"/>
-          <p:cNvSpPr txBox="1"/>
-          <p:nvPr/>
-        </p:nvSpPr>
-        <p:spPr>
-          <a:xfrm>
-            <a:off x="6949440" y="5349240"/>
-            <a:ext cx="4663440" cy="640080"/>
-          </a:xfrm>
-          <a:prstGeom prst="rect">
-            <a:avLst/>
-          </a:prstGeom>
-          <a:noFill/>
-          <a:ln/>
-        </p:spPr>
-        <p:txBody>
-          <a:bodyPr wrap="square" lIns="0" tIns="0" rIns="0" bIns="0" rtlCol="0" anchor="t"/>
-          <a:lstStyle/>
-          <a:p>
-            <a:pPr indent="0" marL="0">
-              <a:buNone/>
-            </a:pPr>
-            <a:r>
-              <a:rPr lang="en-US" sz="1400" dirty="0">
-                <a:solidFill>
-                  <a:schemeClr val="tx1"/>
-                </a:solidFill>
-                <a:latin typeface="Meiryo UI" pitchFamily="34" charset="0"/>
-                <a:ea typeface="Meiryo UI" pitchFamily="34" charset="-122"/>
-                <a:cs typeface="Meiryo UI" pitchFamily="34" charset="-120"/>
-              </a:rPr>
-              <a:t>処分費・販売単価の見直しと、新たな出し先の開拓を続ける</a:t>
+              <a:t>対象月の自動選択など、毎月の運用手順まで整えて定着させた</a:t>
             </a:r>
             <a:endParaRPr lang="en-US" sz="1400" dirty="0"/>
           </a:p>
@@ -8490,6 +9553,812 @@
             <a:fld id="{F7021451-1387-4CA6-816F-3879F97B5CBC}" type="slidenum">
               <a:rPr b="0" lang="en-US"/>
               <a:t>7</a:t>
+            </a:fld>
+            <a:endParaRPr lang="en-US"/>
+          </a:p>
+        </p:txBody>
+      </p:sp>
+    </p:spTree>
+  </p:cSld>
+  <p:clrMapOvr>
+    <a:masterClrMapping/>
+  </p:clrMapOvr>
+</p:sld>
+</file>
+
+<file path=ppt/slides/slide8.xml><?xml version="1.0" encoding="utf-8"?>
+<p:sld xmlns:a="http://schemas.openxmlformats.org/drawingml/2006/main" xmlns:r="http://schemas.openxmlformats.org/officeDocument/2006/relationships" xmlns:p="http://schemas.openxmlformats.org/presentationml/2006/main">
+  <p:cSld name="Slide 8">
+    <p:spTree>
+      <p:nvGrpSpPr>
+        <p:cNvPr id="1" name=""/>
+        <p:cNvGrpSpPr/>
+        <p:nvPr/>
+      </p:nvGrpSpPr>
+      <p:grpSpPr>
+        <a:xfrm>
+          <a:off x="0" y="0"/>
+          <a:ext cx="0" cy="0"/>
+          <a:chOff x="0" y="0"/>
+          <a:chExt cx="0" cy="0"/>
+        </a:xfrm>
+      </p:grpSpPr>
+      <p:sp>
+        <p:nvSpPr>
+          <p:cNvPr id="2" name="Text 0"/>
+          <p:cNvSpPr/>
+          <p:nvPr>
+            <p:ph idx="100" type="title" hasCustomPrompt="1"/>
+          </p:nvPr>
+        </p:nvSpPr>
+        <p:spPr>
+          <a:xfrm>
+            <a:off x="548640" y="320040"/>
+            <a:ext cx="9875520" cy="731520"/>
+          </a:xfrm>
+          <a:prstGeom prst="rect">
+            <a:avLst/>
+          </a:prstGeom>
+          <a:noFill/>
+          <a:ln/>
+        </p:spPr>
+        <p:txBody>
+          <a:bodyPr wrap="square" lIns="0" tIns="0" rIns="0" bIns="0" rtlCol="0" anchor="ctr"/>
+          <a:lstStyle/>
+          <a:p>
+            <a:pPr algn="l" indent="0" marL="0">
+              <a:buNone/>
+            </a:pPr>
+            <a:r>
+              <a:rPr lang="en-US" sz="3000" b="1" dirty="0">
+                <a:solidFill>
+                  <a:schemeClr val="tx2"/>
+                </a:solidFill>
+              </a:rPr>
+              <a:t>まとめと今後の取り組み</a:t>
+            </a:r>
+            <a:endParaRPr lang="en-US" sz="3000" dirty="0"/>
+          </a:p>
+        </p:txBody>
+      </p:sp>
+      <p:sp>
+        <p:nvSpPr>
+          <p:cNvPr id="3" name="Text 1"/>
+          <p:cNvSpPr txBox="1"/>
+          <p:nvPr/>
+        </p:nvSpPr>
+        <p:spPr>
+          <a:xfrm>
+            <a:off x="548640" y="1097280"/>
+            <a:ext cx="11064240" cy="457200"/>
+          </a:xfrm>
+          <a:prstGeom prst="rect">
+            <a:avLst/>
+          </a:prstGeom>
+          <a:noFill/>
+          <a:ln/>
+        </p:spPr>
+        <p:txBody>
+          <a:bodyPr wrap="square" lIns="0" tIns="0" rIns="0" bIns="0" rtlCol="0" anchor="ctr"/>
+          <a:lstStyle/>
+          <a:p>
+            <a:pPr indent="0" marL="0">
+              <a:buNone/>
+            </a:pPr>
+            <a:r>
+              <a:rPr lang="en-US" sz="1600" dirty="0">
+                <a:solidFill>
+                  <a:schemeClr val="accent5"/>
+                </a:solidFill>
+                <a:latin typeface="Meiryo UI" pitchFamily="34" charset="0"/>
+                <a:ea typeface="Meiryo UI" pitchFamily="34" charset="-122"/>
+                <a:cs typeface="Meiryo UI" pitchFamily="34" charset="-120"/>
+              </a:rPr>
+              <a:t>「取引条件の改善」と「仕組みづくり」の両面で、会社の収益と業務効率に貢献しました。</a:t>
+            </a:r>
+            <a:endParaRPr lang="en-US" sz="1600" dirty="0"/>
+          </a:p>
+        </p:txBody>
+      </p:sp>
+      <p:sp>
+        <p:nvSpPr>
+          <p:cNvPr id="4" name="done"/>
+          <p:cNvSpPr/>
+          <p:nvPr/>
+        </p:nvSpPr>
+        <p:spPr>
+          <a:xfrm>
+            <a:off x="548640" y="1783080"/>
+            <a:ext cx="5394960" cy="4343400"/>
+          </a:xfrm>
+          <a:prstGeom prst="roundRect">
+            <a:avLst>
+              <a:gd name="adj" fmla="val 2526"/>
+            </a:avLst>
+          </a:prstGeom>
+          <a:solidFill>
+            <a:schemeClr val="tx2"/>
+          </a:solidFill>
+          <a:ln/>
+        </p:spPr>
+      </p:sp>
+      <p:sp>
+        <p:nvSpPr>
+          <p:cNvPr id="5" name="Text 3"/>
+          <p:cNvSpPr txBox="1"/>
+          <p:nvPr/>
+        </p:nvSpPr>
+        <p:spPr>
+          <a:xfrm>
+            <a:off x="868680" y="2011680"/>
+            <a:ext cx="4754880" cy="457200"/>
+          </a:xfrm>
+          <a:prstGeom prst="rect">
+            <a:avLst/>
+          </a:prstGeom>
+          <a:noFill/>
+          <a:ln/>
+        </p:spPr>
+        <p:txBody>
+          <a:bodyPr wrap="square" lIns="0" tIns="0" rIns="0" bIns="0" rtlCol="0" anchor="ctr"/>
+          <a:lstStyle/>
+          <a:p>
+            <a:pPr indent="0" marL="0">
+              <a:buNone/>
+            </a:pPr>
+            <a:r>
+              <a:rPr lang="en-US" sz="1800" b="1" dirty="0">
+                <a:solidFill>
+                  <a:schemeClr val="bg1"/>
+                </a:solidFill>
+                <a:latin typeface="Meiryo UI" pitchFamily="34" charset="0"/>
+                <a:ea typeface="Meiryo UI" pitchFamily="34" charset="-122"/>
+                <a:cs typeface="Meiryo UI" pitchFamily="34" charset="-120"/>
+              </a:rPr>
+              <a:t>この1年間の成果</a:t>
+            </a:r>
+            <a:endParaRPr lang="en-US" sz="1800" dirty="0"/>
+          </a:p>
+        </p:txBody>
+      </p:sp>
+      <p:sp>
+        <p:nvSpPr>
+          <p:cNvPr id="6" name="Text 4"/>
+          <p:cNvSpPr txBox="1"/>
+          <p:nvPr/>
+        </p:nvSpPr>
+        <p:spPr>
+          <a:xfrm>
+            <a:off x="868680" y="2606040"/>
+            <a:ext cx="4846320" cy="3383280"/>
+          </a:xfrm>
+          <a:prstGeom prst="rect">
+            <a:avLst/>
+          </a:prstGeom>
+          <a:noFill/>
+          <a:ln/>
+        </p:spPr>
+        <p:txBody>
+          <a:bodyPr wrap="square" lIns="0" tIns="0" rIns="0" bIns="0" rtlCol="0" anchor="t"/>
+          <a:lstStyle/>
+          <a:p>
+            <a:pPr marL="342900" indent="-342900">
+              <a:spcAft>
+                <a:spcPts val="800"/>
+              </a:spcAft>
+              <a:buSzPct val="100000"/>
+              <a:buChar char="•"/>
+            </a:pPr>
+            <a:r>
+              <a:rPr lang="en-US" sz="1500" b="1" dirty="0">
+                <a:solidFill>
+                  <a:schemeClr val="bg1"/>
+                </a:solidFill>
+                <a:latin typeface="Meiryo UI" pitchFamily="34" charset="0"/>
+                <a:ea typeface="Meiryo UI" pitchFamily="34" charset="-122"/>
+                <a:cs typeface="Meiryo UI" pitchFamily="34" charset="-120"/>
+              </a:rPr>
+              <a:t>取引条件の改善で年間 約1,394万円の効果</a:t>
+            </a:r>
+            <a:endParaRPr lang="en-US" sz="1500" dirty="0"/>
+          </a:p>
+          <a:p>
+            <a:pPr marL="342900" indent="-342900">
+              <a:spcAft>
+                <a:spcPts val="800"/>
+              </a:spcAft>
+              <a:buSzPct val="100000"/>
+              <a:buChar char="•"/>
+            </a:pPr>
+            <a:r>
+              <a:rPr lang="en-US" sz="1500" dirty="0">
+                <a:solidFill>
+                  <a:schemeClr val="bg1"/>
+                </a:solidFill>
+                <a:latin typeface="Meiryo UI" pitchFamily="34" charset="0"/>
+                <a:ea typeface="Meiryo UI" pitchFamily="34" charset="-122"/>
+                <a:cs typeface="Meiryo UI" pitchFamily="34" charset="-120"/>
+              </a:rPr>
+              <a:t>C級パレットを処分から買取へ（年696万円）</a:t>
+            </a:r>
+            <a:endParaRPr lang="en-US" sz="1500" dirty="0"/>
+          </a:p>
+          <a:p>
+            <a:pPr marL="342900" indent="-342900">
+              <a:spcAft>
+                <a:spcPts val="800"/>
+              </a:spcAft>
+              <a:buSzPct val="100000"/>
+              <a:buChar char="•"/>
+            </a:pPr>
+            <a:r>
+              <a:rPr lang="en-US" sz="1500" dirty="0">
+                <a:solidFill>
+                  <a:schemeClr val="bg1"/>
+                </a:solidFill>
+                <a:latin typeface="Meiryo UI" pitchFamily="34" charset="0"/>
+                <a:ea typeface="Meiryo UI" pitchFamily="34" charset="-122"/>
+                <a:cs typeface="Meiryo UI" pitchFamily="34" charset="-120"/>
+              </a:rPr>
+              <a:t>太平洋セメントへ月70t振替（年588万円）</a:t>
+            </a:r>
+            <a:endParaRPr lang="en-US" sz="1500" dirty="0"/>
+          </a:p>
+          <a:p>
+            <a:pPr marL="342900" indent="-342900">
+              <a:spcAft>
+                <a:spcPts val="800"/>
+              </a:spcAft>
+              <a:buSzPct val="100000"/>
+              <a:buChar char="•"/>
+            </a:pPr>
+            <a:r>
+              <a:rPr lang="en-US" sz="1500" dirty="0">
+                <a:solidFill>
+                  <a:schemeClr val="bg1"/>
+                </a:solidFill>
+                <a:latin typeface="Meiryo UI" pitchFamily="34" charset="0"/>
+                <a:ea typeface="Meiryo UI" pitchFamily="34" charset="-122"/>
+                <a:cs typeface="Meiryo UI" pitchFamily="34" charset="-120"/>
+              </a:rPr>
+              <a:t>販売単価の値上げ・処分費の値下げ（年110万円）</a:t>
+            </a:r>
+            <a:endParaRPr lang="en-US" sz="1500" dirty="0"/>
+          </a:p>
+          <a:p>
+            <a:pPr marL="342900" indent="-342900">
+              <a:spcAft>
+                <a:spcPts val="800"/>
+              </a:spcAft>
+              <a:buSzPct val="100000"/>
+              <a:buChar char="•"/>
+            </a:pPr>
+            <a:r>
+              <a:rPr lang="en-US" sz="1500" dirty="0">
+                <a:solidFill>
+                  <a:schemeClr val="bg1"/>
+                </a:solidFill>
+                <a:latin typeface="Meiryo UI" pitchFamily="34" charset="0"/>
+                <a:ea typeface="Meiryo UI" pitchFamily="34" charset="-122"/>
+                <a:cs typeface="Meiryo UI" pitchFamily="34" charset="-120"/>
+              </a:rPr>
+              <a:t>請求書照合の自動化、2つのビューワーを作成</a:t>
+            </a:r>
+            <a:endParaRPr lang="en-US" sz="1500" dirty="0"/>
+          </a:p>
+          <a:p>
+            <a:pPr marL="342900" indent="-342900">
+              <a:spcAft>
+                <a:spcPts val="800"/>
+              </a:spcAft>
+              <a:buSzPct val="100000"/>
+              <a:buChar char="•"/>
+            </a:pPr>
+            <a:r>
+              <a:rPr lang="en-US" sz="1500" dirty="0">
+                <a:solidFill>
+                  <a:schemeClr val="bg1"/>
+                </a:solidFill>
+                <a:latin typeface="Meiryo UI" pitchFamily="34" charset="0"/>
+                <a:ea typeface="Meiryo UI" pitchFamily="34" charset="-122"/>
+                <a:cs typeface="Meiryo UI" pitchFamily="34" charset="-120"/>
+              </a:rPr>
+              <a:t>生成AIを業務に取り入れ、開発を短期間で実現</a:t>
+            </a:r>
+            <a:endParaRPr lang="en-US" sz="1500" dirty="0"/>
+          </a:p>
+        </p:txBody>
+      </p:sp>
+      <p:sp>
+        <p:nvSpPr>
+          <p:cNvPr id="7" name="Text 5"/>
+          <p:cNvSpPr txBox="1"/>
+          <p:nvPr/>
+        </p:nvSpPr>
+        <p:spPr>
+          <a:xfrm>
+            <a:off x="6309360" y="1828800"/>
+            <a:ext cx="5303520" cy="457200"/>
+          </a:xfrm>
+          <a:prstGeom prst="rect">
+            <a:avLst/>
+          </a:prstGeom>
+          <a:noFill/>
+          <a:ln/>
+        </p:spPr>
+        <p:txBody>
+          <a:bodyPr wrap="square" lIns="0" tIns="0" rIns="0" bIns="0" rtlCol="0" anchor="ctr"/>
+          <a:lstStyle/>
+          <a:p>
+            <a:pPr indent="0" marL="0">
+              <a:buNone/>
+            </a:pPr>
+            <a:r>
+              <a:rPr lang="en-US" sz="1800" b="1" dirty="0">
+                <a:solidFill>
+                  <a:schemeClr val="tx2"/>
+                </a:solidFill>
+                <a:latin typeface="Meiryo UI" pitchFamily="34" charset="0"/>
+                <a:ea typeface="Meiryo UI" pitchFamily="34" charset="-122"/>
+                <a:cs typeface="Meiryo UI" pitchFamily="34" charset="-120"/>
+              </a:rPr>
+              <a:t>今後の取り組み</a:t>
+            </a:r>
+            <a:endParaRPr lang="en-US" sz="1800" dirty="0"/>
+          </a:p>
+        </p:txBody>
+      </p:sp>
+      <p:sp>
+        <p:nvSpPr>
+          <p:cNvPr id="8" name="Shape 6"/>
+          <p:cNvSpPr/>
+          <p:nvPr/>
+        </p:nvSpPr>
+        <p:spPr>
+          <a:xfrm>
+            <a:off x="6309360" y="2468880"/>
+            <a:ext cx="457200" cy="457200"/>
+          </a:xfrm>
+          <a:prstGeom prst="ellipse">
+            <a:avLst/>
+          </a:prstGeom>
+          <a:solidFill>
+            <a:schemeClr val="accent2"/>
+          </a:solidFill>
+          <a:ln/>
+        </p:spPr>
+      </p:sp>
+      <p:sp>
+        <p:nvSpPr>
+          <p:cNvPr id="9" name="Text 7"/>
+          <p:cNvSpPr txBox="1"/>
+          <p:nvPr/>
+        </p:nvSpPr>
+        <p:spPr>
+          <a:xfrm>
+            <a:off x="6309360" y="2468880"/>
+            <a:ext cx="457200" cy="457200"/>
+          </a:xfrm>
+          <a:prstGeom prst="rect">
+            <a:avLst/>
+          </a:prstGeom>
+          <a:noFill/>
+          <a:ln/>
+        </p:spPr>
+        <p:txBody>
+          <a:bodyPr wrap="square" lIns="0" tIns="0" rIns="0" bIns="0" rtlCol="0" anchor="ctr"/>
+          <a:lstStyle/>
+          <a:p>
+            <a:pPr algn="ctr" indent="0" marL="0">
+              <a:buNone/>
+            </a:pPr>
+            <a:r>
+              <a:rPr lang="en-US" sz="1400" b="1" dirty="0">
+                <a:solidFill>
+                  <a:schemeClr val="bg1"/>
+                </a:solidFill>
+                <a:latin typeface="Meiryo UI" pitchFamily="34" charset="0"/>
+                <a:ea typeface="Meiryo UI" pitchFamily="34" charset="-122"/>
+                <a:cs typeface="Meiryo UI" pitchFamily="34" charset="-120"/>
+              </a:rPr>
+              <a:t>1</a:t>
+            </a:r>
+            <a:endParaRPr lang="en-US" sz="1400" dirty="0"/>
+          </a:p>
+        </p:txBody>
+      </p:sp>
+      <p:sp>
+        <p:nvSpPr>
+          <p:cNvPr id="10" name="Text 8"/>
+          <p:cNvSpPr txBox="1"/>
+          <p:nvPr/>
+        </p:nvSpPr>
+        <p:spPr>
+          <a:xfrm>
+            <a:off x="6949440" y="2423160"/>
+            <a:ext cx="4663440" cy="411480"/>
+          </a:xfrm>
+          <a:prstGeom prst="rect">
+            <a:avLst/>
+          </a:prstGeom>
+          <a:noFill/>
+          <a:ln/>
+        </p:spPr>
+        <p:txBody>
+          <a:bodyPr wrap="square" lIns="0" tIns="0" rIns="0" bIns="0" rtlCol="0" anchor="ctr"/>
+          <a:lstStyle/>
+          <a:p>
+            <a:pPr indent="0" marL="0">
+              <a:buNone/>
+            </a:pPr>
+            <a:r>
+              <a:rPr lang="en-US" sz="1600" b="1" dirty="0">
+                <a:solidFill>
+                  <a:schemeClr val="tx2"/>
+                </a:solidFill>
+                <a:latin typeface="Meiryo UI" pitchFamily="34" charset="0"/>
+                <a:ea typeface="Meiryo UI" pitchFamily="34" charset="-122"/>
+                <a:cs typeface="Meiryo UI" pitchFamily="34" charset="-120"/>
+              </a:rPr>
+              <a:t>効果額の見える化</a:t>
+            </a:r>
+            <a:endParaRPr lang="en-US" sz="1600" dirty="0"/>
+          </a:p>
+        </p:txBody>
+      </p:sp>
+      <p:sp>
+        <p:nvSpPr>
+          <p:cNvPr id="11" name="Text 9"/>
+          <p:cNvSpPr txBox="1"/>
+          <p:nvPr/>
+        </p:nvSpPr>
+        <p:spPr>
+          <a:xfrm>
+            <a:off x="6949440" y="2880360"/>
+            <a:ext cx="4663440" cy="640080"/>
+          </a:xfrm>
+          <a:prstGeom prst="rect">
+            <a:avLst/>
+          </a:prstGeom>
+          <a:noFill/>
+          <a:ln/>
+        </p:spPr>
+        <p:txBody>
+          <a:bodyPr wrap="square" lIns="0" tIns="0" rIns="0" bIns="0" rtlCol="0" anchor="t"/>
+          <a:lstStyle/>
+          <a:p>
+            <a:pPr indent="0" marL="0">
+              <a:buNone/>
+            </a:pPr>
+            <a:r>
+              <a:rPr lang="en-US" sz="1400" dirty="0">
+                <a:solidFill>
+                  <a:schemeClr val="tx1"/>
+                </a:solidFill>
+                <a:latin typeface="Meiryo UI" pitchFamily="34" charset="0"/>
+                <a:ea typeface="Meiryo UI" pitchFamily="34" charset="-122"/>
+                <a:cs typeface="Meiryo UI" pitchFamily="34" charset="-120"/>
+              </a:rPr>
+              <a:t>取り扱い量と単価から効果額を毎月集計し、実績として追えるようにする</a:t>
+            </a:r>
+            <a:endParaRPr lang="en-US" sz="1400" dirty="0"/>
+          </a:p>
+        </p:txBody>
+      </p:sp>
+      <p:sp>
+        <p:nvSpPr>
+          <p:cNvPr id="12" name="Shape 10"/>
+          <p:cNvSpPr/>
+          <p:nvPr/>
+        </p:nvSpPr>
+        <p:spPr>
+          <a:xfrm>
+            <a:off x="6309360" y="3703320"/>
+            <a:ext cx="457200" cy="457200"/>
+          </a:xfrm>
+          <a:prstGeom prst="ellipse">
+            <a:avLst/>
+          </a:prstGeom>
+          <a:solidFill>
+            <a:schemeClr val="accent2"/>
+          </a:solidFill>
+          <a:ln/>
+        </p:spPr>
+      </p:sp>
+      <p:sp>
+        <p:nvSpPr>
+          <p:cNvPr id="13" name="Text 11"/>
+          <p:cNvSpPr txBox="1"/>
+          <p:nvPr/>
+        </p:nvSpPr>
+        <p:spPr>
+          <a:xfrm>
+            <a:off x="6309360" y="3703320"/>
+            <a:ext cx="457200" cy="457200"/>
+          </a:xfrm>
+          <a:prstGeom prst="rect">
+            <a:avLst/>
+          </a:prstGeom>
+          <a:noFill/>
+          <a:ln/>
+        </p:spPr>
+        <p:txBody>
+          <a:bodyPr wrap="square" lIns="0" tIns="0" rIns="0" bIns="0" rtlCol="0" anchor="ctr"/>
+          <a:lstStyle/>
+          <a:p>
+            <a:pPr algn="ctr" indent="0" marL="0">
+              <a:buNone/>
+            </a:pPr>
+            <a:r>
+              <a:rPr lang="en-US" sz="1400" b="1" dirty="0">
+                <a:solidFill>
+                  <a:schemeClr val="bg1"/>
+                </a:solidFill>
+                <a:latin typeface="Meiryo UI" pitchFamily="34" charset="0"/>
+                <a:ea typeface="Meiryo UI" pitchFamily="34" charset="-122"/>
+                <a:cs typeface="Meiryo UI" pitchFamily="34" charset="-120"/>
+              </a:rPr>
+              <a:t>2</a:t>
+            </a:r>
+            <a:endParaRPr lang="en-US" sz="1400" dirty="0"/>
+          </a:p>
+        </p:txBody>
+      </p:sp>
+      <p:sp>
+        <p:nvSpPr>
+          <p:cNvPr id="14" name="Text 12"/>
+          <p:cNvSpPr txBox="1"/>
+          <p:nvPr/>
+        </p:nvSpPr>
+        <p:spPr>
+          <a:xfrm>
+            <a:off x="6949440" y="3657600"/>
+            <a:ext cx="4663440" cy="411480"/>
+          </a:xfrm>
+          <a:prstGeom prst="rect">
+            <a:avLst/>
+          </a:prstGeom>
+          <a:noFill/>
+          <a:ln/>
+        </p:spPr>
+        <p:txBody>
+          <a:bodyPr wrap="square" lIns="0" tIns="0" rIns="0" bIns="0" rtlCol="0" anchor="ctr"/>
+          <a:lstStyle/>
+          <a:p>
+            <a:pPr indent="0" marL="0">
+              <a:buNone/>
+            </a:pPr>
+            <a:r>
+              <a:rPr lang="en-US" sz="1600" b="1" dirty="0">
+                <a:solidFill>
+                  <a:schemeClr val="tx2"/>
+                </a:solidFill>
+                <a:latin typeface="Meiryo UI" pitchFamily="34" charset="0"/>
+                <a:ea typeface="Meiryo UI" pitchFamily="34" charset="-122"/>
+                <a:cs typeface="Meiryo UI" pitchFamily="34" charset="-120"/>
+              </a:rPr>
+              <a:t>ツールの定着と展開</a:t>
+            </a:r>
+            <a:endParaRPr lang="en-US" sz="1600" dirty="0"/>
+          </a:p>
+        </p:txBody>
+      </p:sp>
+      <p:sp>
+        <p:nvSpPr>
+          <p:cNvPr id="15" name="Text 13"/>
+          <p:cNvSpPr txBox="1"/>
+          <p:nvPr/>
+        </p:nvSpPr>
+        <p:spPr>
+          <a:xfrm>
+            <a:off x="6949440" y="4114800"/>
+            <a:ext cx="4663440" cy="640080"/>
+          </a:xfrm>
+          <a:prstGeom prst="rect">
+            <a:avLst/>
+          </a:prstGeom>
+          <a:noFill/>
+          <a:ln/>
+        </p:spPr>
+        <p:txBody>
+          <a:bodyPr wrap="square" lIns="0" tIns="0" rIns="0" bIns="0" rtlCol="0" anchor="t"/>
+          <a:lstStyle/>
+          <a:p>
+            <a:pPr indent="0" marL="0">
+              <a:buNone/>
+            </a:pPr>
+            <a:r>
+              <a:rPr lang="en-US" sz="1400" dirty="0">
+                <a:solidFill>
+                  <a:schemeClr val="tx1"/>
+                </a:solidFill>
+                <a:latin typeface="Meiryo UI" pitchFamily="34" charset="0"/>
+                <a:ea typeface="Meiryo UI" pitchFamily="34" charset="-122"/>
+                <a:cs typeface="Meiryo UI" pitchFamily="34" charset="-120"/>
+              </a:rPr>
+              <a:t>照合ツール・ビューワーを他の運送会社や他の業務にも広げる</a:t>
+            </a:r>
+            <a:endParaRPr lang="en-US" sz="1400" dirty="0"/>
+          </a:p>
+        </p:txBody>
+      </p:sp>
+      <p:sp>
+        <p:nvSpPr>
+          <p:cNvPr id="16" name="Shape 14"/>
+          <p:cNvSpPr/>
+          <p:nvPr/>
+        </p:nvSpPr>
+        <p:spPr>
+          <a:xfrm>
+            <a:off x="6309360" y="4937760"/>
+            <a:ext cx="457200" cy="457200"/>
+          </a:xfrm>
+          <a:prstGeom prst="ellipse">
+            <a:avLst/>
+          </a:prstGeom>
+          <a:solidFill>
+            <a:schemeClr val="accent2"/>
+          </a:solidFill>
+          <a:ln/>
+        </p:spPr>
+      </p:sp>
+      <p:sp>
+        <p:nvSpPr>
+          <p:cNvPr id="17" name="Text 15"/>
+          <p:cNvSpPr txBox="1"/>
+          <p:nvPr/>
+        </p:nvSpPr>
+        <p:spPr>
+          <a:xfrm>
+            <a:off x="6309360" y="4937760"/>
+            <a:ext cx="457200" cy="457200"/>
+          </a:xfrm>
+          <a:prstGeom prst="rect">
+            <a:avLst/>
+          </a:prstGeom>
+          <a:noFill/>
+          <a:ln/>
+        </p:spPr>
+        <p:txBody>
+          <a:bodyPr wrap="square" lIns="0" tIns="0" rIns="0" bIns="0" rtlCol="0" anchor="ctr"/>
+          <a:lstStyle/>
+          <a:p>
+            <a:pPr algn="ctr" indent="0" marL="0">
+              <a:buNone/>
+            </a:pPr>
+            <a:r>
+              <a:rPr lang="en-US" sz="1400" b="1" dirty="0">
+                <a:solidFill>
+                  <a:schemeClr val="bg1"/>
+                </a:solidFill>
+                <a:latin typeface="Meiryo UI" pitchFamily="34" charset="0"/>
+                <a:ea typeface="Meiryo UI" pitchFamily="34" charset="-122"/>
+                <a:cs typeface="Meiryo UI" pitchFamily="34" charset="-120"/>
+              </a:rPr>
+              <a:t>3</a:t>
+            </a:r>
+            <a:endParaRPr lang="en-US" sz="1400" dirty="0"/>
+          </a:p>
+        </p:txBody>
+      </p:sp>
+      <p:sp>
+        <p:nvSpPr>
+          <p:cNvPr id="18" name="Text 16"/>
+          <p:cNvSpPr txBox="1"/>
+          <p:nvPr/>
+        </p:nvSpPr>
+        <p:spPr>
+          <a:xfrm>
+            <a:off x="6949440" y="4892040"/>
+            <a:ext cx="4663440" cy="411480"/>
+          </a:xfrm>
+          <a:prstGeom prst="rect">
+            <a:avLst/>
+          </a:prstGeom>
+          <a:noFill/>
+          <a:ln/>
+        </p:spPr>
+        <p:txBody>
+          <a:bodyPr wrap="square" lIns="0" tIns="0" rIns="0" bIns="0" rtlCol="0" anchor="ctr"/>
+          <a:lstStyle/>
+          <a:p>
+            <a:pPr indent="0" marL="0">
+              <a:buNone/>
+            </a:pPr>
+            <a:r>
+              <a:rPr lang="en-US" sz="1600" b="1" dirty="0">
+                <a:solidFill>
+                  <a:schemeClr val="tx2"/>
+                </a:solidFill>
+                <a:latin typeface="Meiryo UI" pitchFamily="34" charset="0"/>
+                <a:ea typeface="Meiryo UI" pitchFamily="34" charset="-122"/>
+                <a:cs typeface="Meiryo UI" pitchFamily="34" charset="-120"/>
+              </a:rPr>
+              <a:t>さらなる条件改善</a:t>
+            </a:r>
+            <a:endParaRPr lang="en-US" sz="1600" dirty="0"/>
+          </a:p>
+        </p:txBody>
+      </p:sp>
+      <p:sp>
+        <p:nvSpPr>
+          <p:cNvPr id="19" name="Text 17"/>
+          <p:cNvSpPr txBox="1"/>
+          <p:nvPr/>
+        </p:nvSpPr>
+        <p:spPr>
+          <a:xfrm>
+            <a:off x="6949440" y="5349240"/>
+            <a:ext cx="4663440" cy="640080"/>
+          </a:xfrm>
+          <a:prstGeom prst="rect">
+            <a:avLst/>
+          </a:prstGeom>
+          <a:noFill/>
+          <a:ln/>
+        </p:spPr>
+        <p:txBody>
+          <a:bodyPr wrap="square" lIns="0" tIns="0" rIns="0" bIns="0" rtlCol="0" anchor="t"/>
+          <a:lstStyle/>
+          <a:p>
+            <a:pPr indent="0" marL="0">
+              <a:buNone/>
+            </a:pPr>
+            <a:r>
+              <a:rPr lang="en-US" sz="1400" dirty="0">
+                <a:solidFill>
+                  <a:schemeClr val="tx1"/>
+                </a:solidFill>
+                <a:latin typeface="Meiryo UI" pitchFamily="34" charset="0"/>
+                <a:ea typeface="Meiryo UI" pitchFamily="34" charset="-122"/>
+                <a:cs typeface="Meiryo UI" pitchFamily="34" charset="-120"/>
+              </a:rPr>
+              <a:t>処分費・販売単価の見直しと、新たな出し先の開拓を続ける</a:t>
+            </a:r>
+            <a:endParaRPr lang="en-US" sz="1400" dirty="0"/>
+          </a:p>
+        </p:txBody>
+      </p:sp>
+      <p:sp>
+        <p:nvSpPr>
+          <p:cNvPr id="25" name="Slide Number Placeholder 0"/>
+          <p:cNvSpPr>
+            <a:spLocks noGrp="1"/>
+          </p:cNvSpPr>
+          <p:nvPr>
+            <p:ph type="sldNum" sz="quarter" idx="4294967295"/>
+          </p:nvPr>
+        </p:nvSpPr>
+        <p:spPr>
+          <a:xfrm>
+            <a:off x="11155680" y="6400800"/>
+            <a:ext cx="548640" cy="274320"/>
+          </a:xfrm>
+          <a:prstGeom prst="rect">
+            <a:avLst/>
+          </a:prstGeom>
+          <a:extLst>
+            <a:ext uri="{C572A759-6A51-4108-AA02-DFA0A04FC94B}">
+              <ma14:wrappingTextBoxFlag xmlns:ma14="http://schemas.microsoft.com/office/mac/drawingml/2011/main" val="0"/>
+            </a:ext>
+          </a:extLst>
+        </p:spPr>
+        <p:txBody>
+          <a:bodyPr/>
+          <a:lstStyle>
+            <a:lvl1pPr>
+              <a:defRPr sz="900">
+                <a:solidFill>
+                  <a:schemeClr val="accent5"/>
+                </a:solidFill>
+              </a:defRPr>
+            </a:lvl1pPr>
+          </a:lstStyle>
+          <a:p>
+            <a:pPr algn="r"/>
+            <a:fld id="{F7021451-1387-4CA6-816F-3879F97B5CBC}" type="slidenum">
+              <a:rPr b="0" lang="en-US"/>
+              <a:t>8</a:t>
             </a:fld>
             <a:endParaRPr lang="en-US"/>
           </a:p>
